--- a/Modules/03-Data-Architect/projects/Project 1 - Human Resources Database Design/report/HR_Database_Design_Project_Arjun_Avalakki_Mohan.pptx
+++ b/Modules/03-Data-Architect/projects/Project 1 - Human Resources Database Design/report/HR_Database_Design_Project_Arjun_Avalakki_Mohan.pptx
@@ -308,7 +308,7 @@
 <file path=ppt/revisionInfo.xml><?xml version="1.0" encoding="utf-8"?>
 <p1510:revInfo xmlns:a="http://schemas.openxmlformats.org/drawingml/2006/main" xmlns:r="http://schemas.openxmlformats.org/officeDocument/2006/relationships" xmlns:p1510="http://schemas.microsoft.com/office/powerpoint/2015/10/main">
   <p1510:revLst>
-    <p1510:client id="{9B6E52DC-C5BE-4542-A4C5-5F92B55F5FAD}" v="78" dt="2026-05-20T03:57:45.726"/>
+    <p1510:client id="{CEECDE29-5A9E-4E44-A6A5-88C1A3F6F982}" v="2" dt="2026-05-21T05:55:29.432"/>
   </p1510:revLst>
 </p1510:revInfo>
 </file>
@@ -318,7 +318,7 @@
   <pc:docChgLst>
     <pc:chgData name="ARJUN AVALAKKI MOHAN" userId="be4ab9aaf12c5868" providerId="LiveId" clId="{C81E60EF-EF5F-4B4B-A4E1-3178676F15CC}"/>
     <pc:docChg chg="undo custSel addSld delSld modSld">
-      <pc:chgData name="ARJUN AVALAKKI MOHAN" userId="be4ab9aaf12c5868" providerId="LiveId" clId="{C81E60EF-EF5F-4B4B-A4E1-3178676F15CC}" dt="2026-05-20T03:58:05.908" v="765" actId="2696"/>
+      <pc:chgData name="ARJUN AVALAKKI MOHAN" userId="be4ab9aaf12c5868" providerId="LiveId" clId="{C81E60EF-EF5F-4B4B-A4E1-3178676F15CC}" dt="2026-05-21T05:56:26.847" v="815" actId="14100"/>
       <pc:docMkLst>
         <pc:docMk/>
       </pc:docMkLst>
@@ -336,13 +336,6 @@
             <ac:spMk id="180" creationId="{00000000-0000-0000-0000-000000000000}"/>
           </ac:spMkLst>
         </pc:spChg>
-      </pc:sldChg>
-      <pc:sldChg chg="del">
-        <pc:chgData name="ARJUN AVALAKKI MOHAN" userId="be4ab9aaf12c5868" providerId="LiveId" clId="{C81E60EF-EF5F-4B4B-A4E1-3178676F15CC}" dt="2026-05-19T04:49:11.549" v="72" actId="47"/>
-        <pc:sldMkLst>
-          <pc:docMk/>
-          <pc:sldMk cId="0" sldId="257"/>
-        </pc:sldMkLst>
       </pc:sldChg>
       <pc:sldChg chg="modNotes">
         <pc:chgData name="ARJUN AVALAKKI MOHAN" userId="be4ab9aaf12c5868" providerId="LiveId" clId="{C81E60EF-EF5F-4B4B-A4E1-3178676F15CC}" dt="2026-05-20T03:54:24.689" v="721"/>
@@ -372,38 +365,6 @@
             <ac:spMk id="2" creationId="{FE40C933-DA7A-1810-91D7-F01F73C610E0}"/>
           </ac:spMkLst>
         </pc:spChg>
-        <pc:spChg chg="add del mod">
-          <ac:chgData name="ARJUN AVALAKKI MOHAN" userId="be4ab9aaf12c5868" providerId="LiveId" clId="{C81E60EF-EF5F-4B4B-A4E1-3178676F15CC}" dt="2026-05-19T05:24:25.796" v="326" actId="478"/>
-          <ac:spMkLst>
-            <pc:docMk/>
-            <pc:sldMk cId="0" sldId="261"/>
-            <ac:spMk id="3" creationId="{44A6DCCF-22A1-B477-2144-B5C0BE8D55FD}"/>
-          </ac:spMkLst>
-        </pc:spChg>
-        <pc:spChg chg="add del mod">
-          <ac:chgData name="ARJUN AVALAKKI MOHAN" userId="be4ab9aaf12c5868" providerId="LiveId" clId="{C81E60EF-EF5F-4B4B-A4E1-3178676F15CC}" dt="2026-05-19T05:17:13.091" v="254" actId="478"/>
-          <ac:spMkLst>
-            <pc:docMk/>
-            <pc:sldMk cId="0" sldId="261"/>
-            <ac:spMk id="4" creationId="{D810D321-9DF3-44AD-BFED-BF8FBDF11615}"/>
-          </ac:spMkLst>
-        </pc:spChg>
-        <pc:spChg chg="add del mod">
-          <ac:chgData name="ARJUN AVALAKKI MOHAN" userId="be4ab9aaf12c5868" providerId="LiveId" clId="{C81E60EF-EF5F-4B4B-A4E1-3178676F15CC}" dt="2026-05-19T05:21:12.256" v="292" actId="478"/>
-          <ac:spMkLst>
-            <pc:docMk/>
-            <pc:sldMk cId="0" sldId="261"/>
-            <ac:spMk id="6" creationId="{BFE94BE5-4FEA-67CF-AC80-5E9681C130C9}"/>
-          </ac:spMkLst>
-        </pc:spChg>
-        <pc:spChg chg="add del mod">
-          <ac:chgData name="ARJUN AVALAKKI MOHAN" userId="be4ab9aaf12c5868" providerId="LiveId" clId="{C81E60EF-EF5F-4B4B-A4E1-3178676F15CC}" dt="2026-05-19T05:21:12.256" v="292" actId="478"/>
-          <ac:spMkLst>
-            <pc:docMk/>
-            <pc:sldMk cId="0" sldId="261"/>
-            <ac:spMk id="8" creationId="{4FA51857-C63C-ACA7-F14C-C506AB41608C}"/>
-          </ac:spMkLst>
-        </pc:spChg>
         <pc:spChg chg="add mod">
           <ac:chgData name="ARJUN AVALAKKI MOHAN" userId="be4ab9aaf12c5868" providerId="LiveId" clId="{C81E60EF-EF5F-4B4B-A4E1-3178676F15CC}" dt="2026-05-19T05:54:56.695" v="560" actId="1076"/>
           <ac:spMkLst>
@@ -420,14 +381,6 @@
             <ac:spMk id="12" creationId="{38CBDC82-8DFC-5ACF-17A9-83D6B73CC543}"/>
           </ac:spMkLst>
         </pc:spChg>
-        <pc:spChg chg="add del mod">
-          <ac:chgData name="ARJUN AVALAKKI MOHAN" userId="be4ab9aaf12c5868" providerId="LiveId" clId="{C81E60EF-EF5F-4B4B-A4E1-3178676F15CC}" dt="2026-05-19T05:51:39.675" v="531" actId="478"/>
-          <ac:spMkLst>
-            <pc:docMk/>
-            <pc:sldMk cId="0" sldId="261"/>
-            <ac:spMk id="14" creationId="{BDEA5CE7-1937-B8A1-E603-3803D6591177}"/>
-          </ac:spMkLst>
-        </pc:spChg>
         <pc:spChg chg="add mod">
           <ac:chgData name="ARJUN AVALAKKI MOHAN" userId="be4ab9aaf12c5868" providerId="LiveId" clId="{C81E60EF-EF5F-4B4B-A4E1-3178676F15CC}" dt="2026-05-19T05:54:48.034" v="558" actId="14100"/>
           <ac:spMkLst>
@@ -442,14 +395,6 @@
             <pc:docMk/>
             <pc:sldMk cId="0" sldId="261"/>
             <ac:spMk id="212" creationId="{00000000-0000-0000-0000-000000000000}"/>
-          </ac:spMkLst>
-        </pc:spChg>
-        <pc:spChg chg="add del mod">
-          <ac:chgData name="ARJUN AVALAKKI MOHAN" userId="be4ab9aaf12c5868" providerId="LiveId" clId="{C81E60EF-EF5F-4B4B-A4E1-3178676F15CC}" dt="2026-05-19T05:52:14.302" v="533" actId="478"/>
-          <ac:spMkLst>
-            <pc:docMk/>
-            <pc:sldMk cId="0" sldId="261"/>
-            <ac:spMk id="213" creationId="{00000000-0000-0000-0000-000000000000}"/>
           </ac:spMkLst>
         </pc:spChg>
       </pc:sldChg>
@@ -513,19 +458,75 @@
           <pc:sldMk cId="0" sldId="266"/>
         </pc:sldMkLst>
       </pc:sldChg>
-      <pc:sldChg chg="modNotes">
-        <pc:chgData name="ARJUN AVALAKKI MOHAN" userId="be4ab9aaf12c5868" providerId="LiveId" clId="{C81E60EF-EF5F-4B4B-A4E1-3178676F15CC}" dt="2026-05-20T03:54:24.689" v="721"/>
+      <pc:sldChg chg="addSp delSp modSp mod modNotes">
+        <pc:chgData name="ARJUN AVALAKKI MOHAN" userId="be4ab9aaf12c5868" providerId="LiveId" clId="{C81E60EF-EF5F-4B4B-A4E1-3178676F15CC}" dt="2026-05-21T05:26:18.368" v="803" actId="692"/>
         <pc:sldMkLst>
           <pc:docMk/>
           <pc:sldMk cId="0" sldId="267"/>
         </pc:sldMkLst>
+        <pc:spChg chg="mod">
+          <ac:chgData name="ARJUN AVALAKKI MOHAN" userId="be4ab9aaf12c5868" providerId="LiveId" clId="{C81E60EF-EF5F-4B4B-A4E1-3178676F15CC}" dt="2026-05-21T05:20:21.790" v="767" actId="6549"/>
+          <ac:spMkLst>
+            <pc:docMk/>
+            <pc:sldMk cId="0" sldId="267"/>
+            <ac:spMk id="249" creationId="{00000000-0000-0000-0000-000000000000}"/>
+          </ac:spMkLst>
+        </pc:spChg>
+        <pc:picChg chg="add del mod">
+          <ac:chgData name="ARJUN AVALAKKI MOHAN" userId="be4ab9aaf12c5868" providerId="LiveId" clId="{C81E60EF-EF5F-4B4B-A4E1-3178676F15CC}" dt="2026-05-21T05:25:39.535" v="796" actId="478"/>
+          <ac:picMkLst>
+            <pc:docMk/>
+            <pc:sldMk cId="0" sldId="267"/>
+            <ac:picMk id="2" creationId="{3DDA4270-4AEF-F9B2-A951-BA71ABA69973}"/>
+          </ac:picMkLst>
+        </pc:picChg>
+        <pc:picChg chg="add mod">
+          <ac:chgData name="ARJUN AVALAKKI MOHAN" userId="be4ab9aaf12c5868" providerId="LiveId" clId="{C81E60EF-EF5F-4B4B-A4E1-3178676F15CC}" dt="2026-05-21T05:26:18.368" v="803" actId="692"/>
+          <ac:picMkLst>
+            <pc:docMk/>
+            <pc:sldMk cId="0" sldId="267"/>
+            <ac:picMk id="4" creationId="{A5722C49-878A-9ADD-0D36-BBD86256153F}"/>
+          </ac:picMkLst>
+        </pc:picChg>
+        <pc:picChg chg="del">
+          <ac:chgData name="ARJUN AVALAKKI MOHAN" userId="be4ab9aaf12c5868" providerId="LiveId" clId="{C81E60EF-EF5F-4B4B-A4E1-3178676F15CC}" dt="2026-05-21T05:20:17.941" v="766" actId="478"/>
+          <ac:picMkLst>
+            <pc:docMk/>
+            <pc:sldMk cId="0" sldId="267"/>
+            <ac:picMk id="250" creationId="{00000000-0000-0000-0000-000000000000}"/>
+          </ac:picMkLst>
+        </pc:picChg>
       </pc:sldChg>
-      <pc:sldChg chg="modNotes">
-        <pc:chgData name="ARJUN AVALAKKI MOHAN" userId="be4ab9aaf12c5868" providerId="LiveId" clId="{C81E60EF-EF5F-4B4B-A4E1-3178676F15CC}" dt="2026-05-20T03:54:24.689" v="721"/>
+      <pc:sldChg chg="addSp delSp modSp mod modNotes">
+        <pc:chgData name="ARJUN AVALAKKI MOHAN" userId="be4ab9aaf12c5868" providerId="LiveId" clId="{C81E60EF-EF5F-4B4B-A4E1-3178676F15CC}" dt="2026-05-21T05:56:26.847" v="815" actId="14100"/>
         <pc:sldMkLst>
           <pc:docMk/>
           <pc:sldMk cId="0" sldId="268"/>
         </pc:sldMkLst>
+        <pc:spChg chg="mod">
+          <ac:chgData name="ARJUN AVALAKKI MOHAN" userId="be4ab9aaf12c5868" providerId="LiveId" clId="{C81E60EF-EF5F-4B4B-A4E1-3178676F15CC}" dt="2026-05-21T05:55:20.654" v="806" actId="20577"/>
+          <ac:spMkLst>
+            <pc:docMk/>
+            <pc:sldMk cId="0" sldId="268"/>
+            <ac:spMk id="256" creationId="{00000000-0000-0000-0000-000000000000}"/>
+          </ac:spMkLst>
+        </pc:spChg>
+        <pc:picChg chg="add mod">
+          <ac:chgData name="ARJUN AVALAKKI MOHAN" userId="be4ab9aaf12c5868" providerId="LiveId" clId="{C81E60EF-EF5F-4B4B-A4E1-3178676F15CC}" dt="2026-05-21T05:56:26.847" v="815" actId="14100"/>
+          <ac:picMkLst>
+            <pc:docMk/>
+            <pc:sldMk cId="0" sldId="268"/>
+            <ac:picMk id="2" creationId="{83237B88-52C8-4925-B904-FB0AF33100D6}"/>
+          </ac:picMkLst>
+        </pc:picChg>
+        <pc:picChg chg="del">
+          <ac:chgData name="ARJUN AVALAKKI MOHAN" userId="be4ab9aaf12c5868" providerId="LiveId" clId="{C81E60EF-EF5F-4B4B-A4E1-3178676F15CC}" dt="2026-05-21T05:55:16.507" v="804" actId="478"/>
+          <ac:picMkLst>
+            <pc:docMk/>
+            <pc:sldMk cId="0" sldId="268"/>
+            <ac:picMk id="257" creationId="{00000000-0000-0000-0000-000000000000}"/>
+          </ac:picMkLst>
+        </pc:picChg>
       </pc:sldChg>
       <pc:sldChg chg="modNotes">
         <pc:chgData name="ARJUN AVALAKKI MOHAN" userId="be4ab9aaf12c5868" providerId="LiveId" clId="{C81E60EF-EF5F-4B4B-A4E1-3178676F15CC}" dt="2026-05-20T03:54:24.689" v="721"/>
@@ -595,55 +596,6 @@
         <pc:sldMkLst>
           <pc:docMk/>
           <pc:sldMk cId="0" sldId="279"/>
-        </pc:sldMkLst>
-      </pc:sldChg>
-      <pc:sldChg chg="del">
-        <pc:chgData name="ARJUN AVALAKKI MOHAN" userId="be4ab9aaf12c5868" providerId="LiveId" clId="{C81E60EF-EF5F-4B4B-A4E1-3178676F15CC}" dt="2026-05-19T05:47:12.719" v="496" actId="47"/>
-        <pc:sldMkLst>
-          <pc:docMk/>
-          <pc:sldMk cId="0" sldId="280"/>
-        </pc:sldMkLst>
-      </pc:sldChg>
-      <pc:sldChg chg="del">
-        <pc:chgData name="ARJUN AVALAKKI MOHAN" userId="be4ab9aaf12c5868" providerId="LiveId" clId="{C81E60EF-EF5F-4B4B-A4E1-3178676F15CC}" dt="2026-05-19T05:47:12.719" v="496" actId="47"/>
-        <pc:sldMkLst>
-          <pc:docMk/>
-          <pc:sldMk cId="0" sldId="281"/>
-        </pc:sldMkLst>
-      </pc:sldChg>
-      <pc:sldChg chg="del">
-        <pc:chgData name="ARJUN AVALAKKI MOHAN" userId="be4ab9aaf12c5868" providerId="LiveId" clId="{C81E60EF-EF5F-4B4B-A4E1-3178676F15CC}" dt="2026-05-19T05:47:12.719" v="496" actId="47"/>
-        <pc:sldMkLst>
-          <pc:docMk/>
-          <pc:sldMk cId="0" sldId="282"/>
-        </pc:sldMkLst>
-      </pc:sldChg>
-      <pc:sldChg chg="del">
-        <pc:chgData name="ARJUN AVALAKKI MOHAN" userId="be4ab9aaf12c5868" providerId="LiveId" clId="{C81E60EF-EF5F-4B4B-A4E1-3178676F15CC}" dt="2026-05-19T05:47:12.719" v="496" actId="47"/>
-        <pc:sldMkLst>
-          <pc:docMk/>
-          <pc:sldMk cId="0" sldId="283"/>
-        </pc:sldMkLst>
-      </pc:sldChg>
-      <pc:sldChg chg="del">
-        <pc:chgData name="ARJUN AVALAKKI MOHAN" userId="be4ab9aaf12c5868" providerId="LiveId" clId="{C81E60EF-EF5F-4B4B-A4E1-3178676F15CC}" dt="2026-05-19T05:47:12.719" v="496" actId="47"/>
-        <pc:sldMkLst>
-          <pc:docMk/>
-          <pc:sldMk cId="0" sldId="284"/>
-        </pc:sldMkLst>
-      </pc:sldChg>
-      <pc:sldChg chg="del">
-        <pc:chgData name="ARJUN AVALAKKI MOHAN" userId="be4ab9aaf12c5868" providerId="LiveId" clId="{C81E60EF-EF5F-4B4B-A4E1-3178676F15CC}" dt="2026-05-19T05:47:39.675" v="497" actId="47"/>
-        <pc:sldMkLst>
-          <pc:docMk/>
-          <pc:sldMk cId="0" sldId="285"/>
-        </pc:sldMkLst>
-      </pc:sldChg>
-      <pc:sldChg chg="del">
-        <pc:chgData name="ARJUN AVALAKKI MOHAN" userId="be4ab9aaf12c5868" providerId="LiveId" clId="{C81E60EF-EF5F-4B4B-A4E1-3178676F15CC}" dt="2026-05-19T05:47:39.675" v="497" actId="47"/>
-        <pc:sldMkLst>
-          <pc:docMk/>
-          <pc:sldMk cId="0" sldId="286"/>
         </pc:sldMkLst>
       </pc:sldChg>
       <pc:sldChg chg="modSp new mod">
@@ -28204,7 +28156,7 @@
               <a:buChar char="●"/>
             </a:pPr>
             <a:r>
-              <a:rPr lang="en" sz="1900" b="1">
+              <a:rPr lang="en" sz="1900" b="1" dirty="0">
                 <a:latin typeface="Open Sans"/>
                 <a:ea typeface="Open Sans"/>
                 <a:cs typeface="Open Sans"/>
@@ -28212,7 +28164,7 @@
               </a:rPr>
               <a:t>Conceptual</a:t>
             </a:r>
-            <a:endParaRPr sz="1900" b="1">
+            <a:endParaRPr sz="1900" b="1" dirty="0">
               <a:latin typeface="Open Sans"/>
               <a:ea typeface="Open Sans"/>
               <a:cs typeface="Open Sans"/>
@@ -28233,7 +28185,7 @@
               <a:buNone/>
             </a:pPr>
             <a:r>
-              <a:rPr lang="en" sz="1200">
+              <a:rPr lang="en" sz="1200" dirty="0">
                 <a:solidFill>
                   <a:srgbClr val="525C65"/>
                 </a:solidFill>
@@ -28247,7 +28199,7 @@
               </a:rPr>
               <a:t>This is the most general level of data modeling. At the conceptual level, you should be thinking about creating entities that represent business objects for the database. Think broadly here. Attributes (or column names) are not required at this point, but relationship lines are required (although Crow's foot notation is not needed at this level). Create at least three entities for this model; thinking about the 3NF will aid you in deciding the type of entities to create.</a:t>
             </a:r>
-            <a:endParaRPr sz="1200">
+            <a:endParaRPr sz="1200" dirty="0">
               <a:solidFill>
                 <a:srgbClr val="525C65"/>
               </a:solidFill>
@@ -28274,7 +28226,7 @@
               <a:buNone/>
             </a:pPr>
             <a:r>
-              <a:rPr lang="en" sz="1200">
+              <a:rPr lang="en" sz="1200" dirty="0">
                 <a:solidFill>
                   <a:srgbClr val="525C65"/>
                 </a:solidFill>
@@ -28288,7 +28240,7 @@
               </a:rPr>
               <a:t>Use Lucidchart’s built-in template for DBMS ER Diagram UML.</a:t>
             </a:r>
-            <a:endParaRPr sz="1200">
+            <a:endParaRPr sz="1200" dirty="0">
               <a:solidFill>
                 <a:srgbClr val="525C65"/>
               </a:solidFill>
@@ -28314,7 +28266,7 @@
               </a:spcAft>
               <a:buNone/>
             </a:pPr>
-            <a:endParaRPr sz="1200">
+            <a:endParaRPr sz="1200" dirty="0">
               <a:solidFill>
                 <a:srgbClr val="525C65"/>
               </a:solidFill>
@@ -28340,48 +28292,7 @@
               </a:spcAft>
               <a:buNone/>
             </a:pPr>
-            <a:r>
-              <a:rPr lang="en" sz="1200">
-                <a:solidFill>
-                  <a:srgbClr val="FF0000"/>
-                </a:solidFill>
-                <a:highlight>
-                  <a:srgbClr val="FFFFFF"/>
-                </a:highlight>
-                <a:latin typeface="Open Sans"/>
-                <a:ea typeface="Open Sans"/>
-                <a:cs typeface="Open Sans"/>
-                <a:sym typeface="Open Sans"/>
-              </a:rPr>
-              <a:t>** Replace example screenshot below with your response</a:t>
-            </a:r>
-            <a:endParaRPr sz="1200">
-              <a:solidFill>
-                <a:srgbClr val="FF0000"/>
-              </a:solidFill>
-              <a:highlight>
-                <a:srgbClr val="FFFFFF"/>
-              </a:highlight>
-              <a:latin typeface="Open Sans"/>
-              <a:ea typeface="Open Sans"/>
-              <a:cs typeface="Open Sans"/>
-              <a:sym typeface="Open Sans"/>
-            </a:endParaRPr>
-          </a:p>
-          <a:p>
-            <a:pPr marL="0" lvl="0" indent="0" algn="l" rtl="0">
-              <a:lnSpc>
-                <a:spcPct val="170000"/>
-              </a:lnSpc>
-              <a:spcBef>
-                <a:spcPts val="0"/>
-              </a:spcBef>
-              <a:spcAft>
-                <a:spcPts val="0"/>
-              </a:spcAft>
-              <a:buNone/>
-            </a:pPr>
-            <a:endParaRPr sz="1200">
+            <a:endParaRPr sz="1200" dirty="0">
               <a:solidFill>
                 <a:srgbClr val="525C65"/>
               </a:solidFill>
@@ -28409,41 +28320,42 @@
               <a:buFont typeface="Arial"/>
               <a:buNone/>
             </a:pPr>
-            <a:endParaRPr sz="1900"/>
+            <a:endParaRPr sz="1900" dirty="0"/>
           </a:p>
         </p:txBody>
       </p:sp>
       <p:pic>
         <p:nvPicPr>
-          <p:cNvPr id="250" name="Google Shape;250;p62"/>
-          <p:cNvPicPr preferRelativeResize="0"/>
+          <p:cNvPr id="4" name="Picture 3">
+            <a:extLst>
+              <a:ext uri="{FF2B5EF4-FFF2-40B4-BE49-F238E27FC236}">
+                <a16:creationId xmlns:a16="http://schemas.microsoft.com/office/drawing/2014/main" id="{A5722C49-878A-9ADD-0D36-BBD86256153F}"/>
+              </a:ext>
+            </a:extLst>
+          </p:cNvPr>
+          <p:cNvPicPr>
+            <a:picLocks noChangeAspect="1"/>
+          </p:cNvPicPr>
           <p:nvPr/>
         </p:nvPicPr>
         <p:blipFill>
-          <a:blip r:embed="rId3">
-            <a:alphaModFix/>
-          </a:blip>
+          <a:blip r:embed="rId3"/>
           <a:stretch>
             <a:fillRect/>
           </a:stretch>
         </p:blipFill>
         <p:spPr>
           <a:xfrm>
-            <a:off x="755850" y="5786403"/>
-            <a:ext cx="6085425" cy="2570274"/>
+            <a:off x="464820" y="5029200"/>
+            <a:ext cx="6850380" cy="4572000"/>
           </a:xfrm>
           <a:prstGeom prst="rect">
             <a:avLst/>
           </a:prstGeom>
-          <a:noFill/>
-          <a:ln w="9525" cap="flat" cmpd="sng">
+          <a:ln>
             <a:solidFill>
-              <a:schemeClr val="dk2"/>
+              <a:schemeClr val="tx1"/>
             </a:solidFill>
-            <a:prstDash val="solid"/>
-            <a:round/>
-            <a:headEnd type="none" w="sm" len="sm"/>
-            <a:tailEnd type="none" w="sm" len="sm"/>
           </a:ln>
         </p:spPr>
       </p:pic>
@@ -28551,7 +28463,7 @@
               <a:buChar char="●"/>
             </a:pPr>
             <a:r>
-              <a:rPr lang="en" sz="1900" b="1">
+              <a:rPr lang="en" sz="1900" b="1" dirty="0">
                 <a:latin typeface="Open Sans"/>
                 <a:ea typeface="Open Sans"/>
                 <a:cs typeface="Open Sans"/>
@@ -28559,7 +28471,7 @@
               </a:rPr>
               <a:t>Logical</a:t>
             </a:r>
-            <a:endParaRPr sz="1900" b="1">
+            <a:endParaRPr sz="1900" b="1" dirty="0">
               <a:latin typeface="Open Sans"/>
               <a:ea typeface="Open Sans"/>
               <a:cs typeface="Open Sans"/>
@@ -28580,7 +28492,7 @@
               <a:buNone/>
             </a:pPr>
             <a:r>
-              <a:rPr lang="en" sz="1400">
+              <a:rPr lang="en" sz="1400" dirty="0">
                 <a:solidFill>
                   <a:srgbClr val="525C65"/>
                 </a:solidFill>
@@ -28594,7 +28506,7 @@
               </a:rPr>
               <a:t>The logical model is the next level of refinement from the conceptual ERD. At this point, you should have normalized the data to the 3NF. Attributes should also be listed now in the ERD. You can still use human-friendly entity and attribute names in the logical model, and while relationship lines are required, Crow's foot notation is still not needed at this point.</a:t>
             </a:r>
-            <a:endParaRPr sz="1400">
+            <a:endParaRPr sz="1400" dirty="0">
               <a:solidFill>
                 <a:srgbClr val="525C65"/>
               </a:solidFill>
@@ -28621,7 +28533,7 @@
               <a:buNone/>
             </a:pPr>
             <a:r>
-              <a:rPr lang="en" sz="1400">
+              <a:rPr lang="en" sz="1400" dirty="0">
                 <a:solidFill>
                   <a:srgbClr val="525C65"/>
                 </a:solidFill>
@@ -28635,7 +28547,7 @@
               </a:rPr>
               <a:t>Use Lucidchart’s built-in template for DBMS ER Diagram UML.</a:t>
             </a:r>
-            <a:endParaRPr sz="1400">
+            <a:endParaRPr sz="1400" dirty="0">
               <a:solidFill>
                 <a:srgbClr val="525C65"/>
               </a:solidFill>
@@ -28649,93 +28561,52 @@
             </a:endParaRPr>
           </a:p>
           <a:p>
+            <a:pPr marL="457200" lvl="0" indent="0" algn="l" rtl="0">
+              <a:spcBef>
+                <a:spcPts val="0"/>
+              </a:spcBef>
+              <a:spcAft>
+                <a:spcPts val="0"/>
+              </a:spcAft>
+              <a:buNone/>
+            </a:pPr>
+            <a:endParaRPr sz="1900" dirty="0"/>
+          </a:p>
+          <a:p>
             <a:pPr marL="0" lvl="0" indent="0" algn="l" rtl="0">
-              <a:lnSpc>
-                <a:spcPct val="170000"/>
-              </a:lnSpc>
-              <a:spcBef>
-                <a:spcPts val="0"/>
-              </a:spcBef>
-              <a:spcAft>
-                <a:spcPts val="0"/>
-              </a:spcAft>
-              <a:buClr>
-                <a:schemeClr val="dk1"/>
-              </a:buClr>
-              <a:buSzPts val="1100"/>
-              <a:buFont typeface="Arial"/>
+              <a:spcBef>
+                <a:spcPts val="1600"/>
+              </a:spcBef>
+              <a:spcAft>
+                <a:spcPts val="0"/>
+              </a:spcAft>
               <a:buNone/>
             </a:pPr>
-            <a:endParaRPr sz="1200">
-              <a:solidFill>
-                <a:srgbClr val="525C65"/>
-              </a:solidFill>
-              <a:highlight>
-                <a:schemeClr val="lt1"/>
-              </a:highlight>
-              <a:latin typeface="Open Sans"/>
-              <a:ea typeface="Open Sans"/>
-              <a:cs typeface="Open Sans"/>
-              <a:sym typeface="Open Sans"/>
-            </a:endParaRPr>
+            <a:endParaRPr sz="1900" dirty="0"/>
           </a:p>
           <a:p>
             <a:pPr marL="0" lvl="0" indent="0" algn="l" rtl="0">
-              <a:lnSpc>
-                <a:spcPct val="170000"/>
-              </a:lnSpc>
-              <a:spcBef>
-                <a:spcPts val="0"/>
-              </a:spcBef>
-              <a:spcAft>
-                <a:spcPts val="0"/>
-              </a:spcAft>
-              <a:buClr>
-                <a:schemeClr val="dk1"/>
-              </a:buClr>
-              <a:buSzPts val="1100"/>
-              <a:buFont typeface="Arial"/>
+              <a:spcBef>
+                <a:spcPts val="1600"/>
+              </a:spcBef>
+              <a:spcAft>
+                <a:spcPts val="0"/>
+              </a:spcAft>
               <a:buNone/>
             </a:pPr>
-            <a:r>
-              <a:rPr lang="en" sz="1200">
-                <a:solidFill>
-                  <a:srgbClr val="FF0000"/>
-                </a:solidFill>
-                <a:highlight>
-                  <a:schemeClr val="lt1"/>
-                </a:highlight>
-                <a:latin typeface="Open Sans"/>
-                <a:ea typeface="Open Sans"/>
-                <a:cs typeface="Open Sans"/>
-                <a:sym typeface="Open Sans"/>
-              </a:rPr>
-              <a:t>** Replace example screenshot below with your response</a:t>
-            </a:r>
-            <a:endParaRPr sz="1400">
-              <a:solidFill>
-                <a:srgbClr val="525C65"/>
-              </a:solidFill>
-              <a:highlight>
-                <a:srgbClr val="FFFFFF"/>
-              </a:highlight>
-              <a:latin typeface="Open Sans"/>
-              <a:ea typeface="Open Sans"/>
-              <a:cs typeface="Open Sans"/>
-              <a:sym typeface="Open Sans"/>
-            </a:endParaRPr>
-          </a:p>
-          <a:p>
-            <a:pPr marL="457200" lvl="0" indent="0" algn="l" rtl="0">
-              <a:spcBef>
-                <a:spcPts val="0"/>
+            <a:endParaRPr sz="1900" dirty="0"/>
+          </a:p>
+          <a:p>
+            <a:pPr marL="0" lvl="0" indent="0" algn="l" rtl="0">
+              <a:spcBef>
+                <a:spcPts val="1600"/>
               </a:spcBef>
               <a:spcAft>
                 <a:spcPts val="0"/>
               </a:spcAft>
               <a:buNone/>
             </a:pPr>
-            <a:endParaRPr sz="1900"/>
+            <a:endParaRPr sz="1900" dirty="0"/>
           </a:p>
           <a:p>
             <a:pPr marL="0" lvl="0" indent="0" algn="l" rtl="0">
@@ -28743,81 +28614,46 @@
                 <a:spcPts val="1600"/>
               </a:spcBef>
               <a:spcAft>
-                <a:spcPts val="0"/>
+                <a:spcPts val="1600"/>
               </a:spcAft>
               <a:buNone/>
             </a:pPr>
-            <a:endParaRPr sz="1900"/>
-          </a:p>
-          <a:p>
-            <a:pPr marL="0" lvl="0" indent="0" algn="l" rtl="0">
-              <a:spcBef>
-                <a:spcPts val="1600"/>
-              </a:spcBef>
-              <a:spcAft>
-                <a:spcPts val="0"/>
-              </a:spcAft>
-              <a:buNone/>
-            </a:pPr>
-            <a:endParaRPr sz="1900"/>
-          </a:p>
-          <a:p>
-            <a:pPr marL="0" lvl="0" indent="0" algn="l" rtl="0">
-              <a:spcBef>
-                <a:spcPts val="1600"/>
-              </a:spcBef>
-              <a:spcAft>
-                <a:spcPts val="0"/>
-              </a:spcAft>
-              <a:buNone/>
-            </a:pPr>
-            <a:endParaRPr sz="1900"/>
-          </a:p>
-          <a:p>
-            <a:pPr marL="0" lvl="0" indent="0" algn="l" rtl="0">
-              <a:spcBef>
-                <a:spcPts val="1600"/>
-              </a:spcBef>
-              <a:spcAft>
-                <a:spcPts val="1600"/>
-              </a:spcAft>
-              <a:buNone/>
-            </a:pPr>
-            <a:endParaRPr sz="1900"/>
+            <a:endParaRPr sz="1900" dirty="0"/>
           </a:p>
         </p:txBody>
       </p:sp>
       <p:pic>
         <p:nvPicPr>
-          <p:cNvPr id="257" name="Google Shape;257;p63"/>
-          <p:cNvPicPr preferRelativeResize="0"/>
+          <p:cNvPr id="2" name="Picture 1">
+            <a:extLst>
+              <a:ext uri="{FF2B5EF4-FFF2-40B4-BE49-F238E27FC236}">
+                <a16:creationId xmlns:a16="http://schemas.microsoft.com/office/drawing/2014/main" id="{83237B88-52C8-4925-B904-FB0AF33100D6}"/>
+              </a:ext>
+            </a:extLst>
+          </p:cNvPr>
+          <p:cNvPicPr>
+            <a:picLocks noChangeAspect="1"/>
+          </p:cNvPicPr>
           <p:nvPr/>
         </p:nvPicPr>
         <p:blipFill>
-          <a:blip r:embed="rId3">
-            <a:alphaModFix/>
-          </a:blip>
+          <a:blip r:embed="rId3"/>
           <a:stretch>
             <a:fillRect/>
           </a:stretch>
         </p:blipFill>
         <p:spPr>
           <a:xfrm>
-            <a:off x="484950" y="5969175"/>
-            <a:ext cx="6802502" cy="3038826"/>
+            <a:off x="264850" y="5280660"/>
+            <a:ext cx="7242600" cy="4579620"/>
           </a:xfrm>
           <a:prstGeom prst="rect">
             <a:avLst/>
           </a:prstGeom>
-          <a:noFill/>
-          <a:ln w="9525" cap="flat" cmpd="sng">
+          <a:ln>
             <a:solidFill>
-              <a:schemeClr val="dk2"/>
+              <a:schemeClr val="tx1"/>
             </a:solidFill>
-            <a:prstDash val="solid"/>
-            <a:round/>
-            <a:headEnd type="none" w="sm" len="sm"/>
-            <a:tailEnd type="none" w="sm" len="sm"/>
           </a:ln>
         </p:spPr>
       </p:pic>

--- a/Modules/03-Data-Architect/projects/Project 1 - Human Resources Database Design/report/HR_Database_Design_Project_Arjun_Avalakki_Mohan.pptx
+++ b/Modules/03-Data-Architect/projects/Project 1 - Human Resources Database Design/report/HR_Database_Design_Project_Arjun_Avalakki_Mohan.pptx
@@ -308,7 +308,7 @@
 <file path=ppt/revisionInfo.xml><?xml version="1.0" encoding="utf-8"?>
 <p1510:revInfo xmlns:a="http://schemas.openxmlformats.org/drawingml/2006/main" xmlns:r="http://schemas.openxmlformats.org/officeDocument/2006/relationships" xmlns:p1510="http://schemas.microsoft.com/office/powerpoint/2015/10/main">
   <p1510:revLst>
-    <p1510:client id="{CEECDE29-5A9E-4E44-A6A5-88C1A3F6F982}" v="2" dt="2026-05-21T05:55:29.432"/>
+    <p1510:client id="{CEECDE29-5A9E-4E44-A6A5-88C1A3F6F982}" v="3" dt="2026-05-22T05:40:33.597"/>
   </p1510:revLst>
 </p1510:revInfo>
 </file>
@@ -318,7 +318,7 @@
   <pc:docChgLst>
     <pc:chgData name="ARJUN AVALAKKI MOHAN" userId="be4ab9aaf12c5868" providerId="LiveId" clId="{C81E60EF-EF5F-4B4B-A4E1-3178676F15CC}"/>
     <pc:docChg chg="undo custSel addSld delSld modSld">
-      <pc:chgData name="ARJUN AVALAKKI MOHAN" userId="be4ab9aaf12c5868" providerId="LiveId" clId="{C81E60EF-EF5F-4B4B-A4E1-3178676F15CC}" dt="2026-05-21T05:56:26.847" v="815" actId="14100"/>
+      <pc:chgData name="ARJUN AVALAKKI MOHAN" userId="be4ab9aaf12c5868" providerId="LiveId" clId="{C81E60EF-EF5F-4B4B-A4E1-3178676F15CC}" dt="2026-05-22T05:44:14.498" v="833" actId="692"/>
       <pc:docMkLst>
         <pc:docMk/>
       </pc:docMkLst>
@@ -528,12 +528,44 @@
           </ac:picMkLst>
         </pc:picChg>
       </pc:sldChg>
-      <pc:sldChg chg="modNotes">
-        <pc:chgData name="ARJUN AVALAKKI MOHAN" userId="be4ab9aaf12c5868" providerId="LiveId" clId="{C81E60EF-EF5F-4B4B-A4E1-3178676F15CC}" dt="2026-05-20T03:54:24.689" v="721"/>
+      <pc:sldChg chg="addSp delSp modSp mod modNotes">
+        <pc:chgData name="ARJUN AVALAKKI MOHAN" userId="be4ab9aaf12c5868" providerId="LiveId" clId="{C81E60EF-EF5F-4B4B-A4E1-3178676F15CC}" dt="2026-05-22T05:44:14.498" v="833" actId="692"/>
         <pc:sldMkLst>
           <pc:docMk/>
           <pc:sldMk cId="0" sldId="269"/>
         </pc:sldMkLst>
+        <pc:spChg chg="mod">
+          <ac:chgData name="ARJUN AVALAKKI MOHAN" userId="be4ab9aaf12c5868" providerId="LiveId" clId="{C81E60EF-EF5F-4B4B-A4E1-3178676F15CC}" dt="2026-05-22T05:40:30.391" v="817" actId="6549"/>
+          <ac:spMkLst>
+            <pc:docMk/>
+            <pc:sldMk cId="0" sldId="269"/>
+            <ac:spMk id="263" creationId="{00000000-0000-0000-0000-000000000000}"/>
+          </ac:spMkLst>
+        </pc:spChg>
+        <pc:picChg chg="add del mod">
+          <ac:chgData name="ARJUN AVALAKKI MOHAN" userId="be4ab9aaf12c5868" providerId="LiveId" clId="{C81E60EF-EF5F-4B4B-A4E1-3178676F15CC}" dt="2026-05-22T05:43:32.080" v="826" actId="478"/>
+          <ac:picMkLst>
+            <pc:docMk/>
+            <pc:sldMk cId="0" sldId="269"/>
+            <ac:picMk id="2" creationId="{0EF06449-C1BE-E8BF-BC30-2A5B2F94F517}"/>
+          </ac:picMkLst>
+        </pc:picChg>
+        <pc:picChg chg="add mod">
+          <ac:chgData name="ARJUN AVALAKKI MOHAN" userId="be4ab9aaf12c5868" providerId="LiveId" clId="{C81E60EF-EF5F-4B4B-A4E1-3178676F15CC}" dt="2026-05-22T05:44:14.498" v="833" actId="692"/>
+          <ac:picMkLst>
+            <pc:docMk/>
+            <pc:sldMk cId="0" sldId="269"/>
+            <ac:picMk id="4" creationId="{ECCD54A3-5A7D-7962-92AF-B50CC087C9F0}"/>
+          </ac:picMkLst>
+        </pc:picChg>
+        <pc:picChg chg="del">
+          <ac:chgData name="ARJUN AVALAKKI MOHAN" userId="be4ab9aaf12c5868" providerId="LiveId" clId="{C81E60EF-EF5F-4B4B-A4E1-3178676F15CC}" dt="2026-05-22T05:40:26.984" v="816" actId="478"/>
+          <ac:picMkLst>
+            <pc:docMk/>
+            <pc:sldMk cId="0" sldId="269"/>
+            <ac:picMk id="264" creationId="{00000000-0000-0000-0000-000000000000}"/>
+          </ac:picMkLst>
+        </pc:picChg>
       </pc:sldChg>
       <pc:sldChg chg="modNotes">
         <pc:chgData name="ARJUN AVALAKKI MOHAN" userId="be4ab9aaf12c5868" providerId="LiveId" clId="{C81E60EF-EF5F-4B4B-A4E1-3178676F15CC}" dt="2026-05-20T03:54:24.689" v="721"/>
@@ -618,21 +650,6 @@
             <pc:docMk/>
             <pc:sldMk cId="2187238618" sldId="287"/>
             <ac:spMk id="3" creationId="{A2BB68B0-9E76-0DFB-F8C8-9B4F0B1EC2F7}"/>
-          </ac:spMkLst>
-        </pc:spChg>
-      </pc:sldChg>
-      <pc:sldChg chg="modSp add del mod">
-        <pc:chgData name="ARJUN AVALAKKI MOHAN" userId="be4ab9aaf12c5868" providerId="LiveId" clId="{C81E60EF-EF5F-4B4B-A4E1-3178676F15CC}" dt="2026-05-20T03:58:05.908" v="765" actId="2696"/>
-        <pc:sldMkLst>
-          <pc:docMk/>
-          <pc:sldMk cId="3471457919" sldId="288"/>
-        </pc:sldMkLst>
-        <pc:spChg chg="mod">
-          <ac:chgData name="ARJUN AVALAKKI MOHAN" userId="be4ab9aaf12c5868" providerId="LiveId" clId="{C81E60EF-EF5F-4B4B-A4E1-3178676F15CC}" dt="2026-05-20T03:45:46.709" v="637" actId="6549"/>
-          <ac:spMkLst>
-            <pc:docMk/>
-            <pc:sldMk cId="3471457919" sldId="288"/>
-            <ac:spMk id="231" creationId="{80981BB2-6A36-BA62-606E-10254B1EAB52}"/>
           </ac:spMkLst>
         </pc:spChg>
       </pc:sldChg>
@@ -28761,7 +28778,7 @@
               <a:buChar char="●"/>
             </a:pPr>
             <a:r>
-              <a:rPr lang="en" sz="1900" b="1">
+              <a:rPr lang="en" sz="1900" b="1" dirty="0">
                 <a:latin typeface="Open Sans"/>
                 <a:ea typeface="Open Sans"/>
                 <a:cs typeface="Open Sans"/>
@@ -28769,7 +28786,7 @@
               </a:rPr>
               <a:t>Physical</a:t>
             </a:r>
-            <a:endParaRPr sz="1900" b="1">
+            <a:endParaRPr sz="1900" b="1" dirty="0">
               <a:latin typeface="Open Sans"/>
               <a:ea typeface="Open Sans"/>
               <a:cs typeface="Open Sans"/>
@@ -28790,7 +28807,7 @@
               <a:buNone/>
             </a:pPr>
             <a:r>
-              <a:rPr lang="en" sz="1400">
+              <a:rPr lang="en" sz="1400" dirty="0">
                 <a:solidFill>
                   <a:srgbClr val="525C65"/>
                 </a:solidFill>
@@ -28804,7 +28821,7 @@
               </a:rPr>
               <a:t>The physical model is what will be built in the database. Each entity should represent a database table, complete with column names and data types. Primary keys and foreign keys should also be represented here. Primary keys should be in bold type with the (PK) designation following the field name. Foreign keys should be in normal type face, but have the designation (FK) after the column name. Finally, in the physical model, Crow's foot notation is important.</a:t>
             </a:r>
-            <a:endParaRPr sz="1200">
+            <a:endParaRPr sz="1200" dirty="0">
               <a:solidFill>
                 <a:srgbClr val="525C65"/>
               </a:solidFill>
@@ -28818,39 +28835,16 @@
             </a:endParaRPr>
           </a:p>
           <a:p>
-            <a:pPr marL="0" lvl="0" indent="0" algn="l" rtl="0">
-              <a:lnSpc>
-                <a:spcPct val="170000"/>
-              </a:lnSpc>
-              <a:spcBef>
+            <a:pPr marL="457200" lvl="0" indent="0" algn="l" rtl="0">
+              <a:spcBef>
+                <a:spcPts val="0"/>
+              </a:spcBef>
+              <a:spcAft>
                 <a:spcPts val="1600"/>
-              </a:spcBef>
-              <a:spcAft>
-                <a:spcPts val="0"/>
-              </a:spcAft>
-              <a:buClr>
-                <a:schemeClr val="dk1"/>
-              </a:buClr>
-              <a:buSzPts val="1100"/>
-              <a:buFont typeface="Arial"/>
+              </a:spcAft>
               <a:buNone/>
             </a:pPr>
-            <a:r>
-              <a:rPr lang="en" sz="1200">
-                <a:solidFill>
-                  <a:srgbClr val="FF0000"/>
-                </a:solidFill>
-                <a:highlight>
-                  <a:schemeClr val="lt1"/>
-                </a:highlight>
-                <a:latin typeface="Open Sans"/>
-                <a:ea typeface="Open Sans"/>
-                <a:cs typeface="Open Sans"/>
-                <a:sym typeface="Open Sans"/>
-              </a:rPr>
-              <a:t>** Replace example screenshot below with your response</a:t>
-            </a:r>
-            <a:endParaRPr sz="1500">
+            <a:endParaRPr sz="1500" dirty="0">
               <a:solidFill>
                 <a:srgbClr val="525C65"/>
               </a:solidFill>
@@ -28863,62 +28857,40 @@
               <a:sym typeface="Open Sans"/>
             </a:endParaRPr>
           </a:p>
-          <a:p>
-            <a:pPr marL="457200" lvl="0" indent="0" algn="l" rtl="0">
-              <a:spcBef>
-                <a:spcPts val="0"/>
-              </a:spcBef>
-              <a:spcAft>
-                <a:spcPts val="1600"/>
-              </a:spcAft>
-              <a:buNone/>
-            </a:pPr>
-            <a:endParaRPr sz="1500">
-              <a:solidFill>
-                <a:srgbClr val="525C65"/>
-              </a:solidFill>
-              <a:highlight>
-                <a:srgbClr val="FFFFFF"/>
-              </a:highlight>
-              <a:latin typeface="Open Sans"/>
-              <a:ea typeface="Open Sans"/>
-              <a:cs typeface="Open Sans"/>
-              <a:sym typeface="Open Sans"/>
-            </a:endParaRPr>
-          </a:p>
         </p:txBody>
       </p:sp>
       <p:pic>
         <p:nvPicPr>
-          <p:cNvPr id="264" name="Google Shape;264;p64"/>
-          <p:cNvPicPr preferRelativeResize="0"/>
+          <p:cNvPr id="4" name="Picture 3">
+            <a:extLst>
+              <a:ext uri="{FF2B5EF4-FFF2-40B4-BE49-F238E27FC236}">
+                <a16:creationId xmlns:a16="http://schemas.microsoft.com/office/drawing/2014/main" id="{ECCD54A3-5A7D-7962-92AF-B50CC087C9F0}"/>
+              </a:ext>
+            </a:extLst>
+          </p:cNvPr>
+          <p:cNvPicPr>
+            <a:picLocks noChangeAspect="1"/>
+          </p:cNvPicPr>
           <p:nvPr/>
         </p:nvPicPr>
         <p:blipFill>
-          <a:blip r:embed="rId3">
-            <a:alphaModFix/>
-          </a:blip>
+          <a:blip r:embed="rId3"/>
           <a:stretch>
             <a:fillRect/>
           </a:stretch>
         </p:blipFill>
         <p:spPr>
           <a:xfrm>
-            <a:off x="832174" y="5859975"/>
-            <a:ext cx="6108049" cy="3630424"/>
+            <a:off x="420130" y="5343781"/>
+            <a:ext cx="6822470" cy="4170922"/>
           </a:xfrm>
           <a:prstGeom prst="rect">
             <a:avLst/>
           </a:prstGeom>
-          <a:noFill/>
-          <a:ln w="9525" cap="flat" cmpd="sng">
+          <a:ln>
             <a:solidFill>
-              <a:schemeClr val="dk2"/>
+              <a:schemeClr val="tx1"/>
             </a:solidFill>
-            <a:prstDash val="solid"/>
-            <a:round/>
-            <a:headEnd type="none" w="sm" len="sm"/>
-            <a:tailEnd type="none" w="sm" len="sm"/>
           </a:ln>
         </p:spPr>
       </p:pic>

--- a/Modules/03-Data-Architect/projects/Project 1 - Human Resources Database Design/report/HR_Database_Design_Project_Arjun_Avalakki_Mohan.pptx
+++ b/Modules/03-Data-Architect/projects/Project 1 - Human Resources Database Design/report/HR_Database_Design_Project_Arjun_Avalakki_Mohan.pptx
@@ -308,7 +308,7 @@
 <file path=ppt/revisionInfo.xml><?xml version="1.0" encoding="utf-8"?>
 <p1510:revInfo xmlns:a="http://schemas.openxmlformats.org/drawingml/2006/main" xmlns:r="http://schemas.openxmlformats.org/officeDocument/2006/relationships" xmlns:p1510="http://schemas.microsoft.com/office/powerpoint/2015/10/main">
   <p1510:revLst>
-    <p1510:client id="{CEECDE29-5A9E-4E44-A6A5-88C1A3F6F982}" v="3" dt="2026-05-22T05:40:33.597"/>
+    <p1510:client id="{CEECDE29-5A9E-4E44-A6A5-88C1A3F6F982}" v="4" dt="2026-05-23T06:15:43.810"/>
   </p1510:revLst>
 </p1510:revInfo>
 </file>
@@ -318,7 +318,7 @@
   <pc:docChgLst>
     <pc:chgData name="ARJUN AVALAKKI MOHAN" userId="be4ab9aaf12c5868" providerId="LiveId" clId="{C81E60EF-EF5F-4B4B-A4E1-3178676F15CC}"/>
     <pc:docChg chg="undo custSel addSld delSld modSld">
-      <pc:chgData name="ARJUN AVALAKKI MOHAN" userId="be4ab9aaf12c5868" providerId="LiveId" clId="{C81E60EF-EF5F-4B4B-A4E1-3178676F15CC}" dt="2026-05-22T05:44:14.498" v="833" actId="692"/>
+      <pc:chgData name="ARJUN AVALAKKI MOHAN" userId="be4ab9aaf12c5868" providerId="LiveId" clId="{C81E60EF-EF5F-4B4B-A4E1-3178676F15CC}" dt="2026-05-23T06:18:14.503" v="897" actId="2085"/>
       <pc:docMkLst>
         <pc:docMk/>
       </pc:docMkLst>
@@ -459,7 +459,7 @@
         </pc:sldMkLst>
       </pc:sldChg>
       <pc:sldChg chg="addSp delSp modSp mod modNotes">
-        <pc:chgData name="ARJUN AVALAKKI MOHAN" userId="be4ab9aaf12c5868" providerId="LiveId" clId="{C81E60EF-EF5F-4B4B-A4E1-3178676F15CC}" dt="2026-05-21T05:26:18.368" v="803" actId="692"/>
+        <pc:chgData name="ARJUN AVALAKKI MOHAN" userId="be4ab9aaf12c5868" providerId="LiveId" clId="{C81E60EF-EF5F-4B4B-A4E1-3178676F15CC}" dt="2026-05-23T06:18:14.503" v="897" actId="2085"/>
         <pc:sldMkLst>
           <pc:docMk/>
           <pc:sldMk cId="0" sldId="267"/>
@@ -472,70 +472,62 @@
             <ac:spMk id="249" creationId="{00000000-0000-0000-0000-000000000000}"/>
           </ac:spMkLst>
         </pc:spChg>
-        <pc:picChg chg="add del mod">
-          <ac:chgData name="ARJUN AVALAKKI MOHAN" userId="be4ab9aaf12c5868" providerId="LiveId" clId="{C81E60EF-EF5F-4B4B-A4E1-3178676F15CC}" dt="2026-05-21T05:25:39.535" v="796" actId="478"/>
+        <pc:picChg chg="add mod">
+          <ac:chgData name="ARJUN AVALAKKI MOHAN" userId="be4ab9aaf12c5868" providerId="LiveId" clId="{C81E60EF-EF5F-4B4B-A4E1-3178676F15CC}" dt="2026-05-23T06:18:14.503" v="897" actId="2085"/>
           <ac:picMkLst>
             <pc:docMk/>
             <pc:sldMk cId="0" sldId="267"/>
-            <ac:picMk id="2" creationId="{3DDA4270-4AEF-F9B2-A951-BA71ABA69973}"/>
+            <ac:picMk id="3" creationId="{0FA426DF-3EB2-5B29-14C6-AD8D9874DE10}"/>
           </ac:picMkLst>
         </pc:picChg>
-        <pc:picChg chg="add mod">
-          <ac:chgData name="ARJUN AVALAKKI MOHAN" userId="be4ab9aaf12c5868" providerId="LiveId" clId="{C81E60EF-EF5F-4B4B-A4E1-3178676F15CC}" dt="2026-05-21T05:26:18.368" v="803" actId="692"/>
+        <pc:picChg chg="add del mod">
+          <ac:chgData name="ARJUN AVALAKKI MOHAN" userId="be4ab9aaf12c5868" providerId="LiveId" clId="{C81E60EF-EF5F-4B4B-A4E1-3178676F15CC}" dt="2026-05-23T06:14:11.556" v="864" actId="478"/>
           <ac:picMkLst>
             <pc:docMk/>
             <pc:sldMk cId="0" sldId="267"/>
             <ac:picMk id="4" creationId="{A5722C49-878A-9ADD-0D36-BBD86256153F}"/>
           </ac:picMkLst>
         </pc:picChg>
-        <pc:picChg chg="del">
-          <ac:chgData name="ARJUN AVALAKKI MOHAN" userId="be4ab9aaf12c5868" providerId="LiveId" clId="{C81E60EF-EF5F-4B4B-A4E1-3178676F15CC}" dt="2026-05-21T05:20:17.941" v="766" actId="478"/>
-          <ac:picMkLst>
-            <pc:docMk/>
-            <pc:sldMk cId="0" sldId="267"/>
-            <ac:picMk id="250" creationId="{00000000-0000-0000-0000-000000000000}"/>
-          </ac:picMkLst>
-        </pc:picChg>
       </pc:sldChg>
       <pc:sldChg chg="addSp delSp modSp mod modNotes">
-        <pc:chgData name="ARJUN AVALAKKI MOHAN" userId="be4ab9aaf12c5868" providerId="LiveId" clId="{C81E60EF-EF5F-4B4B-A4E1-3178676F15CC}" dt="2026-05-21T05:56:26.847" v="815" actId="14100"/>
+        <pc:chgData name="ARJUN AVALAKKI MOHAN" userId="be4ab9aaf12c5868" providerId="LiveId" clId="{C81E60EF-EF5F-4B4B-A4E1-3178676F15CC}" dt="2026-05-23T06:18:07.555" v="896" actId="2085"/>
         <pc:sldMkLst>
           <pc:docMk/>
           <pc:sldMk cId="0" sldId="268"/>
         </pc:sldMkLst>
         <pc:spChg chg="mod">
-          <ac:chgData name="ARJUN AVALAKKI MOHAN" userId="be4ab9aaf12c5868" providerId="LiveId" clId="{C81E60EF-EF5F-4B4B-A4E1-3178676F15CC}" dt="2026-05-21T05:55:20.654" v="806" actId="20577"/>
+          <ac:chgData name="ARJUN AVALAKKI MOHAN" userId="be4ab9aaf12c5868" providerId="LiveId" clId="{C81E60EF-EF5F-4B4B-A4E1-3178676F15CC}" dt="2026-05-23T06:15:53.168" v="877" actId="1076"/>
           <ac:spMkLst>
             <pc:docMk/>
             <pc:sldMk cId="0" sldId="268"/>
             <ac:spMk id="256" creationId="{00000000-0000-0000-0000-000000000000}"/>
           </ac:spMkLst>
         </pc:spChg>
-        <pc:picChg chg="add mod">
-          <ac:chgData name="ARJUN AVALAKKI MOHAN" userId="be4ab9aaf12c5868" providerId="LiveId" clId="{C81E60EF-EF5F-4B4B-A4E1-3178676F15CC}" dt="2026-05-21T05:56:26.847" v="815" actId="14100"/>
+        <pc:picChg chg="add del mod">
+          <ac:chgData name="ARJUN AVALAKKI MOHAN" userId="be4ab9aaf12c5868" providerId="LiveId" clId="{C81E60EF-EF5F-4B4B-A4E1-3178676F15CC}" dt="2026-05-23T06:15:20.790" v="874" actId="478"/>
           <ac:picMkLst>
             <pc:docMk/>
             <pc:sldMk cId="0" sldId="268"/>
             <ac:picMk id="2" creationId="{83237B88-52C8-4925-B904-FB0AF33100D6}"/>
           </ac:picMkLst>
         </pc:picChg>
-        <pc:picChg chg="del">
-          <ac:chgData name="ARJUN AVALAKKI MOHAN" userId="be4ab9aaf12c5868" providerId="LiveId" clId="{C81E60EF-EF5F-4B4B-A4E1-3178676F15CC}" dt="2026-05-21T05:55:16.507" v="804" actId="478"/>
+        <pc:picChg chg="add mod">
+          <ac:chgData name="ARJUN AVALAKKI MOHAN" userId="be4ab9aaf12c5868" providerId="LiveId" clId="{C81E60EF-EF5F-4B4B-A4E1-3178676F15CC}" dt="2026-05-23T06:18:07.555" v="896" actId="2085"/>
           <ac:picMkLst>
             <pc:docMk/>
             <pc:sldMk cId="0" sldId="268"/>
-            <ac:picMk id="257" creationId="{00000000-0000-0000-0000-000000000000}"/>
+            <ac:picMk id="3" creationId="{C331EB5E-11D8-4A6D-0411-2A0C93A01961}"/>
           </ac:picMkLst>
         </pc:picChg>
       </pc:sldChg>
       <pc:sldChg chg="addSp delSp modSp mod modNotes">
-        <pc:chgData name="ARJUN AVALAKKI MOHAN" userId="be4ab9aaf12c5868" providerId="LiveId" clId="{C81E60EF-EF5F-4B4B-A4E1-3178676F15CC}" dt="2026-05-22T05:44:14.498" v="833" actId="692"/>
+        <pc:chgData name="ARJUN AVALAKKI MOHAN" userId="be4ab9aaf12c5868" providerId="LiveId" clId="{C81E60EF-EF5F-4B4B-A4E1-3178676F15CC}" dt="2026-05-23T06:17:57.735" v="895" actId="2085"/>
         <pc:sldMkLst>
           <pc:docMk/>
           <pc:sldMk cId="0" sldId="269"/>
         </pc:sldMkLst>
         <pc:spChg chg="mod">
-          <ac:chgData name="ARJUN AVALAKKI MOHAN" userId="be4ab9aaf12c5868" providerId="LiveId" clId="{C81E60EF-EF5F-4B4B-A4E1-3178676F15CC}" dt="2026-05-22T05:40:30.391" v="817" actId="6549"/>
+          <ac:chgData name="ARJUN AVALAKKI MOHAN" userId="be4ab9aaf12c5868" providerId="LiveId" clId="{C81E60EF-EF5F-4B4B-A4E1-3178676F15CC}" dt="2026-05-23T06:16:43.534" v="885" actId="14100"/>
           <ac:spMkLst>
             <pc:docMk/>
             <pc:sldMk cId="0" sldId="269"/>
@@ -551,7 +543,15 @@
           </ac:picMkLst>
         </pc:picChg>
         <pc:picChg chg="add mod">
-          <ac:chgData name="ARJUN AVALAKKI MOHAN" userId="be4ab9aaf12c5868" providerId="LiveId" clId="{C81E60EF-EF5F-4B4B-A4E1-3178676F15CC}" dt="2026-05-22T05:44:14.498" v="833" actId="692"/>
+          <ac:chgData name="ARJUN AVALAKKI MOHAN" userId="be4ab9aaf12c5868" providerId="LiveId" clId="{C81E60EF-EF5F-4B4B-A4E1-3178676F15CC}" dt="2026-05-23T06:17:57.735" v="895" actId="2085"/>
+          <ac:picMkLst>
+            <pc:docMk/>
+            <pc:sldMk cId="0" sldId="269"/>
+            <ac:picMk id="3" creationId="{4FDF5F04-A16A-8719-A692-B9C7214704D4}"/>
+          </ac:picMkLst>
+        </pc:picChg>
+        <pc:picChg chg="add del mod">
+          <ac:chgData name="ARJUN AVALAKKI MOHAN" userId="be4ab9aaf12c5868" providerId="LiveId" clId="{C81E60EF-EF5F-4B4B-A4E1-3178676F15CC}" dt="2026-05-23T06:16:33.201" v="883" actId="478"/>
           <ac:picMkLst>
             <pc:docMk/>
             <pc:sldMk cId="0" sldId="269"/>
@@ -574,12 +574,52 @@
           <pc:sldMk cId="0" sldId="271"/>
         </pc:sldMkLst>
       </pc:sldChg>
-      <pc:sldChg chg="modNotes">
-        <pc:chgData name="ARJUN AVALAKKI MOHAN" userId="be4ab9aaf12c5868" providerId="LiveId" clId="{C81E60EF-EF5F-4B4B-A4E1-3178676F15CC}" dt="2026-05-20T03:54:24.689" v="721"/>
+      <pc:sldChg chg="addSp delSp modSp mod modNotes">
+        <pc:chgData name="ARJUN AVALAKKI MOHAN" userId="be4ab9aaf12c5868" providerId="LiveId" clId="{C81E60EF-EF5F-4B4B-A4E1-3178676F15CC}" dt="2026-05-23T04:57:50.654" v="863" actId="14100"/>
         <pc:sldMkLst>
           <pc:docMk/>
           <pc:sldMk cId="0" sldId="272"/>
         </pc:sldMkLst>
+        <pc:spChg chg="mod">
+          <ac:chgData name="ARJUN AVALAKKI MOHAN" userId="be4ab9aaf12c5868" providerId="LiveId" clId="{C81E60EF-EF5F-4B4B-A4E1-3178676F15CC}" dt="2026-05-23T04:56:27.298" v="854" actId="6549"/>
+          <ac:spMkLst>
+            <pc:docMk/>
+            <pc:sldMk cId="0" sldId="272"/>
+            <ac:spMk id="282" creationId="{00000000-0000-0000-0000-000000000000}"/>
+          </ac:spMkLst>
+        </pc:spChg>
+        <pc:picChg chg="add mod">
+          <ac:chgData name="ARJUN AVALAKKI MOHAN" userId="be4ab9aaf12c5868" providerId="LiveId" clId="{C81E60EF-EF5F-4B4B-A4E1-3178676F15CC}" dt="2026-05-23T04:57:48.176" v="862" actId="14100"/>
+          <ac:picMkLst>
+            <pc:docMk/>
+            <pc:sldMk cId="0" sldId="272"/>
+            <ac:picMk id="3" creationId="{76232950-6D82-5068-3105-506D04C9CEFB}"/>
+          </ac:picMkLst>
+        </pc:picChg>
+        <pc:picChg chg="add mod">
+          <ac:chgData name="ARJUN AVALAKKI MOHAN" userId="be4ab9aaf12c5868" providerId="LiveId" clId="{C81E60EF-EF5F-4B4B-A4E1-3178676F15CC}" dt="2026-05-23T04:57:50.654" v="863" actId="14100"/>
+          <ac:picMkLst>
+            <pc:docMk/>
+            <pc:sldMk cId="0" sldId="272"/>
+            <ac:picMk id="5" creationId="{28FE4F40-9295-B4A4-C7A6-585514873CBB}"/>
+          </ac:picMkLst>
+        </pc:picChg>
+        <pc:picChg chg="add mod">
+          <ac:chgData name="ARJUN AVALAKKI MOHAN" userId="be4ab9aaf12c5868" providerId="LiveId" clId="{C81E60EF-EF5F-4B4B-A4E1-3178676F15CC}" dt="2026-05-23T04:57:44.480" v="861" actId="1076"/>
+          <ac:picMkLst>
+            <pc:docMk/>
+            <pc:sldMk cId="0" sldId="272"/>
+            <ac:picMk id="7" creationId="{900B74AF-50A8-EDCD-6B4E-3FA9662EE864}"/>
+          </ac:picMkLst>
+        </pc:picChg>
+        <pc:picChg chg="del">
+          <ac:chgData name="ARJUN AVALAKKI MOHAN" userId="be4ab9aaf12c5868" providerId="LiveId" clId="{C81E60EF-EF5F-4B4B-A4E1-3178676F15CC}" dt="2026-05-23T04:40:01.333" v="834" actId="478"/>
+          <ac:picMkLst>
+            <pc:docMk/>
+            <pc:sldMk cId="0" sldId="272"/>
+            <ac:picMk id="283" creationId="{00000000-0000-0000-0000-000000000000}"/>
+          </ac:picMkLst>
+        </pc:picChg>
       </pc:sldChg>
       <pc:sldChg chg="modNotes">
         <pc:chgData name="ARJUN AVALAKKI MOHAN" userId="be4ab9aaf12c5868" providerId="LiveId" clId="{C81E60EF-EF5F-4B4B-A4E1-3178676F15CC}" dt="2026-05-20T03:54:24.689" v="721"/>
@@ -28343,10 +28383,10 @@
       </p:sp>
       <p:pic>
         <p:nvPicPr>
-          <p:cNvPr id="4" name="Picture 3">
+          <p:cNvPr id="3" name="Picture 2">
             <a:extLst>
               <a:ext uri="{FF2B5EF4-FFF2-40B4-BE49-F238E27FC236}">
-                <a16:creationId xmlns:a16="http://schemas.microsoft.com/office/drawing/2014/main" id="{A5722C49-878A-9ADD-0D36-BBD86256153F}"/>
+                <a16:creationId xmlns:a16="http://schemas.microsoft.com/office/drawing/2014/main" id="{0FA426DF-3EB2-5B29-14C6-AD8D9874DE10}"/>
               </a:ext>
             </a:extLst>
           </p:cNvPr>
@@ -28363,16 +28403,14 @@
         </p:blipFill>
         <p:spPr>
           <a:xfrm>
-            <a:off x="464820" y="5029200"/>
-            <a:ext cx="6850380" cy="4572000"/>
+            <a:off x="264850" y="5313680"/>
+            <a:ext cx="6969070" cy="3312160"/>
           </a:xfrm>
           <a:prstGeom prst="rect">
             <a:avLst/>
           </a:prstGeom>
           <a:ln>
-            <a:solidFill>
-              <a:schemeClr val="tx1"/>
-            </a:solidFill>
+            <a:noFill/>
           </a:ln>
         </p:spPr>
       </p:pic>
@@ -28455,7 +28493,7 @@
         </p:nvSpPr>
         <p:spPr>
           <a:xfrm>
-            <a:off x="264950" y="2253724"/>
+            <a:off x="264850" y="1816844"/>
             <a:ext cx="7242600" cy="7731900"/>
           </a:xfrm>
           <a:prstGeom prst="rect">
@@ -28641,10 +28679,10 @@
       </p:sp>
       <p:pic>
         <p:nvPicPr>
-          <p:cNvPr id="2" name="Picture 1">
+          <p:cNvPr id="3" name="Picture 2">
             <a:extLst>
               <a:ext uri="{FF2B5EF4-FFF2-40B4-BE49-F238E27FC236}">
-                <a16:creationId xmlns:a16="http://schemas.microsoft.com/office/drawing/2014/main" id="{83237B88-52C8-4925-B904-FB0AF33100D6}"/>
+                <a16:creationId xmlns:a16="http://schemas.microsoft.com/office/drawing/2014/main" id="{C331EB5E-11D8-4A6D-0411-2A0C93A01961}"/>
               </a:ext>
             </a:extLst>
           </p:cNvPr>
@@ -28661,16 +28699,14 @@
         </p:blipFill>
         <p:spPr>
           <a:xfrm>
-            <a:off x="264850" y="5280660"/>
-            <a:ext cx="7242600" cy="4579620"/>
+            <a:off x="345440" y="4798257"/>
+            <a:ext cx="7162010" cy="5087423"/>
           </a:xfrm>
           <a:prstGeom prst="rect">
             <a:avLst/>
           </a:prstGeom>
           <a:ln>
-            <a:solidFill>
-              <a:schemeClr val="tx1"/>
-            </a:solidFill>
+            <a:noFill/>
           </a:ln>
         </p:spPr>
       </p:pic>
@@ -28753,8 +28789,8 @@
         </p:nvSpPr>
         <p:spPr>
           <a:xfrm>
-            <a:off x="264950" y="1990174"/>
-            <a:ext cx="7242600" cy="7731900"/>
+            <a:off x="264900" y="1766654"/>
+            <a:ext cx="7242600" cy="3262546"/>
           </a:xfrm>
           <a:prstGeom prst="rect">
             <a:avLst/>
@@ -28861,10 +28897,10 @@
       </p:sp>
       <p:pic>
         <p:nvPicPr>
-          <p:cNvPr id="4" name="Picture 3">
+          <p:cNvPr id="3" name="Picture 2">
             <a:extLst>
               <a:ext uri="{FF2B5EF4-FFF2-40B4-BE49-F238E27FC236}">
-                <a16:creationId xmlns:a16="http://schemas.microsoft.com/office/drawing/2014/main" id="{ECCD54A3-5A7D-7962-92AF-B50CC087C9F0}"/>
+                <a16:creationId xmlns:a16="http://schemas.microsoft.com/office/drawing/2014/main" id="{4FDF5F04-A16A-8719-A692-B9C7214704D4}"/>
               </a:ext>
             </a:extLst>
           </p:cNvPr>
@@ -28881,16 +28917,14 @@
         </p:blipFill>
         <p:spPr>
           <a:xfrm>
-            <a:off x="420130" y="5343781"/>
-            <a:ext cx="6822470" cy="4170922"/>
+            <a:off x="264900" y="5029200"/>
+            <a:ext cx="7242600" cy="4439920"/>
           </a:xfrm>
           <a:prstGeom prst="rect">
             <a:avLst/>
           </a:prstGeom>
           <a:ln>
-            <a:solidFill>
-              <a:schemeClr val="tx1"/>
-            </a:solidFill>
+            <a:noFill/>
           </a:ln>
         </p:spPr>
       </p:pic>
@@ -30065,328 +30099,149 @@
               <a:buNone/>
             </a:pPr>
             <a:r>
-              <a:rPr lang="en" sz="1900"/>
+              <a:rPr lang="en" sz="1900" dirty="0"/>
               <a:t>Create a DDL SQL script capable of building the database you designed in Step 2</a:t>
             </a:r>
-            <a:endParaRPr sz="1900"/>
-          </a:p>
-          <a:p>
-            <a:pPr marL="241300" marR="241300" lvl="0" indent="0" algn="l" rtl="0">
-              <a:lnSpc>
-                <a:spcPct val="100000"/>
-              </a:lnSpc>
+            <a:endParaRPr sz="1900" dirty="0"/>
+          </a:p>
+          <a:p>
+            <a:pPr marL="457200" lvl="0" indent="0" algn="l" rtl="0">
+              <a:spcBef>
+                <a:spcPts val="0"/>
+              </a:spcBef>
+              <a:spcAft>
+                <a:spcPts val="0"/>
+              </a:spcAft>
+              <a:buNone/>
+            </a:pPr>
+            <a:endParaRPr sz="1900" dirty="0"/>
+          </a:p>
+          <a:p>
+            <a:pPr marL="457200" lvl="0" indent="0" algn="l" rtl="0">
               <a:spcBef>
                 <a:spcPts val="1600"/>
               </a:spcBef>
               <a:spcAft>
                 <a:spcPts val="0"/>
               </a:spcAft>
-              <a:buClr>
-                <a:schemeClr val="dk1"/>
-              </a:buClr>
-              <a:buSzPts val="1100"/>
-              <a:buFont typeface="Arial"/>
               <a:buNone/>
             </a:pPr>
-            <a:r>
-              <a:rPr lang="en" sz="1350" b="1">
-                <a:solidFill>
-                  <a:srgbClr val="2E3D49"/>
-                </a:solidFill>
-                <a:highlight>
-                  <a:srgbClr val="FFFFFF"/>
-                </a:highlight>
-                <a:latin typeface="Open Sans"/>
-                <a:ea typeface="Open Sans"/>
-                <a:cs typeface="Open Sans"/>
-                <a:sym typeface="Open Sans"/>
-              </a:rPr>
-              <a:t>Hints</a:t>
-            </a:r>
-            <a:endParaRPr sz="1350" b="1">
-              <a:solidFill>
-                <a:srgbClr val="2E3D49"/>
-              </a:solidFill>
-              <a:highlight>
-                <a:srgbClr val="FFFFFF"/>
-              </a:highlight>
-              <a:latin typeface="Open Sans"/>
-              <a:ea typeface="Open Sans"/>
-              <a:cs typeface="Open Sans"/>
-              <a:sym typeface="Open Sans"/>
-            </a:endParaRPr>
-          </a:p>
-          <a:p>
-            <a:pPr marL="241300" marR="241300" lvl="0" indent="0" algn="l" rtl="0">
-              <a:lnSpc>
-                <a:spcPct val="100000"/>
-              </a:lnSpc>
-              <a:spcBef>
-                <a:spcPts val="0"/>
-              </a:spcBef>
-              <a:spcAft>
-                <a:spcPts val="0"/>
-              </a:spcAft>
-              <a:buClr>
-                <a:schemeClr val="dk1"/>
-              </a:buClr>
-              <a:buSzPts val="1100"/>
-              <a:buFont typeface="Arial"/>
+            <a:endParaRPr sz="1900" dirty="0"/>
+          </a:p>
+          <a:p>
+            <a:pPr marL="457200" lvl="0" indent="0" algn="l" rtl="0">
+              <a:spcBef>
+                <a:spcPts val="1600"/>
+              </a:spcBef>
+              <a:spcAft>
+                <a:spcPts val="0"/>
+              </a:spcAft>
               <a:buNone/>
             </a:pPr>
-            <a:r>
-              <a:rPr lang="en" sz="1350">
-                <a:solidFill>
-                  <a:srgbClr val="525C65"/>
-                </a:solidFill>
-                <a:highlight>
-                  <a:srgbClr val="FFFFFF"/>
-                </a:highlight>
-                <a:latin typeface="Open Sans"/>
-                <a:ea typeface="Open Sans"/>
-                <a:cs typeface="Open Sans"/>
-                <a:sym typeface="Open Sans"/>
-              </a:rPr>
-              <a:t>The DDL script will be graded by running the code you submit. Please ensure your SQL code runs properly.</a:t>
-            </a:r>
-            <a:endParaRPr sz="1350">
-              <a:solidFill>
-                <a:srgbClr val="525C65"/>
-              </a:solidFill>
-              <a:highlight>
-                <a:srgbClr val="FFFFFF"/>
-              </a:highlight>
-              <a:latin typeface="Open Sans"/>
-              <a:ea typeface="Open Sans"/>
-              <a:cs typeface="Open Sans"/>
-              <a:sym typeface="Open Sans"/>
-            </a:endParaRPr>
-          </a:p>
-          <a:p>
-            <a:pPr marL="241300" marR="241300" lvl="0" indent="0" algn="l" rtl="0">
-              <a:lnSpc>
-                <a:spcPct val="100000"/>
-              </a:lnSpc>
-              <a:spcBef>
-                <a:spcPts val="0"/>
-              </a:spcBef>
-              <a:spcAft>
-                <a:spcPts val="0"/>
-              </a:spcAft>
-              <a:buClr>
-                <a:schemeClr val="dk1"/>
-              </a:buClr>
-              <a:buSzPts val="1100"/>
-              <a:buFont typeface="Arial"/>
+            <a:endParaRPr sz="1900" dirty="0"/>
+          </a:p>
+          <a:p>
+            <a:pPr marL="457200" lvl="0" indent="0" algn="l" rtl="0">
+              <a:spcBef>
+                <a:spcPts val="1600"/>
+              </a:spcBef>
+              <a:spcAft>
+                <a:spcPts val="1600"/>
+              </a:spcAft>
               <a:buNone/>
             </a:pPr>
-            <a:endParaRPr sz="1350">
-              <a:solidFill>
-                <a:srgbClr val="525C65"/>
-              </a:solidFill>
-              <a:highlight>
-                <a:srgbClr val="FFFFFF"/>
-              </a:highlight>
-              <a:latin typeface="Open Sans"/>
-              <a:ea typeface="Open Sans"/>
-              <a:cs typeface="Open Sans"/>
-              <a:sym typeface="Open Sans"/>
-            </a:endParaRPr>
-          </a:p>
-          <a:p>
-            <a:pPr marL="241300" marR="241300" lvl="0" indent="0" algn="l" rtl="0">
-              <a:lnSpc>
-                <a:spcPct val="100000"/>
-              </a:lnSpc>
-              <a:spcBef>
-                <a:spcPts val="0"/>
-              </a:spcBef>
-              <a:spcAft>
-                <a:spcPts val="0"/>
-              </a:spcAft>
-              <a:buNone/>
-            </a:pPr>
-            <a:r>
-              <a:rPr lang="en" sz="1350">
-                <a:solidFill>
-                  <a:srgbClr val="525C65"/>
-                </a:solidFill>
-                <a:highlight>
-                  <a:srgbClr val="FFFFFF"/>
-                </a:highlight>
-                <a:latin typeface="Open Sans"/>
-                <a:ea typeface="Open Sans"/>
-                <a:cs typeface="Open Sans"/>
-                <a:sym typeface="Open Sans"/>
-              </a:rPr>
-              <a:t>Foreign keys cannot be created on tables that do not exist yet, so it may be easier to create all tables in the database, then to go back and run modify statements on the tables to create foreign key constraints.</a:t>
-            </a:r>
-            <a:endParaRPr sz="1350">
-              <a:solidFill>
-                <a:srgbClr val="525C65"/>
-              </a:solidFill>
-              <a:highlight>
-                <a:srgbClr val="FFFFFF"/>
-              </a:highlight>
-              <a:latin typeface="Open Sans"/>
-              <a:ea typeface="Open Sans"/>
-              <a:cs typeface="Open Sans"/>
-              <a:sym typeface="Open Sans"/>
-            </a:endParaRPr>
-          </a:p>
-          <a:p>
-            <a:pPr marL="241300" marR="241300" lvl="0" indent="0" algn="l" rtl="0">
-              <a:lnSpc>
-                <a:spcPct val="100000"/>
-              </a:lnSpc>
-              <a:spcBef>
-                <a:spcPts val="0"/>
-              </a:spcBef>
-              <a:spcAft>
-                <a:spcPts val="0"/>
-              </a:spcAft>
-              <a:buNone/>
-            </a:pPr>
-            <a:endParaRPr sz="1350">
-              <a:solidFill>
-                <a:srgbClr val="2E3D49"/>
-              </a:solidFill>
-              <a:highlight>
-                <a:srgbClr val="FFFFFF"/>
-              </a:highlight>
-              <a:latin typeface="Open Sans"/>
-              <a:ea typeface="Open Sans"/>
-              <a:cs typeface="Open Sans"/>
-              <a:sym typeface="Open Sans"/>
-            </a:endParaRPr>
-          </a:p>
-          <a:p>
-            <a:pPr marL="241300" marR="241300" lvl="0" indent="0" algn="l" rtl="0">
-              <a:lnSpc>
-                <a:spcPct val="100000"/>
-              </a:lnSpc>
-              <a:spcBef>
-                <a:spcPts val="0"/>
-              </a:spcBef>
-              <a:spcAft>
-                <a:spcPts val="0"/>
-              </a:spcAft>
-              <a:buClr>
-                <a:schemeClr val="dk1"/>
-              </a:buClr>
-              <a:buSzPts val="1100"/>
-              <a:buFont typeface="Arial"/>
-              <a:buNone/>
-            </a:pPr>
-            <a:r>
-              <a:rPr lang="en" sz="1350">
-                <a:solidFill>
-                  <a:srgbClr val="FF0000"/>
-                </a:solidFill>
-                <a:highlight>
-                  <a:srgbClr val="FFFFFF"/>
-                </a:highlight>
-                <a:latin typeface="Open Sans"/>
-                <a:ea typeface="Open Sans"/>
-                <a:cs typeface="Open Sans"/>
-                <a:sym typeface="Open Sans"/>
-              </a:rPr>
-              <a:t>Remember to submit the related SQL file as well, not just a screenshot (replace the below screenshot).</a:t>
-            </a:r>
-            <a:endParaRPr sz="1350">
-              <a:solidFill>
-                <a:srgbClr val="FF0000"/>
-              </a:solidFill>
-              <a:highlight>
-                <a:srgbClr val="FFFFFF"/>
-              </a:highlight>
-              <a:latin typeface="Open Sans"/>
-              <a:ea typeface="Open Sans"/>
-              <a:cs typeface="Open Sans"/>
-              <a:sym typeface="Open Sans"/>
-            </a:endParaRPr>
-          </a:p>
-          <a:p>
-            <a:pPr marL="457200" lvl="0" indent="0" algn="l" rtl="0">
-              <a:spcBef>
-                <a:spcPts val="0"/>
-              </a:spcBef>
-              <a:spcAft>
-                <a:spcPts val="0"/>
-              </a:spcAft>
-              <a:buNone/>
-            </a:pPr>
-            <a:endParaRPr sz="1900"/>
-          </a:p>
-          <a:p>
-            <a:pPr marL="457200" lvl="0" indent="0" algn="l" rtl="0">
-              <a:spcBef>
-                <a:spcPts val="1600"/>
-              </a:spcBef>
-              <a:spcAft>
-                <a:spcPts val="0"/>
-              </a:spcAft>
-              <a:buNone/>
-            </a:pPr>
-            <a:endParaRPr sz="1900"/>
-          </a:p>
-          <a:p>
-            <a:pPr marL="457200" lvl="0" indent="0" algn="l" rtl="0">
-              <a:spcBef>
-                <a:spcPts val="1600"/>
-              </a:spcBef>
-              <a:spcAft>
-                <a:spcPts val="0"/>
-              </a:spcAft>
-              <a:buNone/>
-            </a:pPr>
-            <a:endParaRPr sz="1900"/>
-          </a:p>
-          <a:p>
-            <a:pPr marL="457200" lvl="0" indent="0" algn="l" rtl="0">
-              <a:spcBef>
-                <a:spcPts val="1600"/>
-              </a:spcBef>
-              <a:spcAft>
-                <a:spcPts val="1600"/>
-              </a:spcAft>
-              <a:buNone/>
-            </a:pPr>
-            <a:endParaRPr sz="1900"/>
+            <a:endParaRPr sz="1900" dirty="0"/>
           </a:p>
         </p:txBody>
       </p:sp>
       <p:pic>
         <p:nvPicPr>
-          <p:cNvPr id="283" name="Google Shape;283;p67"/>
-          <p:cNvPicPr preferRelativeResize="0"/>
+          <p:cNvPr id="3" name="Picture 2">
+            <a:extLst>
+              <a:ext uri="{FF2B5EF4-FFF2-40B4-BE49-F238E27FC236}">
+                <a16:creationId xmlns:a16="http://schemas.microsoft.com/office/drawing/2014/main" id="{76232950-6D82-5068-3105-506D04C9CEFB}"/>
+              </a:ext>
+            </a:extLst>
+          </p:cNvPr>
+          <p:cNvPicPr>
+            <a:picLocks noChangeAspect="1"/>
+          </p:cNvPicPr>
           <p:nvPr/>
         </p:nvPicPr>
-        <p:blipFill rotWithShape="1">
-          <a:blip r:embed="rId3">
-            <a:alphaModFix/>
-          </a:blip>
-          <a:srcRect l="2818" t="2391"/>
-          <a:stretch/>
+        <p:blipFill>
+          <a:blip r:embed="rId3"/>
+          <a:stretch>
+            <a:fillRect/>
+          </a:stretch>
         </p:blipFill>
         <p:spPr>
           <a:xfrm>
-            <a:off x="1641775" y="5527975"/>
-            <a:ext cx="3823475" cy="3971125"/>
+            <a:off x="385900" y="3146975"/>
+            <a:ext cx="3175060" cy="1648910"/>
           </a:xfrm>
           <a:prstGeom prst="rect">
             <a:avLst/>
           </a:prstGeom>
-          <a:noFill/>
-          <a:ln w="9525" cap="flat" cmpd="sng">
-            <a:solidFill>
-              <a:schemeClr val="dk2"/>
-            </a:solidFill>
-            <a:prstDash val="solid"/>
-            <a:round/>
-            <a:headEnd type="none" w="sm" len="sm"/>
-            <a:tailEnd type="none" w="sm" len="sm"/>
-          </a:ln>
+        </p:spPr>
+      </p:pic>
+      <p:pic>
+        <p:nvPicPr>
+          <p:cNvPr id="5" name="Picture 4">
+            <a:extLst>
+              <a:ext uri="{FF2B5EF4-FFF2-40B4-BE49-F238E27FC236}">
+                <a16:creationId xmlns:a16="http://schemas.microsoft.com/office/drawing/2014/main" id="{28FE4F40-9295-B4A4-C7A6-585514873CBB}"/>
+              </a:ext>
+            </a:extLst>
+          </p:cNvPr>
+          <p:cNvPicPr>
+            <a:picLocks noChangeAspect="1"/>
+          </p:cNvPicPr>
+          <p:nvPr/>
+        </p:nvPicPr>
+        <p:blipFill>
+          <a:blip r:embed="rId4"/>
+          <a:stretch>
+            <a:fillRect/>
+          </a:stretch>
+        </p:blipFill>
+        <p:spPr>
+          <a:xfrm>
+            <a:off x="385899" y="4795885"/>
+            <a:ext cx="3175060" cy="4778190"/>
+          </a:xfrm>
+          <a:prstGeom prst="rect">
+            <a:avLst/>
+          </a:prstGeom>
+        </p:spPr>
+      </p:pic>
+      <p:pic>
+        <p:nvPicPr>
+          <p:cNvPr id="7" name="Picture 6">
+            <a:extLst>
+              <a:ext uri="{FF2B5EF4-FFF2-40B4-BE49-F238E27FC236}">
+                <a16:creationId xmlns:a16="http://schemas.microsoft.com/office/drawing/2014/main" id="{900B74AF-50A8-EDCD-6B4E-3FA9662EE864}"/>
+              </a:ext>
+            </a:extLst>
+          </p:cNvPr>
+          <p:cNvPicPr>
+            <a:picLocks noChangeAspect="1"/>
+          </p:cNvPicPr>
+          <p:nvPr/>
+        </p:nvPicPr>
+        <p:blipFill>
+          <a:blip r:embed="rId5"/>
+          <a:stretch>
+            <a:fillRect/>
+          </a:stretch>
+        </p:blipFill>
+        <p:spPr>
+          <a:xfrm>
+            <a:off x="4211441" y="3146975"/>
+            <a:ext cx="3296110" cy="5658640"/>
+          </a:xfrm>
+          <a:prstGeom prst="rect">
+            <a:avLst/>
+          </a:prstGeom>
         </p:spPr>
       </p:pic>
     </p:spTree>

--- a/Modules/03-Data-Architect/projects/Project 1 - Human Resources Database Design/report/HR_Database_Design_Project_Arjun_Avalakki_Mohan.pptx
+++ b/Modules/03-Data-Architect/projects/Project 1 - Human Resources Database Design/report/HR_Database_Design_Project_Arjun_Avalakki_Mohan.pptx
@@ -8,7 +8,7 @@
     <p:sldMasterId id="2147483697" r:id="rId4"/>
   </p:sldMasterIdLst>
   <p:notesMasterIdLst>
-    <p:notesMasterId r:id="rId29"/>
+    <p:notesMasterId r:id="rId30"/>
   </p:notesMasterIdLst>
   <p:sldIdLst>
     <p:sldId id="256" r:id="rId5"/>
@@ -28,44 +28,45 @@
     <p:sldId id="270" r:id="rId19"/>
     <p:sldId id="271" r:id="rId20"/>
     <p:sldId id="272" r:id="rId21"/>
-    <p:sldId id="273" r:id="rId22"/>
-    <p:sldId id="274" r:id="rId23"/>
-    <p:sldId id="275" r:id="rId24"/>
-    <p:sldId id="276" r:id="rId25"/>
-    <p:sldId id="277" r:id="rId26"/>
-    <p:sldId id="278" r:id="rId27"/>
-    <p:sldId id="279" r:id="rId28"/>
+    <p:sldId id="288" r:id="rId22"/>
+    <p:sldId id="273" r:id="rId23"/>
+    <p:sldId id="274" r:id="rId24"/>
+    <p:sldId id="275" r:id="rId25"/>
+    <p:sldId id="276" r:id="rId26"/>
+    <p:sldId id="277" r:id="rId27"/>
+    <p:sldId id="278" r:id="rId28"/>
+    <p:sldId id="279" r:id="rId29"/>
   </p:sldIdLst>
   <p:sldSz cx="7772400" cy="10058400"/>
   <p:notesSz cx="6858000" cy="9144000"/>
   <p:embeddedFontLst>
     <p:embeddedFont>
       <p:font typeface="Helvetica Neue" panose="020B0604020202020204" charset="0"/>
-      <p:regular r:id="rId30"/>
-      <p:bold r:id="rId31"/>
-      <p:italic r:id="rId32"/>
-      <p:boldItalic r:id="rId33"/>
+      <p:regular r:id="rId31"/>
+      <p:bold r:id="rId32"/>
+      <p:italic r:id="rId33"/>
+      <p:boldItalic r:id="rId34"/>
     </p:embeddedFont>
     <p:embeddedFont>
       <p:font typeface="Open Sans" panose="020B0606030504020204" pitchFamily="34" charset="0"/>
-      <p:regular r:id="rId34"/>
-      <p:bold r:id="rId35"/>
-      <p:italic r:id="rId36"/>
-      <p:boldItalic r:id="rId37"/>
+      <p:regular r:id="rId35"/>
+      <p:bold r:id="rId36"/>
+      <p:italic r:id="rId37"/>
+      <p:boldItalic r:id="rId38"/>
     </p:embeddedFont>
     <p:embeddedFont>
       <p:font typeface="Open Sans Light" panose="020B0306030504020204" pitchFamily="34" charset="0"/>
-      <p:regular r:id="rId38"/>
-      <p:bold r:id="rId39"/>
-      <p:italic r:id="rId40"/>
-      <p:boldItalic r:id="rId41"/>
+      <p:regular r:id="rId39"/>
+      <p:bold r:id="rId40"/>
+      <p:italic r:id="rId41"/>
+      <p:boldItalic r:id="rId42"/>
     </p:embeddedFont>
     <p:embeddedFont>
       <p:font typeface="Source Code Pro" panose="020B0509030403020204" pitchFamily="49" charset="0"/>
-      <p:regular r:id="rId42"/>
-      <p:bold r:id="rId43"/>
-      <p:italic r:id="rId44"/>
-      <p:boldItalic r:id="rId45"/>
+      <p:regular r:id="rId43"/>
+      <p:bold r:id="rId44"/>
+      <p:italic r:id="rId45"/>
+      <p:boldItalic r:id="rId46"/>
     </p:embeddedFont>
   </p:embeddedFontLst>
   <p:defaultTextStyle>
@@ -308,7 +309,7 @@
 <file path=ppt/revisionInfo.xml><?xml version="1.0" encoding="utf-8"?>
 <p1510:revInfo xmlns:a="http://schemas.openxmlformats.org/drawingml/2006/main" xmlns:r="http://schemas.openxmlformats.org/officeDocument/2006/relationships" xmlns:p1510="http://schemas.microsoft.com/office/powerpoint/2015/10/main">
   <p1510:revLst>
-    <p1510:client id="{CEECDE29-5A9E-4E44-A6A5-88C1A3F6F982}" v="4" dt="2026-05-23T06:15:43.810"/>
+    <p1510:client id="{CEECDE29-5A9E-4E44-A6A5-88C1A3F6F982}" v="6" dt="2026-05-23T06:54:00.445"/>
   </p1510:revLst>
 </p1510:revInfo>
 </file>
@@ -318,7 +319,7 @@
   <pc:docChgLst>
     <pc:chgData name="ARJUN AVALAKKI MOHAN" userId="be4ab9aaf12c5868" providerId="LiveId" clId="{C81E60EF-EF5F-4B4B-A4E1-3178676F15CC}"/>
     <pc:docChg chg="undo custSel addSld delSld modSld">
-      <pc:chgData name="ARJUN AVALAKKI MOHAN" userId="be4ab9aaf12c5868" providerId="LiveId" clId="{C81E60EF-EF5F-4B4B-A4E1-3178676F15CC}" dt="2026-05-23T06:18:14.503" v="897" actId="2085"/>
+      <pc:chgData name="ARJUN AVALAKKI MOHAN" userId="be4ab9aaf12c5868" providerId="LiveId" clId="{C81E60EF-EF5F-4B4B-A4E1-3178676F15CC}" dt="2026-05-23T06:54:48.325" v="927" actId="2890"/>
       <pc:docMkLst>
         <pc:docMk/>
       </pc:docMkLst>
@@ -575,21 +576,37 @@
         </pc:sldMkLst>
       </pc:sldChg>
       <pc:sldChg chg="addSp delSp modSp mod modNotes">
-        <pc:chgData name="ARJUN AVALAKKI MOHAN" userId="be4ab9aaf12c5868" providerId="LiveId" clId="{C81E60EF-EF5F-4B4B-A4E1-3178676F15CC}" dt="2026-05-23T04:57:50.654" v="863" actId="14100"/>
+        <pc:chgData name="ARJUN AVALAKKI MOHAN" userId="be4ab9aaf12c5868" providerId="LiveId" clId="{C81E60EF-EF5F-4B4B-A4E1-3178676F15CC}" dt="2026-05-23T06:54:28.915" v="926" actId="14100"/>
         <pc:sldMkLst>
           <pc:docMk/>
           <pc:sldMk cId="0" sldId="272"/>
         </pc:sldMkLst>
+        <pc:spChg chg="add del">
+          <ac:chgData name="ARJUN AVALAKKI MOHAN" userId="be4ab9aaf12c5868" providerId="LiveId" clId="{C81E60EF-EF5F-4B4B-A4E1-3178676F15CC}" dt="2026-05-23T06:49:21.873" v="910" actId="22"/>
+          <ac:spMkLst>
+            <pc:docMk/>
+            <pc:sldMk cId="0" sldId="272"/>
+            <ac:spMk id="8" creationId="{EF9905E1-C713-E4E1-2296-01DDFAD6042C}"/>
+          </ac:spMkLst>
+        </pc:spChg>
+        <pc:spChg chg="add mod">
+          <ac:chgData name="ARJUN AVALAKKI MOHAN" userId="be4ab9aaf12c5868" providerId="LiveId" clId="{C81E60EF-EF5F-4B4B-A4E1-3178676F15CC}" dt="2026-05-23T06:54:28.915" v="926" actId="14100"/>
+          <ac:spMkLst>
+            <pc:docMk/>
+            <pc:sldMk cId="0" sldId="272"/>
+            <ac:spMk id="11" creationId="{D4ABDF3F-C62F-1A03-305E-9ACEC9558668}"/>
+          </ac:spMkLst>
+        </pc:spChg>
         <pc:spChg chg="mod">
-          <ac:chgData name="ARJUN AVALAKKI MOHAN" userId="be4ab9aaf12c5868" providerId="LiveId" clId="{C81E60EF-EF5F-4B4B-A4E1-3178676F15CC}" dt="2026-05-23T04:56:27.298" v="854" actId="6549"/>
+          <ac:chgData name="ARJUN AVALAKKI MOHAN" userId="be4ab9aaf12c5868" providerId="LiveId" clId="{C81E60EF-EF5F-4B4B-A4E1-3178676F15CC}" dt="2026-05-23T06:48:30.836" v="903" actId="1076"/>
           <ac:spMkLst>
             <pc:docMk/>
             <pc:sldMk cId="0" sldId="272"/>
             <ac:spMk id="282" creationId="{00000000-0000-0000-0000-000000000000}"/>
           </ac:spMkLst>
         </pc:spChg>
-        <pc:picChg chg="add mod">
-          <ac:chgData name="ARJUN AVALAKKI MOHAN" userId="be4ab9aaf12c5868" providerId="LiveId" clId="{C81E60EF-EF5F-4B4B-A4E1-3178676F15CC}" dt="2026-05-23T04:57:48.176" v="862" actId="14100"/>
+        <pc:picChg chg="add del mod">
+          <ac:chgData name="ARJUN AVALAKKI MOHAN" userId="be4ab9aaf12c5868" providerId="LiveId" clId="{C81E60EF-EF5F-4B4B-A4E1-3178676F15CC}" dt="2026-05-23T06:48:19.247" v="898" actId="478"/>
           <ac:picMkLst>
             <pc:docMk/>
             <pc:sldMk cId="0" sldId="272"/>
@@ -597,19 +614,35 @@
           </ac:picMkLst>
         </pc:picChg>
         <pc:picChg chg="add mod">
-          <ac:chgData name="ARJUN AVALAKKI MOHAN" userId="be4ab9aaf12c5868" providerId="LiveId" clId="{C81E60EF-EF5F-4B4B-A4E1-3178676F15CC}" dt="2026-05-23T04:57:50.654" v="863" actId="14100"/>
+          <ac:chgData name="ARJUN AVALAKKI MOHAN" userId="be4ab9aaf12c5868" providerId="LiveId" clId="{C81E60EF-EF5F-4B4B-A4E1-3178676F15CC}" dt="2026-05-23T06:53:19.197" v="914" actId="1076"/>
+          <ac:picMkLst>
+            <pc:docMk/>
+            <pc:sldMk cId="0" sldId="272"/>
+            <ac:picMk id="4" creationId="{4ABB8DA1-DE2B-A470-FD35-BDB987176BFB}"/>
+          </ac:picMkLst>
+        </pc:picChg>
+        <pc:picChg chg="add del mod">
+          <ac:chgData name="ARJUN AVALAKKI MOHAN" userId="be4ab9aaf12c5868" providerId="LiveId" clId="{C81E60EF-EF5F-4B4B-A4E1-3178676F15CC}" dt="2026-05-23T06:48:20.079" v="899" actId="478"/>
           <ac:picMkLst>
             <pc:docMk/>
             <pc:sldMk cId="0" sldId="272"/>
             <ac:picMk id="5" creationId="{28FE4F40-9295-B4A4-C7A6-585514873CBB}"/>
           </ac:picMkLst>
         </pc:picChg>
-        <pc:picChg chg="add mod">
-          <ac:chgData name="ARJUN AVALAKKI MOHAN" userId="be4ab9aaf12c5868" providerId="LiveId" clId="{C81E60EF-EF5F-4B4B-A4E1-3178676F15CC}" dt="2026-05-23T04:57:44.480" v="861" actId="1076"/>
+        <pc:picChg chg="add del mod">
+          <ac:chgData name="ARJUN AVALAKKI MOHAN" userId="be4ab9aaf12c5868" providerId="LiveId" clId="{C81E60EF-EF5F-4B4B-A4E1-3178676F15CC}" dt="2026-05-23T06:48:51.392" v="908" actId="478"/>
           <ac:picMkLst>
             <pc:docMk/>
             <pc:sldMk cId="0" sldId="272"/>
             <ac:picMk id="7" creationId="{900B74AF-50A8-EDCD-6B4E-3FA9662EE864}"/>
+          </ac:picMkLst>
+        </pc:picChg>
+        <pc:picChg chg="add mod">
+          <ac:chgData name="ARJUN AVALAKKI MOHAN" userId="be4ab9aaf12c5868" providerId="LiveId" clId="{C81E60EF-EF5F-4B4B-A4E1-3178676F15CC}" dt="2026-05-23T06:53:21.538" v="915" actId="1076"/>
+          <ac:picMkLst>
+            <pc:docMk/>
+            <pc:sldMk cId="0" sldId="272"/>
+            <ac:picMk id="10" creationId="{49044BF0-8CAC-97D0-42E8-72488806D257}"/>
           </ac:picMkLst>
         </pc:picChg>
         <pc:picChg chg="del">
@@ -692,6 +725,13 @@
             <ac:spMk id="3" creationId="{A2BB68B0-9E76-0DFB-F8C8-9B4F0B1EC2F7}"/>
           </ac:spMkLst>
         </pc:spChg>
+      </pc:sldChg>
+      <pc:sldChg chg="add">
+        <pc:chgData name="ARJUN AVALAKKI MOHAN" userId="be4ab9aaf12c5868" providerId="LiveId" clId="{C81E60EF-EF5F-4B4B-A4E1-3178676F15CC}" dt="2026-05-23T06:54:48.325" v="927" actId="2890"/>
+        <pc:sldMkLst>
+          <pc:docMk/>
+          <pc:sldMk cId="484767743" sldId="288"/>
+        </pc:sldMkLst>
       </pc:sldChg>
     </pc:docChg>
   </pc:docChgLst>
@@ -1980,6 +2020,133 @@
   <p:cSld>
     <p:spTree>
       <p:nvGrpSpPr>
+        <p:cNvPr id="1" name="Shape 277">
+          <a:extLst>
+            <a:ext uri="{FF2B5EF4-FFF2-40B4-BE49-F238E27FC236}">
+              <a16:creationId xmlns:a16="http://schemas.microsoft.com/office/drawing/2014/main" id="{3980FA25-D600-FF76-1D7B-AA865D3E6123}"/>
+            </a:ext>
+          </a:extLst>
+        </p:cNvPr>
+        <p:cNvGrpSpPr/>
+        <p:nvPr/>
+      </p:nvGrpSpPr>
+      <p:grpSpPr>
+        <a:xfrm>
+          <a:off x="0" y="0"/>
+          <a:ext cx="0" cy="0"/>
+          <a:chOff x="0" y="0"/>
+          <a:chExt cx="0" cy="0"/>
+        </a:xfrm>
+      </p:grpSpPr>
+      <p:sp>
+        <p:nvSpPr>
+          <p:cNvPr id="278" name="Google Shape;278;g8d8c850c25_0_118:notes">
+            <a:extLst>
+              <a:ext uri="{FF2B5EF4-FFF2-40B4-BE49-F238E27FC236}">
+                <a16:creationId xmlns:a16="http://schemas.microsoft.com/office/drawing/2014/main" id="{F9A222EF-319D-E5D7-CEB3-7E7AAABA8DA4}"/>
+              </a:ext>
+            </a:extLst>
+          </p:cNvPr>
+          <p:cNvSpPr>
+            <a:spLocks noGrp="1" noRot="1" noChangeAspect="1"/>
+          </p:cNvSpPr>
+          <p:nvPr>
+            <p:ph type="sldImg" idx="2"/>
+          </p:nvPr>
+        </p:nvSpPr>
+        <p:spPr>
+          <a:xfrm>
+            <a:off x="2105025" y="685800"/>
+            <a:ext cx="2649538" cy="3429000"/>
+          </a:xfrm>
+          <a:custGeom>
+            <a:avLst/>
+            <a:gdLst/>
+            <a:ahLst/>
+            <a:cxnLst/>
+            <a:rect l="l" t="t" r="r" b="b"/>
+            <a:pathLst>
+              <a:path w="120000" h="120000" extrusionOk="0">
+                <a:moveTo>
+                  <a:pt x="0" y="0"/>
+                </a:moveTo>
+                <a:lnTo>
+                  <a:pt x="120000" y="0"/>
+                </a:lnTo>
+                <a:lnTo>
+                  <a:pt x="120000" y="120000"/>
+                </a:lnTo>
+                <a:lnTo>
+                  <a:pt x="0" y="120000"/>
+                </a:lnTo>
+                <a:close/>
+              </a:path>
+            </a:pathLst>
+          </a:custGeom>
+        </p:spPr>
+      </p:sp>
+      <p:sp>
+        <p:nvSpPr>
+          <p:cNvPr id="279" name="Google Shape;279;g8d8c850c25_0_118:notes">
+            <a:extLst>
+              <a:ext uri="{FF2B5EF4-FFF2-40B4-BE49-F238E27FC236}">
+                <a16:creationId xmlns:a16="http://schemas.microsoft.com/office/drawing/2014/main" id="{E39644E9-FB08-685B-802D-BEC2ACB27036}"/>
+              </a:ext>
+            </a:extLst>
+          </p:cNvPr>
+          <p:cNvSpPr txBox="1">
+            <a:spLocks noGrp="1"/>
+          </p:cNvSpPr>
+          <p:nvPr>
+            <p:ph type="body" idx="1"/>
+          </p:nvPr>
+        </p:nvSpPr>
+        <p:spPr>
+          <a:xfrm>
+            <a:off x="685800" y="4343400"/>
+            <a:ext cx="5486400" cy="4114800"/>
+          </a:xfrm>
+          <a:prstGeom prst="rect">
+            <a:avLst/>
+          </a:prstGeom>
+        </p:spPr>
+        <p:txBody>
+          <a:bodyPr spcFirstLastPara="1" wrap="square" lIns="91425" tIns="91425" rIns="91425" bIns="91425" anchor="t" anchorCtr="0">
+            <a:noAutofit/>
+          </a:bodyPr>
+          <a:lstStyle/>
+          <a:p>
+            <a:pPr marL="0" lvl="0" indent="0" algn="l" rtl="0">
+              <a:spcBef>
+                <a:spcPts val="0"/>
+              </a:spcBef>
+              <a:spcAft>
+                <a:spcPts val="0"/>
+              </a:spcAft>
+              <a:buNone/>
+            </a:pPr>
+            <a:endParaRPr/>
+          </a:p>
+        </p:txBody>
+      </p:sp>
+    </p:spTree>
+    <p:extLst>
+      <p:ext uri="{BB962C8B-B14F-4D97-AF65-F5344CB8AC3E}">
+        <p14:creationId xmlns:p14="http://schemas.microsoft.com/office/powerpoint/2010/main" val="248591199"/>
+      </p:ext>
+    </p:extLst>
+  </p:cSld>
+  <p:clrMapOvr>
+    <a:masterClrMapping/>
+  </p:clrMapOvr>
+</p:notes>
+</file>
+
+<file path=ppt/notesSlides/notesSlide18.xml><?xml version="1.0" encoding="utf-8"?>
+<p:notes xmlns:a="http://schemas.openxmlformats.org/drawingml/2006/main" xmlns:r="http://schemas.openxmlformats.org/officeDocument/2006/relationships" xmlns:p="http://schemas.openxmlformats.org/presentationml/2006/main" showMasterSp="0" showMasterPhAnim="0">
+  <p:cSld>
+    <p:spTree>
+      <p:nvGrpSpPr>
         <p:cNvPr id="1" name="Shape 284"/>
         <p:cNvGrpSpPr/>
         <p:nvPr/>
@@ -2079,7 +2246,7 @@
 </p:notes>
 </file>
 
-<file path=ppt/notesSlides/notesSlide18.xml><?xml version="1.0" encoding="utf-8"?>
+<file path=ppt/notesSlides/notesSlide19.xml><?xml version="1.0" encoding="utf-8"?>
 <p:notes xmlns:a="http://schemas.openxmlformats.org/drawingml/2006/main" xmlns:r="http://schemas.openxmlformats.org/officeDocument/2006/relationships" xmlns:p="http://schemas.openxmlformats.org/presentationml/2006/main" showMasterSp="0" showMasterPhAnim="0">
   <p:cSld>
     <p:spTree>
@@ -2140,110 +2307,6 @@
       <p:sp>
         <p:nvSpPr>
           <p:cNvPr id="293" name="Google Shape;293;g8c7a96e589_1_6:notes"/>
-          <p:cNvSpPr txBox="1">
-            <a:spLocks noGrp="1"/>
-          </p:cNvSpPr>
-          <p:nvPr>
-            <p:ph type="body" idx="1"/>
-          </p:nvPr>
-        </p:nvSpPr>
-        <p:spPr>
-          <a:xfrm>
-            <a:off x="685800" y="4343400"/>
-            <a:ext cx="5486400" cy="4114800"/>
-          </a:xfrm>
-          <a:prstGeom prst="rect">
-            <a:avLst/>
-          </a:prstGeom>
-        </p:spPr>
-        <p:txBody>
-          <a:bodyPr spcFirstLastPara="1" wrap="square" lIns="91425" tIns="91425" rIns="91425" bIns="91425" anchor="t" anchorCtr="0">
-            <a:noAutofit/>
-          </a:bodyPr>
-          <a:lstStyle/>
-          <a:p>
-            <a:pPr marL="0" lvl="0" indent="0" algn="l" rtl="0">
-              <a:spcBef>
-                <a:spcPts val="0"/>
-              </a:spcBef>
-              <a:spcAft>
-                <a:spcPts val="0"/>
-              </a:spcAft>
-              <a:buNone/>
-            </a:pPr>
-            <a:endParaRPr/>
-          </a:p>
-        </p:txBody>
-      </p:sp>
-    </p:spTree>
-  </p:cSld>
-  <p:clrMapOvr>
-    <a:masterClrMapping/>
-  </p:clrMapOvr>
-</p:notes>
-</file>
-
-<file path=ppt/notesSlides/notesSlide19.xml><?xml version="1.0" encoding="utf-8"?>
-<p:notes xmlns:a="http://schemas.openxmlformats.org/drawingml/2006/main" xmlns:r="http://schemas.openxmlformats.org/officeDocument/2006/relationships" xmlns:p="http://schemas.openxmlformats.org/presentationml/2006/main" showMasterSp="0" showMasterPhAnim="0">
-  <p:cSld>
-    <p:spTree>
-      <p:nvGrpSpPr>
-        <p:cNvPr id="1" name="Shape 298"/>
-        <p:cNvGrpSpPr/>
-        <p:nvPr/>
-      </p:nvGrpSpPr>
-      <p:grpSpPr>
-        <a:xfrm>
-          <a:off x="0" y="0"/>
-          <a:ext cx="0" cy="0"/>
-          <a:chOff x="0" y="0"/>
-          <a:chExt cx="0" cy="0"/>
-        </a:xfrm>
-      </p:grpSpPr>
-      <p:sp>
-        <p:nvSpPr>
-          <p:cNvPr id="299" name="Google Shape;299;g8c7a96e589_1_13:notes"/>
-          <p:cNvSpPr>
-            <a:spLocks noGrp="1" noRot="1" noChangeAspect="1"/>
-          </p:cNvSpPr>
-          <p:nvPr>
-            <p:ph type="sldImg" idx="2"/>
-          </p:nvPr>
-        </p:nvSpPr>
-        <p:spPr>
-          <a:xfrm>
-            <a:off x="2105025" y="685800"/>
-            <a:ext cx="2649538" cy="3429000"/>
-          </a:xfrm>
-          <a:custGeom>
-            <a:avLst/>
-            <a:gdLst/>
-            <a:ahLst/>
-            <a:cxnLst/>
-            <a:rect l="l" t="t" r="r" b="b"/>
-            <a:pathLst>
-              <a:path w="120000" h="120000" extrusionOk="0">
-                <a:moveTo>
-                  <a:pt x="0" y="0"/>
-                </a:moveTo>
-                <a:lnTo>
-                  <a:pt x="120000" y="0"/>
-                </a:lnTo>
-                <a:lnTo>
-                  <a:pt x="120000" y="120000"/>
-                </a:lnTo>
-                <a:lnTo>
-                  <a:pt x="0" y="120000"/>
-                </a:lnTo>
-                <a:close/>
-              </a:path>
-            </a:pathLst>
-          </a:custGeom>
-        </p:spPr>
-      </p:sp>
-      <p:sp>
-        <p:nvSpPr>
-          <p:cNvPr id="300" name="Google Shape;300;g8c7a96e589_1_13:notes"/>
           <p:cNvSpPr txBox="1">
             <a:spLocks noGrp="1"/>
           </p:cNvSpPr>
@@ -2396,6 +2459,110 @@
   <p:cSld>
     <p:spTree>
       <p:nvGrpSpPr>
+        <p:cNvPr id="1" name="Shape 298"/>
+        <p:cNvGrpSpPr/>
+        <p:nvPr/>
+      </p:nvGrpSpPr>
+      <p:grpSpPr>
+        <a:xfrm>
+          <a:off x="0" y="0"/>
+          <a:ext cx="0" cy="0"/>
+          <a:chOff x="0" y="0"/>
+          <a:chExt cx="0" cy="0"/>
+        </a:xfrm>
+      </p:grpSpPr>
+      <p:sp>
+        <p:nvSpPr>
+          <p:cNvPr id="299" name="Google Shape;299;g8c7a96e589_1_13:notes"/>
+          <p:cNvSpPr>
+            <a:spLocks noGrp="1" noRot="1" noChangeAspect="1"/>
+          </p:cNvSpPr>
+          <p:nvPr>
+            <p:ph type="sldImg" idx="2"/>
+          </p:nvPr>
+        </p:nvSpPr>
+        <p:spPr>
+          <a:xfrm>
+            <a:off x="2105025" y="685800"/>
+            <a:ext cx="2649538" cy="3429000"/>
+          </a:xfrm>
+          <a:custGeom>
+            <a:avLst/>
+            <a:gdLst/>
+            <a:ahLst/>
+            <a:cxnLst/>
+            <a:rect l="l" t="t" r="r" b="b"/>
+            <a:pathLst>
+              <a:path w="120000" h="120000" extrusionOk="0">
+                <a:moveTo>
+                  <a:pt x="0" y="0"/>
+                </a:moveTo>
+                <a:lnTo>
+                  <a:pt x="120000" y="0"/>
+                </a:lnTo>
+                <a:lnTo>
+                  <a:pt x="120000" y="120000"/>
+                </a:lnTo>
+                <a:lnTo>
+                  <a:pt x="0" y="120000"/>
+                </a:lnTo>
+                <a:close/>
+              </a:path>
+            </a:pathLst>
+          </a:custGeom>
+        </p:spPr>
+      </p:sp>
+      <p:sp>
+        <p:nvSpPr>
+          <p:cNvPr id="300" name="Google Shape;300;g8c7a96e589_1_13:notes"/>
+          <p:cNvSpPr txBox="1">
+            <a:spLocks noGrp="1"/>
+          </p:cNvSpPr>
+          <p:nvPr>
+            <p:ph type="body" idx="1"/>
+          </p:nvPr>
+        </p:nvSpPr>
+        <p:spPr>
+          <a:xfrm>
+            <a:off x="685800" y="4343400"/>
+            <a:ext cx="5486400" cy="4114800"/>
+          </a:xfrm>
+          <a:prstGeom prst="rect">
+            <a:avLst/>
+          </a:prstGeom>
+        </p:spPr>
+        <p:txBody>
+          <a:bodyPr spcFirstLastPara="1" wrap="square" lIns="91425" tIns="91425" rIns="91425" bIns="91425" anchor="t" anchorCtr="0">
+            <a:noAutofit/>
+          </a:bodyPr>
+          <a:lstStyle/>
+          <a:p>
+            <a:pPr marL="0" lvl="0" indent="0" algn="l" rtl="0">
+              <a:spcBef>
+                <a:spcPts val="0"/>
+              </a:spcBef>
+              <a:spcAft>
+                <a:spcPts val="0"/>
+              </a:spcAft>
+              <a:buNone/>
+            </a:pPr>
+            <a:endParaRPr/>
+          </a:p>
+        </p:txBody>
+      </p:sp>
+    </p:spTree>
+  </p:cSld>
+  <p:clrMapOvr>
+    <a:masterClrMapping/>
+  </p:clrMapOvr>
+</p:notes>
+</file>
+
+<file path=ppt/notesSlides/notesSlide21.xml><?xml version="1.0" encoding="utf-8"?>
+<p:notes xmlns:a="http://schemas.openxmlformats.org/drawingml/2006/main" xmlns:r="http://schemas.openxmlformats.org/officeDocument/2006/relationships" xmlns:p="http://schemas.openxmlformats.org/presentationml/2006/main" showMasterSp="0" showMasterPhAnim="0">
+  <p:cSld>
+    <p:spTree>
+      <p:nvGrpSpPr>
         <p:cNvPr id="1" name="Shape 305"/>
         <p:cNvGrpSpPr/>
         <p:nvPr/>
@@ -2495,7 +2662,7 @@
 </p:notes>
 </file>
 
-<file path=ppt/notesSlides/notesSlide21.xml><?xml version="1.0" encoding="utf-8"?>
+<file path=ppt/notesSlides/notesSlide22.xml><?xml version="1.0" encoding="utf-8"?>
 <p:notes xmlns:a="http://schemas.openxmlformats.org/drawingml/2006/main" xmlns:r="http://schemas.openxmlformats.org/officeDocument/2006/relationships" xmlns:p="http://schemas.openxmlformats.org/presentationml/2006/main" showMasterSp="0" showMasterPhAnim="0">
   <p:cSld>
     <p:spTree>
@@ -2599,7 +2766,7 @@
 </p:notes>
 </file>
 
-<file path=ppt/notesSlides/notesSlide22.xml><?xml version="1.0" encoding="utf-8"?>
+<file path=ppt/notesSlides/notesSlide23.xml><?xml version="1.0" encoding="utf-8"?>
 <p:notes xmlns:a="http://schemas.openxmlformats.org/drawingml/2006/main" xmlns:r="http://schemas.openxmlformats.org/officeDocument/2006/relationships" xmlns:p="http://schemas.openxmlformats.org/presentationml/2006/main" showMasterSp="0" showMasterPhAnim="0">
   <p:cSld>
     <p:spTree>
@@ -2703,7 +2870,7 @@
 </p:notes>
 </file>
 
-<file path=ppt/notesSlides/notesSlide23.xml><?xml version="1.0" encoding="utf-8"?>
+<file path=ppt/notesSlides/notesSlide24.xml><?xml version="1.0" encoding="utf-8"?>
 <p:notes xmlns:a="http://schemas.openxmlformats.org/drawingml/2006/main" xmlns:r="http://schemas.openxmlformats.org/officeDocument/2006/relationships" xmlns:p="http://schemas.openxmlformats.org/presentationml/2006/main" showMasterSp="0" showMasterPhAnim="0">
   <p:cSld>
     <p:spTree>
@@ -30057,10 +30224,10 @@
               <a:buNone/>
             </a:pPr>
             <a:r>
-              <a:rPr lang="en"/>
+              <a:rPr lang="en" dirty="0"/>
               <a:t>DDL</a:t>
             </a:r>
-            <a:endParaRPr/>
+            <a:endParaRPr dirty="0"/>
           </a:p>
         </p:txBody>
       </p:sp>
@@ -30076,8 +30243,8 @@
         </p:nvSpPr>
         <p:spPr>
           <a:xfrm>
-            <a:off x="264950" y="2253724"/>
-            <a:ext cx="7242600" cy="7731900"/>
+            <a:off x="264945" y="1732874"/>
+            <a:ext cx="7242600" cy="778145"/>
           </a:xfrm>
           <a:prstGeom prst="rect">
             <a:avLst/>
@@ -30156,10 +30323,10 @@
       </p:sp>
       <p:pic>
         <p:nvPicPr>
-          <p:cNvPr id="3" name="Picture 2">
+          <p:cNvPr id="4" name="Picture 3">
             <a:extLst>
               <a:ext uri="{FF2B5EF4-FFF2-40B4-BE49-F238E27FC236}">
-                <a16:creationId xmlns:a16="http://schemas.microsoft.com/office/drawing/2014/main" id="{76232950-6D82-5068-3105-506D04C9CEFB}"/>
+                <a16:creationId xmlns:a16="http://schemas.microsoft.com/office/drawing/2014/main" id="{4ABB8DA1-DE2B-A470-FD35-BDB987176BFB}"/>
               </a:ext>
             </a:extLst>
           </p:cNvPr>
@@ -30176,8 +30343,8 @@
         </p:blipFill>
         <p:spPr>
           <a:xfrm>
-            <a:off x="385900" y="3146975"/>
-            <a:ext cx="3175060" cy="1648910"/>
+            <a:off x="376059" y="3521903"/>
+            <a:ext cx="3184900" cy="6322473"/>
           </a:xfrm>
           <a:prstGeom prst="rect">
             <a:avLst/>
@@ -30186,10 +30353,10 @@
       </p:pic>
       <p:pic>
         <p:nvPicPr>
-          <p:cNvPr id="5" name="Picture 4">
+          <p:cNvPr id="10" name="Picture 9">
             <a:extLst>
               <a:ext uri="{FF2B5EF4-FFF2-40B4-BE49-F238E27FC236}">
-                <a16:creationId xmlns:a16="http://schemas.microsoft.com/office/drawing/2014/main" id="{28FE4F40-9295-B4A4-C7A6-585514873CBB}"/>
+                <a16:creationId xmlns:a16="http://schemas.microsoft.com/office/drawing/2014/main" id="{49044BF0-8CAC-97D0-42E8-72488806D257}"/>
               </a:ext>
             </a:extLst>
           </p:cNvPr>
@@ -30206,20 +30373,488 @@
         </p:blipFill>
         <p:spPr>
           <a:xfrm>
-            <a:off x="385899" y="4795885"/>
-            <a:ext cx="3175060" cy="4778190"/>
+            <a:off x="4211443" y="3521903"/>
+            <a:ext cx="3315163" cy="5563376"/>
           </a:xfrm>
           <a:prstGeom prst="rect">
             <a:avLst/>
           </a:prstGeom>
         </p:spPr>
       </p:pic>
+      <p:sp>
+        <p:nvSpPr>
+          <p:cNvPr id="11" name="Google Shape;282;p67">
+            <a:extLst>
+              <a:ext uri="{FF2B5EF4-FFF2-40B4-BE49-F238E27FC236}">
+                <a16:creationId xmlns:a16="http://schemas.microsoft.com/office/drawing/2014/main" id="{D4ABDF3F-C62F-1A03-305E-9ACEC9558668}"/>
+              </a:ext>
+            </a:extLst>
+          </p:cNvPr>
+          <p:cNvSpPr txBox="1">
+            <a:spLocks/>
+          </p:cNvSpPr>
+          <p:nvPr/>
+        </p:nvSpPr>
+        <p:spPr>
+          <a:xfrm>
+            <a:off x="284006" y="2773336"/>
+            <a:ext cx="3002891" cy="590527"/>
+          </a:xfrm>
+          <a:prstGeom prst="rect">
+            <a:avLst/>
+          </a:prstGeom>
+          <a:noFill/>
+          <a:ln>
+            <a:noFill/>
+          </a:ln>
+        </p:spPr>
+        <p:txBody>
+          <a:bodyPr spcFirstLastPara="1" wrap="square" lIns="91425" tIns="91425" rIns="91425" bIns="91425" anchor="t" anchorCtr="0">
+            <a:noAutofit/>
+          </a:bodyPr>
+          <a:lstStyle>
+            <a:defPPr marR="0" lvl="0" algn="l" rtl="0">
+              <a:lnSpc>
+                <a:spcPct val="100000"/>
+              </a:lnSpc>
+              <a:spcBef>
+                <a:spcPts val="0"/>
+              </a:spcBef>
+              <a:spcAft>
+                <a:spcPts val="0"/>
+              </a:spcAft>
+            </a:defPPr>
+            <a:lvl1pPr marL="457200" marR="0" lvl="0" indent="-419100" algn="l" rtl="0">
+              <a:lnSpc>
+                <a:spcPct val="115000"/>
+              </a:lnSpc>
+              <a:spcBef>
+                <a:spcPts val="0"/>
+              </a:spcBef>
+              <a:spcAft>
+                <a:spcPts val="0"/>
+              </a:spcAft>
+              <a:buClr>
+                <a:schemeClr val="dk2"/>
+              </a:buClr>
+              <a:buSzPts val="3000"/>
+              <a:buFont typeface="Open Sans Light"/>
+              <a:buChar char="●"/>
+              <a:defRPr sz="3000" b="0" i="0" u="none" strike="noStrike" cap="none">
+                <a:solidFill>
+                  <a:schemeClr val="dk2"/>
+                </a:solidFill>
+                <a:latin typeface="Open Sans Light"/>
+                <a:ea typeface="Open Sans Light"/>
+                <a:cs typeface="Open Sans Light"/>
+                <a:sym typeface="Open Sans Light"/>
+              </a:defRPr>
+            </a:lvl1pPr>
+            <a:lvl2pPr marL="914400" marR="0" lvl="1" indent="-381000" algn="l" rtl="0">
+              <a:lnSpc>
+                <a:spcPct val="115000"/>
+              </a:lnSpc>
+              <a:spcBef>
+                <a:spcPts val="1600"/>
+              </a:spcBef>
+              <a:spcAft>
+                <a:spcPts val="0"/>
+              </a:spcAft>
+              <a:buClr>
+                <a:schemeClr val="dk2"/>
+              </a:buClr>
+              <a:buSzPts val="2400"/>
+              <a:buFont typeface="Open Sans Light"/>
+              <a:buChar char="○"/>
+              <a:defRPr sz="2400" b="0" i="0" u="none" strike="noStrike" cap="none">
+                <a:solidFill>
+                  <a:schemeClr val="dk2"/>
+                </a:solidFill>
+                <a:latin typeface="Open Sans Light"/>
+                <a:ea typeface="Open Sans Light"/>
+                <a:cs typeface="Open Sans Light"/>
+                <a:sym typeface="Open Sans Light"/>
+              </a:defRPr>
+            </a:lvl2pPr>
+            <a:lvl3pPr marL="1371600" marR="0" lvl="2" indent="-342900" algn="l" rtl="0">
+              <a:lnSpc>
+                <a:spcPct val="115000"/>
+              </a:lnSpc>
+              <a:spcBef>
+                <a:spcPts val="1600"/>
+              </a:spcBef>
+              <a:spcAft>
+                <a:spcPts val="0"/>
+              </a:spcAft>
+              <a:buClr>
+                <a:schemeClr val="dk2"/>
+              </a:buClr>
+              <a:buSzPts val="1800"/>
+              <a:buFont typeface="Open Sans Light"/>
+              <a:buChar char="■"/>
+              <a:defRPr sz="1800" b="0" i="0" u="none" strike="noStrike" cap="none">
+                <a:solidFill>
+                  <a:schemeClr val="dk2"/>
+                </a:solidFill>
+                <a:latin typeface="Open Sans Light"/>
+                <a:ea typeface="Open Sans Light"/>
+                <a:cs typeface="Open Sans Light"/>
+                <a:sym typeface="Open Sans Light"/>
+              </a:defRPr>
+            </a:lvl3pPr>
+            <a:lvl4pPr marL="1828800" marR="0" lvl="3" indent="-317500" algn="l" rtl="0">
+              <a:lnSpc>
+                <a:spcPct val="115000"/>
+              </a:lnSpc>
+              <a:spcBef>
+                <a:spcPts val="1600"/>
+              </a:spcBef>
+              <a:spcAft>
+                <a:spcPts val="0"/>
+              </a:spcAft>
+              <a:buClr>
+                <a:schemeClr val="dk2"/>
+              </a:buClr>
+              <a:buSzPts val="1400"/>
+              <a:buFont typeface="Open Sans Light"/>
+              <a:buChar char="●"/>
+              <a:defRPr sz="1400" b="0" i="0" u="none" strike="noStrike" cap="none">
+                <a:solidFill>
+                  <a:schemeClr val="dk2"/>
+                </a:solidFill>
+                <a:latin typeface="Open Sans Light"/>
+                <a:ea typeface="Open Sans Light"/>
+                <a:cs typeface="Open Sans Light"/>
+                <a:sym typeface="Open Sans Light"/>
+              </a:defRPr>
+            </a:lvl4pPr>
+            <a:lvl5pPr marL="2286000" marR="0" lvl="4" indent="-317500" algn="l" rtl="0">
+              <a:lnSpc>
+                <a:spcPct val="115000"/>
+              </a:lnSpc>
+              <a:spcBef>
+                <a:spcPts val="1600"/>
+              </a:spcBef>
+              <a:spcAft>
+                <a:spcPts val="0"/>
+              </a:spcAft>
+              <a:buClr>
+                <a:schemeClr val="dk2"/>
+              </a:buClr>
+              <a:buSzPts val="1400"/>
+              <a:buFont typeface="Open Sans Light"/>
+              <a:buChar char="○"/>
+              <a:defRPr sz="1400" b="0" i="0" u="none" strike="noStrike" cap="none">
+                <a:solidFill>
+                  <a:schemeClr val="dk2"/>
+                </a:solidFill>
+                <a:latin typeface="Open Sans Light"/>
+                <a:ea typeface="Open Sans Light"/>
+                <a:cs typeface="Open Sans Light"/>
+                <a:sym typeface="Open Sans Light"/>
+              </a:defRPr>
+            </a:lvl5pPr>
+            <a:lvl6pPr marL="2743200" marR="0" lvl="5" indent="-317500" algn="l" rtl="0">
+              <a:lnSpc>
+                <a:spcPct val="115000"/>
+              </a:lnSpc>
+              <a:spcBef>
+                <a:spcPts val="1600"/>
+              </a:spcBef>
+              <a:spcAft>
+                <a:spcPts val="0"/>
+              </a:spcAft>
+              <a:buClr>
+                <a:schemeClr val="dk2"/>
+              </a:buClr>
+              <a:buSzPts val="1400"/>
+              <a:buFont typeface="Open Sans Light"/>
+              <a:buChar char="■"/>
+              <a:defRPr sz="1400" b="0" i="0" u="none" strike="noStrike" cap="none">
+                <a:solidFill>
+                  <a:schemeClr val="dk2"/>
+                </a:solidFill>
+                <a:latin typeface="Open Sans Light"/>
+                <a:ea typeface="Open Sans Light"/>
+                <a:cs typeface="Open Sans Light"/>
+                <a:sym typeface="Open Sans Light"/>
+              </a:defRPr>
+            </a:lvl6pPr>
+            <a:lvl7pPr marL="3200400" marR="0" lvl="6" indent="-317500" algn="l" rtl="0">
+              <a:lnSpc>
+                <a:spcPct val="115000"/>
+              </a:lnSpc>
+              <a:spcBef>
+                <a:spcPts val="1600"/>
+              </a:spcBef>
+              <a:spcAft>
+                <a:spcPts val="0"/>
+              </a:spcAft>
+              <a:buClr>
+                <a:schemeClr val="dk2"/>
+              </a:buClr>
+              <a:buSzPts val="1400"/>
+              <a:buFont typeface="Open Sans Light"/>
+              <a:buChar char="●"/>
+              <a:defRPr sz="1400" b="0" i="0" u="none" strike="noStrike" cap="none">
+                <a:solidFill>
+                  <a:schemeClr val="dk2"/>
+                </a:solidFill>
+                <a:latin typeface="Open Sans Light"/>
+                <a:ea typeface="Open Sans Light"/>
+                <a:cs typeface="Open Sans Light"/>
+                <a:sym typeface="Open Sans Light"/>
+              </a:defRPr>
+            </a:lvl7pPr>
+            <a:lvl8pPr marL="3657600" marR="0" lvl="7" indent="-317500" algn="l" rtl="0">
+              <a:lnSpc>
+                <a:spcPct val="115000"/>
+              </a:lnSpc>
+              <a:spcBef>
+                <a:spcPts val="1600"/>
+              </a:spcBef>
+              <a:spcAft>
+                <a:spcPts val="0"/>
+              </a:spcAft>
+              <a:buClr>
+                <a:schemeClr val="dk2"/>
+              </a:buClr>
+              <a:buSzPts val="1400"/>
+              <a:buFont typeface="Open Sans Light"/>
+              <a:buChar char="○"/>
+              <a:defRPr sz="1400" b="0" i="0" u="none" strike="noStrike" cap="none">
+                <a:solidFill>
+                  <a:schemeClr val="dk2"/>
+                </a:solidFill>
+                <a:latin typeface="Open Sans Light"/>
+                <a:ea typeface="Open Sans Light"/>
+                <a:cs typeface="Open Sans Light"/>
+                <a:sym typeface="Open Sans Light"/>
+              </a:defRPr>
+            </a:lvl8pPr>
+            <a:lvl9pPr marL="4114800" marR="0" lvl="8" indent="-317500" algn="l" rtl="0">
+              <a:lnSpc>
+                <a:spcPct val="115000"/>
+              </a:lnSpc>
+              <a:spcBef>
+                <a:spcPts val="1600"/>
+              </a:spcBef>
+              <a:spcAft>
+                <a:spcPts val="1600"/>
+              </a:spcAft>
+              <a:buClr>
+                <a:schemeClr val="dk2"/>
+              </a:buClr>
+              <a:buSzPts val="1400"/>
+              <a:buFont typeface="Open Sans Light"/>
+              <a:buChar char="■"/>
+              <a:defRPr sz="1400" b="0" i="0" u="none" strike="noStrike" cap="none">
+                <a:solidFill>
+                  <a:schemeClr val="dk2"/>
+                </a:solidFill>
+                <a:latin typeface="Open Sans Light"/>
+                <a:ea typeface="Open Sans Light"/>
+                <a:cs typeface="Open Sans Light"/>
+                <a:sym typeface="Open Sans Light"/>
+              </a:defRPr>
+            </a:lvl9pPr>
+          </a:lstStyle>
+          <a:p>
+            <a:pPr marL="0" indent="0">
+              <a:buNone/>
+            </a:pPr>
+            <a:r>
+              <a:rPr lang="en-US" sz="1900" b="1" dirty="0">
+                <a:solidFill>
+                  <a:srgbClr val="FF0000"/>
+                </a:solidFill>
+              </a:rPr>
+              <a:t>01_create_tables.sql</a:t>
+            </a:r>
+          </a:p>
+        </p:txBody>
+      </p:sp>
+    </p:spTree>
+  </p:cSld>
+  <p:clrMapOvr>
+    <a:masterClrMapping/>
+  </p:clrMapOvr>
+</p:sld>
+</file>
+
+<file path=ppt/slides/slide18.xml><?xml version="1.0" encoding="utf-8"?>
+<p:sld xmlns:a="http://schemas.openxmlformats.org/drawingml/2006/main" xmlns:r="http://schemas.openxmlformats.org/officeDocument/2006/relationships" xmlns:p="http://schemas.openxmlformats.org/presentationml/2006/main">
+  <p:cSld>
+    <p:spTree>
+      <p:nvGrpSpPr>
+        <p:cNvPr id="1" name="Shape 280">
+          <a:extLst>
+            <a:ext uri="{FF2B5EF4-FFF2-40B4-BE49-F238E27FC236}">
+              <a16:creationId xmlns:a16="http://schemas.microsoft.com/office/drawing/2014/main" id="{E3E78F7E-9773-081F-8767-9B81BA0EFE3D}"/>
+            </a:ext>
+          </a:extLst>
+        </p:cNvPr>
+        <p:cNvGrpSpPr/>
+        <p:nvPr/>
+      </p:nvGrpSpPr>
+      <p:grpSpPr>
+        <a:xfrm>
+          <a:off x="0" y="0"/>
+          <a:ext cx="0" cy="0"/>
+          <a:chOff x="0" y="0"/>
+          <a:chExt cx="0" cy="0"/>
+        </a:xfrm>
+      </p:grpSpPr>
+      <p:sp>
+        <p:nvSpPr>
+          <p:cNvPr id="281" name="Google Shape;281;p67">
+            <a:extLst>
+              <a:ext uri="{FF2B5EF4-FFF2-40B4-BE49-F238E27FC236}">
+                <a16:creationId xmlns:a16="http://schemas.microsoft.com/office/drawing/2014/main" id="{2E8E1985-A0A1-EB7D-60E4-BFE04267DB77}"/>
+              </a:ext>
+            </a:extLst>
+          </p:cNvPr>
+          <p:cNvSpPr txBox="1">
+            <a:spLocks noGrp="1"/>
+          </p:cNvSpPr>
+          <p:nvPr>
+            <p:ph type="title"/>
+          </p:nvPr>
+        </p:nvSpPr>
+        <p:spPr>
+          <a:xfrm>
+            <a:off x="264945" y="870271"/>
+            <a:ext cx="7242600" cy="1119900"/>
+          </a:xfrm>
+          <a:prstGeom prst="rect">
+            <a:avLst/>
+          </a:prstGeom>
+        </p:spPr>
+        <p:txBody>
+          <a:bodyPr spcFirstLastPara="1" wrap="square" lIns="91425" tIns="91425" rIns="91425" bIns="91425" anchor="ctr" anchorCtr="0">
+            <a:noAutofit/>
+          </a:bodyPr>
+          <a:lstStyle/>
+          <a:p>
+            <a:pPr marL="0" lvl="0" indent="0" algn="l" rtl="0">
+              <a:spcBef>
+                <a:spcPts val="0"/>
+              </a:spcBef>
+              <a:spcAft>
+                <a:spcPts val="0"/>
+              </a:spcAft>
+              <a:buNone/>
+            </a:pPr>
+            <a:r>
+              <a:rPr lang="en" dirty="0"/>
+              <a:t>DDL</a:t>
+            </a:r>
+            <a:endParaRPr dirty="0"/>
+          </a:p>
+        </p:txBody>
+      </p:sp>
+      <p:sp>
+        <p:nvSpPr>
+          <p:cNvPr id="282" name="Google Shape;282;p67">
+            <a:extLst>
+              <a:ext uri="{FF2B5EF4-FFF2-40B4-BE49-F238E27FC236}">
+                <a16:creationId xmlns:a16="http://schemas.microsoft.com/office/drawing/2014/main" id="{2ED2A2C5-3FE7-5262-EA37-AF98B930D887}"/>
+              </a:ext>
+            </a:extLst>
+          </p:cNvPr>
+          <p:cNvSpPr txBox="1">
+            <a:spLocks noGrp="1"/>
+          </p:cNvSpPr>
+          <p:nvPr>
+            <p:ph type="body" idx="1"/>
+          </p:nvPr>
+        </p:nvSpPr>
+        <p:spPr>
+          <a:xfrm>
+            <a:off x="264945" y="1732874"/>
+            <a:ext cx="7242600" cy="778145"/>
+          </a:xfrm>
+          <a:prstGeom prst="rect">
+            <a:avLst/>
+          </a:prstGeom>
+        </p:spPr>
+        <p:txBody>
+          <a:bodyPr spcFirstLastPara="1" wrap="square" lIns="91425" tIns="91425" rIns="91425" bIns="91425" anchor="t" anchorCtr="0">
+            <a:noAutofit/>
+          </a:bodyPr>
+          <a:lstStyle/>
+          <a:p>
+            <a:pPr marL="0" lvl="0" indent="0" algn="l" rtl="0">
+              <a:spcBef>
+                <a:spcPts val="0"/>
+              </a:spcBef>
+              <a:spcAft>
+                <a:spcPts val="0"/>
+              </a:spcAft>
+              <a:buNone/>
+            </a:pPr>
+            <a:r>
+              <a:rPr lang="en" sz="1900" dirty="0"/>
+              <a:t>Create a DDL SQL script capable of building the database you designed in Step 2</a:t>
+            </a:r>
+            <a:endParaRPr sz="1900" dirty="0"/>
+          </a:p>
+          <a:p>
+            <a:pPr marL="457200" lvl="0" indent="0" algn="l" rtl="0">
+              <a:spcBef>
+                <a:spcPts val="0"/>
+              </a:spcBef>
+              <a:spcAft>
+                <a:spcPts val="0"/>
+              </a:spcAft>
+              <a:buNone/>
+            </a:pPr>
+            <a:endParaRPr sz="1900" dirty="0"/>
+          </a:p>
+          <a:p>
+            <a:pPr marL="457200" lvl="0" indent="0" algn="l" rtl="0">
+              <a:spcBef>
+                <a:spcPts val="1600"/>
+              </a:spcBef>
+              <a:spcAft>
+                <a:spcPts val="0"/>
+              </a:spcAft>
+              <a:buNone/>
+            </a:pPr>
+            <a:endParaRPr sz="1900" dirty="0"/>
+          </a:p>
+          <a:p>
+            <a:pPr marL="457200" lvl="0" indent="0" algn="l" rtl="0">
+              <a:spcBef>
+                <a:spcPts val="1600"/>
+              </a:spcBef>
+              <a:spcAft>
+                <a:spcPts val="0"/>
+              </a:spcAft>
+              <a:buNone/>
+            </a:pPr>
+            <a:endParaRPr sz="1900" dirty="0"/>
+          </a:p>
+          <a:p>
+            <a:pPr marL="457200" lvl="0" indent="0" algn="l" rtl="0">
+              <a:spcBef>
+                <a:spcPts val="1600"/>
+              </a:spcBef>
+              <a:spcAft>
+                <a:spcPts val="1600"/>
+              </a:spcAft>
+              <a:buNone/>
+            </a:pPr>
+            <a:endParaRPr sz="1900" dirty="0"/>
+          </a:p>
+        </p:txBody>
+      </p:sp>
       <p:pic>
         <p:nvPicPr>
-          <p:cNvPr id="7" name="Picture 6">
+          <p:cNvPr id="4" name="Picture 3">
             <a:extLst>
               <a:ext uri="{FF2B5EF4-FFF2-40B4-BE49-F238E27FC236}">
-                <a16:creationId xmlns:a16="http://schemas.microsoft.com/office/drawing/2014/main" id="{900B74AF-50A8-EDCD-6B4E-3FA9662EE864}"/>
+                <a16:creationId xmlns:a16="http://schemas.microsoft.com/office/drawing/2014/main" id="{CC73533D-2F9C-7644-C31A-DD9AB972C2D8}"/>
               </a:ext>
             </a:extLst>
           </p:cNvPr>
@@ -30229,22 +30864,350 @@
           <p:nvPr/>
         </p:nvPicPr>
         <p:blipFill>
-          <a:blip r:embed="rId5"/>
+          <a:blip r:embed="rId3"/>
           <a:stretch>
             <a:fillRect/>
           </a:stretch>
         </p:blipFill>
         <p:spPr>
           <a:xfrm>
-            <a:off x="4211441" y="3146975"/>
-            <a:ext cx="3296110" cy="5658640"/>
+            <a:off x="376059" y="3521903"/>
+            <a:ext cx="3184900" cy="6322473"/>
           </a:xfrm>
           <a:prstGeom prst="rect">
             <a:avLst/>
           </a:prstGeom>
         </p:spPr>
       </p:pic>
+      <p:pic>
+        <p:nvPicPr>
+          <p:cNvPr id="10" name="Picture 9">
+            <a:extLst>
+              <a:ext uri="{FF2B5EF4-FFF2-40B4-BE49-F238E27FC236}">
+                <a16:creationId xmlns:a16="http://schemas.microsoft.com/office/drawing/2014/main" id="{691005A1-7CCE-407F-FBB7-4EED88154932}"/>
+              </a:ext>
+            </a:extLst>
+          </p:cNvPr>
+          <p:cNvPicPr>
+            <a:picLocks noChangeAspect="1"/>
+          </p:cNvPicPr>
+          <p:nvPr/>
+        </p:nvPicPr>
+        <p:blipFill>
+          <a:blip r:embed="rId4"/>
+          <a:stretch>
+            <a:fillRect/>
+          </a:stretch>
+        </p:blipFill>
+        <p:spPr>
+          <a:xfrm>
+            <a:off x="4211443" y="3521903"/>
+            <a:ext cx="3315163" cy="5563376"/>
+          </a:xfrm>
+          <a:prstGeom prst="rect">
+            <a:avLst/>
+          </a:prstGeom>
+        </p:spPr>
+      </p:pic>
+      <p:sp>
+        <p:nvSpPr>
+          <p:cNvPr id="11" name="Google Shape;282;p67">
+            <a:extLst>
+              <a:ext uri="{FF2B5EF4-FFF2-40B4-BE49-F238E27FC236}">
+                <a16:creationId xmlns:a16="http://schemas.microsoft.com/office/drawing/2014/main" id="{97E99462-E313-08C0-92C2-6581D6E45DD1}"/>
+              </a:ext>
+            </a:extLst>
+          </p:cNvPr>
+          <p:cNvSpPr txBox="1">
+            <a:spLocks/>
+          </p:cNvSpPr>
+          <p:nvPr/>
+        </p:nvSpPr>
+        <p:spPr>
+          <a:xfrm>
+            <a:off x="284006" y="2773336"/>
+            <a:ext cx="3002891" cy="590527"/>
+          </a:xfrm>
+          <a:prstGeom prst="rect">
+            <a:avLst/>
+          </a:prstGeom>
+          <a:noFill/>
+          <a:ln>
+            <a:noFill/>
+          </a:ln>
+        </p:spPr>
+        <p:txBody>
+          <a:bodyPr spcFirstLastPara="1" wrap="square" lIns="91425" tIns="91425" rIns="91425" bIns="91425" anchor="t" anchorCtr="0">
+            <a:noAutofit/>
+          </a:bodyPr>
+          <a:lstStyle>
+            <a:defPPr marR="0" lvl="0" algn="l" rtl="0">
+              <a:lnSpc>
+                <a:spcPct val="100000"/>
+              </a:lnSpc>
+              <a:spcBef>
+                <a:spcPts val="0"/>
+              </a:spcBef>
+              <a:spcAft>
+                <a:spcPts val="0"/>
+              </a:spcAft>
+            </a:defPPr>
+            <a:lvl1pPr marL="457200" marR="0" lvl="0" indent="-419100" algn="l" rtl="0">
+              <a:lnSpc>
+                <a:spcPct val="115000"/>
+              </a:lnSpc>
+              <a:spcBef>
+                <a:spcPts val="0"/>
+              </a:spcBef>
+              <a:spcAft>
+                <a:spcPts val="0"/>
+              </a:spcAft>
+              <a:buClr>
+                <a:schemeClr val="dk2"/>
+              </a:buClr>
+              <a:buSzPts val="3000"/>
+              <a:buFont typeface="Open Sans Light"/>
+              <a:buChar char="●"/>
+              <a:defRPr sz="3000" b="0" i="0" u="none" strike="noStrike" cap="none">
+                <a:solidFill>
+                  <a:schemeClr val="dk2"/>
+                </a:solidFill>
+                <a:latin typeface="Open Sans Light"/>
+                <a:ea typeface="Open Sans Light"/>
+                <a:cs typeface="Open Sans Light"/>
+                <a:sym typeface="Open Sans Light"/>
+              </a:defRPr>
+            </a:lvl1pPr>
+            <a:lvl2pPr marL="914400" marR="0" lvl="1" indent="-381000" algn="l" rtl="0">
+              <a:lnSpc>
+                <a:spcPct val="115000"/>
+              </a:lnSpc>
+              <a:spcBef>
+                <a:spcPts val="1600"/>
+              </a:spcBef>
+              <a:spcAft>
+                <a:spcPts val="0"/>
+              </a:spcAft>
+              <a:buClr>
+                <a:schemeClr val="dk2"/>
+              </a:buClr>
+              <a:buSzPts val="2400"/>
+              <a:buFont typeface="Open Sans Light"/>
+              <a:buChar char="○"/>
+              <a:defRPr sz="2400" b="0" i="0" u="none" strike="noStrike" cap="none">
+                <a:solidFill>
+                  <a:schemeClr val="dk2"/>
+                </a:solidFill>
+                <a:latin typeface="Open Sans Light"/>
+                <a:ea typeface="Open Sans Light"/>
+                <a:cs typeface="Open Sans Light"/>
+                <a:sym typeface="Open Sans Light"/>
+              </a:defRPr>
+            </a:lvl2pPr>
+            <a:lvl3pPr marL="1371600" marR="0" lvl="2" indent="-342900" algn="l" rtl="0">
+              <a:lnSpc>
+                <a:spcPct val="115000"/>
+              </a:lnSpc>
+              <a:spcBef>
+                <a:spcPts val="1600"/>
+              </a:spcBef>
+              <a:spcAft>
+                <a:spcPts val="0"/>
+              </a:spcAft>
+              <a:buClr>
+                <a:schemeClr val="dk2"/>
+              </a:buClr>
+              <a:buSzPts val="1800"/>
+              <a:buFont typeface="Open Sans Light"/>
+              <a:buChar char="■"/>
+              <a:defRPr sz="1800" b="0" i="0" u="none" strike="noStrike" cap="none">
+                <a:solidFill>
+                  <a:schemeClr val="dk2"/>
+                </a:solidFill>
+                <a:latin typeface="Open Sans Light"/>
+                <a:ea typeface="Open Sans Light"/>
+                <a:cs typeface="Open Sans Light"/>
+                <a:sym typeface="Open Sans Light"/>
+              </a:defRPr>
+            </a:lvl3pPr>
+            <a:lvl4pPr marL="1828800" marR="0" lvl="3" indent="-317500" algn="l" rtl="0">
+              <a:lnSpc>
+                <a:spcPct val="115000"/>
+              </a:lnSpc>
+              <a:spcBef>
+                <a:spcPts val="1600"/>
+              </a:spcBef>
+              <a:spcAft>
+                <a:spcPts val="0"/>
+              </a:spcAft>
+              <a:buClr>
+                <a:schemeClr val="dk2"/>
+              </a:buClr>
+              <a:buSzPts val="1400"/>
+              <a:buFont typeface="Open Sans Light"/>
+              <a:buChar char="●"/>
+              <a:defRPr sz="1400" b="0" i="0" u="none" strike="noStrike" cap="none">
+                <a:solidFill>
+                  <a:schemeClr val="dk2"/>
+                </a:solidFill>
+                <a:latin typeface="Open Sans Light"/>
+                <a:ea typeface="Open Sans Light"/>
+                <a:cs typeface="Open Sans Light"/>
+                <a:sym typeface="Open Sans Light"/>
+              </a:defRPr>
+            </a:lvl4pPr>
+            <a:lvl5pPr marL="2286000" marR="0" lvl="4" indent="-317500" algn="l" rtl="0">
+              <a:lnSpc>
+                <a:spcPct val="115000"/>
+              </a:lnSpc>
+              <a:spcBef>
+                <a:spcPts val="1600"/>
+              </a:spcBef>
+              <a:spcAft>
+                <a:spcPts val="0"/>
+              </a:spcAft>
+              <a:buClr>
+                <a:schemeClr val="dk2"/>
+              </a:buClr>
+              <a:buSzPts val="1400"/>
+              <a:buFont typeface="Open Sans Light"/>
+              <a:buChar char="○"/>
+              <a:defRPr sz="1400" b="0" i="0" u="none" strike="noStrike" cap="none">
+                <a:solidFill>
+                  <a:schemeClr val="dk2"/>
+                </a:solidFill>
+                <a:latin typeface="Open Sans Light"/>
+                <a:ea typeface="Open Sans Light"/>
+                <a:cs typeface="Open Sans Light"/>
+                <a:sym typeface="Open Sans Light"/>
+              </a:defRPr>
+            </a:lvl5pPr>
+            <a:lvl6pPr marL="2743200" marR="0" lvl="5" indent="-317500" algn="l" rtl="0">
+              <a:lnSpc>
+                <a:spcPct val="115000"/>
+              </a:lnSpc>
+              <a:spcBef>
+                <a:spcPts val="1600"/>
+              </a:spcBef>
+              <a:spcAft>
+                <a:spcPts val="0"/>
+              </a:spcAft>
+              <a:buClr>
+                <a:schemeClr val="dk2"/>
+              </a:buClr>
+              <a:buSzPts val="1400"/>
+              <a:buFont typeface="Open Sans Light"/>
+              <a:buChar char="■"/>
+              <a:defRPr sz="1400" b="0" i="0" u="none" strike="noStrike" cap="none">
+                <a:solidFill>
+                  <a:schemeClr val="dk2"/>
+                </a:solidFill>
+                <a:latin typeface="Open Sans Light"/>
+                <a:ea typeface="Open Sans Light"/>
+                <a:cs typeface="Open Sans Light"/>
+                <a:sym typeface="Open Sans Light"/>
+              </a:defRPr>
+            </a:lvl6pPr>
+            <a:lvl7pPr marL="3200400" marR="0" lvl="6" indent="-317500" algn="l" rtl="0">
+              <a:lnSpc>
+                <a:spcPct val="115000"/>
+              </a:lnSpc>
+              <a:spcBef>
+                <a:spcPts val="1600"/>
+              </a:spcBef>
+              <a:spcAft>
+                <a:spcPts val="0"/>
+              </a:spcAft>
+              <a:buClr>
+                <a:schemeClr val="dk2"/>
+              </a:buClr>
+              <a:buSzPts val="1400"/>
+              <a:buFont typeface="Open Sans Light"/>
+              <a:buChar char="●"/>
+              <a:defRPr sz="1400" b="0" i="0" u="none" strike="noStrike" cap="none">
+                <a:solidFill>
+                  <a:schemeClr val="dk2"/>
+                </a:solidFill>
+                <a:latin typeface="Open Sans Light"/>
+                <a:ea typeface="Open Sans Light"/>
+                <a:cs typeface="Open Sans Light"/>
+                <a:sym typeface="Open Sans Light"/>
+              </a:defRPr>
+            </a:lvl7pPr>
+            <a:lvl8pPr marL="3657600" marR="0" lvl="7" indent="-317500" algn="l" rtl="0">
+              <a:lnSpc>
+                <a:spcPct val="115000"/>
+              </a:lnSpc>
+              <a:spcBef>
+                <a:spcPts val="1600"/>
+              </a:spcBef>
+              <a:spcAft>
+                <a:spcPts val="0"/>
+              </a:spcAft>
+              <a:buClr>
+                <a:schemeClr val="dk2"/>
+              </a:buClr>
+              <a:buSzPts val="1400"/>
+              <a:buFont typeface="Open Sans Light"/>
+              <a:buChar char="○"/>
+              <a:defRPr sz="1400" b="0" i="0" u="none" strike="noStrike" cap="none">
+                <a:solidFill>
+                  <a:schemeClr val="dk2"/>
+                </a:solidFill>
+                <a:latin typeface="Open Sans Light"/>
+                <a:ea typeface="Open Sans Light"/>
+                <a:cs typeface="Open Sans Light"/>
+                <a:sym typeface="Open Sans Light"/>
+              </a:defRPr>
+            </a:lvl8pPr>
+            <a:lvl9pPr marL="4114800" marR="0" lvl="8" indent="-317500" algn="l" rtl="0">
+              <a:lnSpc>
+                <a:spcPct val="115000"/>
+              </a:lnSpc>
+              <a:spcBef>
+                <a:spcPts val="1600"/>
+              </a:spcBef>
+              <a:spcAft>
+                <a:spcPts val="1600"/>
+              </a:spcAft>
+              <a:buClr>
+                <a:schemeClr val="dk2"/>
+              </a:buClr>
+              <a:buSzPts val="1400"/>
+              <a:buFont typeface="Open Sans Light"/>
+              <a:buChar char="■"/>
+              <a:defRPr sz="1400" b="0" i="0" u="none" strike="noStrike" cap="none">
+                <a:solidFill>
+                  <a:schemeClr val="dk2"/>
+                </a:solidFill>
+                <a:latin typeface="Open Sans Light"/>
+                <a:ea typeface="Open Sans Light"/>
+                <a:cs typeface="Open Sans Light"/>
+                <a:sym typeface="Open Sans Light"/>
+              </a:defRPr>
+            </a:lvl9pPr>
+          </a:lstStyle>
+          <a:p>
+            <a:pPr marL="0" indent="0">
+              <a:buNone/>
+            </a:pPr>
+            <a:r>
+              <a:rPr lang="en-US" sz="1900" b="1" dirty="0">
+                <a:solidFill>
+                  <a:srgbClr val="FF0000"/>
+                </a:solidFill>
+              </a:rPr>
+              <a:t>01_create_tables.sql</a:t>
+            </a:r>
+          </a:p>
+        </p:txBody>
+      </p:sp>
     </p:spTree>
+    <p:extLst>
+      <p:ext uri="{BB962C8B-B14F-4D97-AF65-F5344CB8AC3E}">
+        <p14:creationId xmlns:p14="http://schemas.microsoft.com/office/powerpoint/2010/main" val="484767743"/>
+      </p:ext>
+    </p:extLst>
   </p:cSld>
   <p:clrMapOvr>
     <a:masterClrMapping/>
@@ -30252,7 +31215,7 @@
 </p:sld>
 </file>
 
-<file path=ppt/slides/slide18.xml><?xml version="1.0" encoding="utf-8"?>
+<file path=ppt/slides/slide19.xml><?xml version="1.0" encoding="utf-8"?>
 <p:sld xmlns:a="http://schemas.openxmlformats.org/drawingml/2006/main" xmlns:r="http://schemas.openxmlformats.org/officeDocument/2006/relationships" xmlns:p="http://schemas.openxmlformats.org/presentationml/2006/main">
   <p:cSld>
     <p:spTree>
@@ -30585,412 +31548,6 @@
       <p:pic>
         <p:nvPicPr>
           <p:cNvPr id="290" name="Google Shape;290;p68"/>
-          <p:cNvPicPr preferRelativeResize="0"/>
-          <p:nvPr/>
-        </p:nvPicPr>
-        <p:blipFill>
-          <a:blip r:embed="rId3">
-            <a:alphaModFix/>
-          </a:blip>
-          <a:stretch>
-            <a:fillRect/>
-          </a:stretch>
-        </p:blipFill>
-        <p:spPr>
-          <a:xfrm>
-            <a:off x="1088175" y="4781750"/>
-            <a:ext cx="5036025" cy="3241700"/>
-          </a:xfrm>
-          <a:prstGeom prst="rect">
-            <a:avLst/>
-          </a:prstGeom>
-          <a:noFill/>
-          <a:ln w="9525" cap="flat" cmpd="sng">
-            <a:solidFill>
-              <a:schemeClr val="dk2"/>
-            </a:solidFill>
-            <a:prstDash val="solid"/>
-            <a:round/>
-            <a:headEnd type="none" w="sm" len="sm"/>
-            <a:tailEnd type="none" w="sm" len="sm"/>
-          </a:ln>
-        </p:spPr>
-      </p:pic>
-    </p:spTree>
-  </p:cSld>
-  <p:clrMapOvr>
-    <a:masterClrMapping/>
-  </p:clrMapOvr>
-</p:sld>
-</file>
-
-<file path=ppt/slides/slide19.xml><?xml version="1.0" encoding="utf-8"?>
-<p:sld xmlns:a="http://schemas.openxmlformats.org/drawingml/2006/main" xmlns:r="http://schemas.openxmlformats.org/officeDocument/2006/relationships" xmlns:p="http://schemas.openxmlformats.org/presentationml/2006/main">
-  <p:cSld>
-    <p:spTree>
-      <p:nvGrpSpPr>
-        <p:cNvPr id="1" name="Shape 294"/>
-        <p:cNvGrpSpPr/>
-        <p:nvPr/>
-      </p:nvGrpSpPr>
-      <p:grpSpPr>
-        <a:xfrm>
-          <a:off x="0" y="0"/>
-          <a:ext cx="0" cy="0"/>
-          <a:chOff x="0" y="0"/>
-          <a:chExt cx="0" cy="0"/>
-        </a:xfrm>
-      </p:grpSpPr>
-      <p:sp>
-        <p:nvSpPr>
-          <p:cNvPr id="295" name="Google Shape;295;p69"/>
-          <p:cNvSpPr txBox="1">
-            <a:spLocks noGrp="1"/>
-          </p:cNvSpPr>
-          <p:nvPr>
-            <p:ph type="title"/>
-          </p:nvPr>
-        </p:nvSpPr>
-        <p:spPr>
-          <a:xfrm>
-            <a:off x="264945" y="870271"/>
-            <a:ext cx="7242600" cy="1119900"/>
-          </a:xfrm>
-          <a:prstGeom prst="rect">
-            <a:avLst/>
-          </a:prstGeom>
-        </p:spPr>
-        <p:txBody>
-          <a:bodyPr spcFirstLastPara="1" wrap="square" lIns="91425" tIns="91425" rIns="91425" bIns="91425" anchor="ctr" anchorCtr="0">
-            <a:noAutofit/>
-          </a:bodyPr>
-          <a:lstStyle/>
-          <a:p>
-            <a:pPr marL="0" lvl="0" indent="0" algn="l" rtl="0">
-              <a:spcBef>
-                <a:spcPts val="0"/>
-              </a:spcBef>
-              <a:spcAft>
-                <a:spcPts val="0"/>
-              </a:spcAft>
-              <a:buNone/>
-            </a:pPr>
-            <a:r>
-              <a:rPr lang="en"/>
-              <a:t>CRUD</a:t>
-            </a:r>
-            <a:endParaRPr/>
-          </a:p>
-        </p:txBody>
-      </p:sp>
-      <p:sp>
-        <p:nvSpPr>
-          <p:cNvPr id="296" name="Google Shape;296;p69"/>
-          <p:cNvSpPr txBox="1">
-            <a:spLocks noGrp="1"/>
-          </p:cNvSpPr>
-          <p:nvPr>
-            <p:ph type="body" idx="1"/>
-          </p:nvPr>
-        </p:nvSpPr>
-        <p:spPr>
-          <a:xfrm>
-            <a:off x="264950" y="2118049"/>
-            <a:ext cx="7242600" cy="7731900"/>
-          </a:xfrm>
-          <a:prstGeom prst="rect">
-            <a:avLst/>
-          </a:prstGeom>
-        </p:spPr>
-        <p:txBody>
-          <a:bodyPr spcFirstLastPara="1" wrap="square" lIns="91425" tIns="91425" rIns="91425" bIns="91425" anchor="t" anchorCtr="0">
-            <a:noAutofit/>
-          </a:bodyPr>
-          <a:lstStyle/>
-          <a:p>
-            <a:pPr marL="0" lvl="0" indent="0" algn="l" rtl="0">
-              <a:spcBef>
-                <a:spcPts val="0"/>
-              </a:spcBef>
-              <a:spcAft>
-                <a:spcPts val="0"/>
-              </a:spcAft>
-              <a:buNone/>
-            </a:pPr>
-            <a:endParaRPr sz="1900"/>
-          </a:p>
-          <a:p>
-            <a:pPr marL="457200" lvl="0" indent="-349250" algn="l" rtl="0">
-              <a:spcBef>
-                <a:spcPts val="1600"/>
-              </a:spcBef>
-              <a:spcAft>
-                <a:spcPts val="0"/>
-              </a:spcAft>
-              <a:buSzPts val="1900"/>
-              <a:buFont typeface="Open Sans"/>
-              <a:buChar char="●"/>
-            </a:pPr>
-            <a:r>
-              <a:rPr lang="en" sz="1900" b="1">
-                <a:latin typeface="Open Sans"/>
-                <a:ea typeface="Open Sans"/>
-                <a:cs typeface="Open Sans"/>
-                <a:sym typeface="Open Sans"/>
-              </a:rPr>
-              <a:t>Question 2: Insert Web Programmer as a new job title</a:t>
-            </a:r>
-            <a:endParaRPr sz="1900" b="1">
-              <a:latin typeface="Open Sans"/>
-              <a:ea typeface="Open Sans"/>
-              <a:cs typeface="Open Sans"/>
-              <a:sym typeface="Open Sans"/>
-            </a:endParaRPr>
-          </a:p>
-          <a:p>
-            <a:pPr marL="0" lvl="0" indent="0" algn="l" rtl="0">
-              <a:spcBef>
-                <a:spcPts val="1600"/>
-              </a:spcBef>
-              <a:spcAft>
-                <a:spcPts val="0"/>
-              </a:spcAft>
-              <a:buNone/>
-            </a:pPr>
-            <a:endParaRPr sz="1900" b="1">
-              <a:latin typeface="Open Sans"/>
-              <a:ea typeface="Open Sans"/>
-              <a:cs typeface="Open Sans"/>
-              <a:sym typeface="Open Sans"/>
-            </a:endParaRPr>
-          </a:p>
-          <a:p>
-            <a:pPr marL="0" lvl="0" indent="0" algn="l" rtl="0">
-              <a:lnSpc>
-                <a:spcPct val="170000"/>
-              </a:lnSpc>
-              <a:spcBef>
-                <a:spcPts val="1600"/>
-              </a:spcBef>
-              <a:spcAft>
-                <a:spcPts val="0"/>
-              </a:spcAft>
-              <a:buClr>
-                <a:schemeClr val="dk1"/>
-              </a:buClr>
-              <a:buSzPts val="1100"/>
-              <a:buFont typeface="Arial"/>
-              <a:buNone/>
-            </a:pPr>
-            <a:r>
-              <a:rPr lang="en" sz="1200">
-                <a:solidFill>
-                  <a:srgbClr val="525C65"/>
-                </a:solidFill>
-                <a:highlight>
-                  <a:schemeClr val="lt1"/>
-                </a:highlight>
-                <a:latin typeface="Open Sans"/>
-                <a:ea typeface="Open Sans"/>
-                <a:cs typeface="Open Sans"/>
-                <a:sym typeface="Open Sans"/>
-              </a:rPr>
-              <a:t>    </a:t>
-            </a:r>
-            <a:r>
-              <a:rPr lang="en" sz="1200">
-                <a:solidFill>
-                  <a:srgbClr val="FF0000"/>
-                </a:solidFill>
-                <a:highlight>
-                  <a:schemeClr val="lt1"/>
-                </a:highlight>
-                <a:latin typeface="Open Sans"/>
-                <a:ea typeface="Open Sans"/>
-                <a:cs typeface="Open Sans"/>
-                <a:sym typeface="Open Sans"/>
-              </a:rPr>
-              <a:t>** Replace example screenshot below with your response, and include the query in a SQL file</a:t>
-            </a:r>
-            <a:endParaRPr sz="1900" b="1">
-              <a:latin typeface="Open Sans"/>
-              <a:ea typeface="Open Sans"/>
-              <a:cs typeface="Open Sans"/>
-              <a:sym typeface="Open Sans"/>
-            </a:endParaRPr>
-          </a:p>
-          <a:p>
-            <a:pPr marL="0" lvl="0" indent="0" algn="l" rtl="0">
-              <a:spcBef>
-                <a:spcPts val="0"/>
-              </a:spcBef>
-              <a:spcAft>
-                <a:spcPts val="0"/>
-              </a:spcAft>
-              <a:buNone/>
-            </a:pPr>
-            <a:endParaRPr sz="1900" b="1">
-              <a:latin typeface="Open Sans"/>
-              <a:ea typeface="Open Sans"/>
-              <a:cs typeface="Open Sans"/>
-              <a:sym typeface="Open Sans"/>
-            </a:endParaRPr>
-          </a:p>
-          <a:p>
-            <a:pPr marL="0" lvl="0" indent="0" algn="l" rtl="0">
-              <a:spcBef>
-                <a:spcPts val="1600"/>
-              </a:spcBef>
-              <a:spcAft>
-                <a:spcPts val="0"/>
-              </a:spcAft>
-              <a:buNone/>
-            </a:pPr>
-            <a:endParaRPr sz="1900" b="1">
-              <a:latin typeface="Open Sans"/>
-              <a:ea typeface="Open Sans"/>
-              <a:cs typeface="Open Sans"/>
-              <a:sym typeface="Open Sans"/>
-            </a:endParaRPr>
-          </a:p>
-          <a:p>
-            <a:pPr marL="0" lvl="0" indent="0" algn="l" rtl="0">
-              <a:spcBef>
-                <a:spcPts val="1600"/>
-              </a:spcBef>
-              <a:spcAft>
-                <a:spcPts val="0"/>
-              </a:spcAft>
-              <a:buNone/>
-            </a:pPr>
-            <a:endParaRPr sz="1900" b="1">
-              <a:latin typeface="Open Sans"/>
-              <a:ea typeface="Open Sans"/>
-              <a:cs typeface="Open Sans"/>
-              <a:sym typeface="Open Sans"/>
-            </a:endParaRPr>
-          </a:p>
-          <a:p>
-            <a:pPr marL="0" lvl="0" indent="0" algn="l" rtl="0">
-              <a:spcBef>
-                <a:spcPts val="1600"/>
-              </a:spcBef>
-              <a:spcAft>
-                <a:spcPts val="0"/>
-              </a:spcAft>
-              <a:buNone/>
-            </a:pPr>
-            <a:endParaRPr sz="1900" b="1">
-              <a:latin typeface="Open Sans"/>
-              <a:ea typeface="Open Sans"/>
-              <a:cs typeface="Open Sans"/>
-              <a:sym typeface="Open Sans"/>
-            </a:endParaRPr>
-          </a:p>
-          <a:p>
-            <a:pPr marL="457200" lvl="0" indent="0" algn="l" rtl="0">
-              <a:spcBef>
-                <a:spcPts val="1600"/>
-              </a:spcBef>
-              <a:spcAft>
-                <a:spcPts val="0"/>
-              </a:spcAft>
-              <a:buNone/>
-            </a:pPr>
-            <a:endParaRPr sz="1900" b="1">
-              <a:latin typeface="Open Sans"/>
-              <a:ea typeface="Open Sans"/>
-              <a:cs typeface="Open Sans"/>
-              <a:sym typeface="Open Sans"/>
-            </a:endParaRPr>
-          </a:p>
-          <a:p>
-            <a:pPr marL="0" lvl="0" indent="0" algn="l" rtl="0">
-              <a:spcBef>
-                <a:spcPts val="1600"/>
-              </a:spcBef>
-              <a:spcAft>
-                <a:spcPts val="0"/>
-              </a:spcAft>
-              <a:buNone/>
-            </a:pPr>
-            <a:endParaRPr sz="1900" b="1">
-              <a:latin typeface="Open Sans"/>
-              <a:ea typeface="Open Sans"/>
-              <a:cs typeface="Open Sans"/>
-              <a:sym typeface="Open Sans"/>
-            </a:endParaRPr>
-          </a:p>
-          <a:p>
-            <a:pPr marL="0" lvl="0" indent="0" algn="l" rtl="0">
-              <a:spcBef>
-                <a:spcPts val="1600"/>
-              </a:spcBef>
-              <a:spcAft>
-                <a:spcPts val="0"/>
-              </a:spcAft>
-              <a:buNone/>
-            </a:pPr>
-            <a:endParaRPr sz="1900" b="1">
-              <a:latin typeface="Open Sans"/>
-              <a:ea typeface="Open Sans"/>
-              <a:cs typeface="Open Sans"/>
-              <a:sym typeface="Open Sans"/>
-            </a:endParaRPr>
-          </a:p>
-          <a:p>
-            <a:pPr marL="0" lvl="0" indent="0" algn="l" rtl="0">
-              <a:spcBef>
-                <a:spcPts val="1600"/>
-              </a:spcBef>
-              <a:spcAft>
-                <a:spcPts val="0"/>
-              </a:spcAft>
-              <a:buNone/>
-            </a:pPr>
-            <a:endParaRPr sz="1900"/>
-          </a:p>
-          <a:p>
-            <a:pPr marL="457200" lvl="0" indent="0" algn="l" rtl="0">
-              <a:spcBef>
-                <a:spcPts val="1600"/>
-              </a:spcBef>
-              <a:spcAft>
-                <a:spcPts val="0"/>
-              </a:spcAft>
-              <a:buNone/>
-            </a:pPr>
-            <a:endParaRPr sz="1900"/>
-          </a:p>
-          <a:p>
-            <a:pPr marL="457200" lvl="0" indent="0" algn="l" rtl="0">
-              <a:spcBef>
-                <a:spcPts val="1600"/>
-              </a:spcBef>
-              <a:spcAft>
-                <a:spcPts val="0"/>
-              </a:spcAft>
-              <a:buNone/>
-            </a:pPr>
-            <a:endParaRPr sz="1900"/>
-          </a:p>
-          <a:p>
-            <a:pPr marL="457200" lvl="0" indent="0" algn="l" rtl="0">
-              <a:spcBef>
-                <a:spcPts val="1600"/>
-              </a:spcBef>
-              <a:spcAft>
-                <a:spcPts val="1600"/>
-              </a:spcAft>
-              <a:buNone/>
-            </a:pPr>
-            <a:endParaRPr sz="1900"/>
-          </a:p>
-        </p:txBody>
-      </p:sp>
-      <p:pic>
-        <p:nvPicPr>
-          <p:cNvPr id="297" name="Google Shape;297;p69"/>
           <p:cNvPicPr preferRelativeResize="0"/>
           <p:nvPr/>
         </p:nvPicPr>
@@ -31632,6 +32189,412 @@
   <p:cSld>
     <p:spTree>
       <p:nvGrpSpPr>
+        <p:cNvPr id="1" name="Shape 294"/>
+        <p:cNvGrpSpPr/>
+        <p:nvPr/>
+      </p:nvGrpSpPr>
+      <p:grpSpPr>
+        <a:xfrm>
+          <a:off x="0" y="0"/>
+          <a:ext cx="0" cy="0"/>
+          <a:chOff x="0" y="0"/>
+          <a:chExt cx="0" cy="0"/>
+        </a:xfrm>
+      </p:grpSpPr>
+      <p:sp>
+        <p:nvSpPr>
+          <p:cNvPr id="295" name="Google Shape;295;p69"/>
+          <p:cNvSpPr txBox="1">
+            <a:spLocks noGrp="1"/>
+          </p:cNvSpPr>
+          <p:nvPr>
+            <p:ph type="title"/>
+          </p:nvPr>
+        </p:nvSpPr>
+        <p:spPr>
+          <a:xfrm>
+            <a:off x="264945" y="870271"/>
+            <a:ext cx="7242600" cy="1119900"/>
+          </a:xfrm>
+          <a:prstGeom prst="rect">
+            <a:avLst/>
+          </a:prstGeom>
+        </p:spPr>
+        <p:txBody>
+          <a:bodyPr spcFirstLastPara="1" wrap="square" lIns="91425" tIns="91425" rIns="91425" bIns="91425" anchor="ctr" anchorCtr="0">
+            <a:noAutofit/>
+          </a:bodyPr>
+          <a:lstStyle/>
+          <a:p>
+            <a:pPr marL="0" lvl="0" indent="0" algn="l" rtl="0">
+              <a:spcBef>
+                <a:spcPts val="0"/>
+              </a:spcBef>
+              <a:spcAft>
+                <a:spcPts val="0"/>
+              </a:spcAft>
+              <a:buNone/>
+            </a:pPr>
+            <a:r>
+              <a:rPr lang="en"/>
+              <a:t>CRUD</a:t>
+            </a:r>
+            <a:endParaRPr/>
+          </a:p>
+        </p:txBody>
+      </p:sp>
+      <p:sp>
+        <p:nvSpPr>
+          <p:cNvPr id="296" name="Google Shape;296;p69"/>
+          <p:cNvSpPr txBox="1">
+            <a:spLocks noGrp="1"/>
+          </p:cNvSpPr>
+          <p:nvPr>
+            <p:ph type="body" idx="1"/>
+          </p:nvPr>
+        </p:nvSpPr>
+        <p:spPr>
+          <a:xfrm>
+            <a:off x="264950" y="2118049"/>
+            <a:ext cx="7242600" cy="7731900"/>
+          </a:xfrm>
+          <a:prstGeom prst="rect">
+            <a:avLst/>
+          </a:prstGeom>
+        </p:spPr>
+        <p:txBody>
+          <a:bodyPr spcFirstLastPara="1" wrap="square" lIns="91425" tIns="91425" rIns="91425" bIns="91425" anchor="t" anchorCtr="0">
+            <a:noAutofit/>
+          </a:bodyPr>
+          <a:lstStyle/>
+          <a:p>
+            <a:pPr marL="0" lvl="0" indent="0" algn="l" rtl="0">
+              <a:spcBef>
+                <a:spcPts val="0"/>
+              </a:spcBef>
+              <a:spcAft>
+                <a:spcPts val="0"/>
+              </a:spcAft>
+              <a:buNone/>
+            </a:pPr>
+            <a:endParaRPr sz="1900"/>
+          </a:p>
+          <a:p>
+            <a:pPr marL="457200" lvl="0" indent="-349250" algn="l" rtl="0">
+              <a:spcBef>
+                <a:spcPts val="1600"/>
+              </a:spcBef>
+              <a:spcAft>
+                <a:spcPts val="0"/>
+              </a:spcAft>
+              <a:buSzPts val="1900"/>
+              <a:buFont typeface="Open Sans"/>
+              <a:buChar char="●"/>
+            </a:pPr>
+            <a:r>
+              <a:rPr lang="en" sz="1900" b="1">
+                <a:latin typeface="Open Sans"/>
+                <a:ea typeface="Open Sans"/>
+                <a:cs typeface="Open Sans"/>
+                <a:sym typeface="Open Sans"/>
+              </a:rPr>
+              <a:t>Question 2: Insert Web Programmer as a new job title</a:t>
+            </a:r>
+            <a:endParaRPr sz="1900" b="1">
+              <a:latin typeface="Open Sans"/>
+              <a:ea typeface="Open Sans"/>
+              <a:cs typeface="Open Sans"/>
+              <a:sym typeface="Open Sans"/>
+            </a:endParaRPr>
+          </a:p>
+          <a:p>
+            <a:pPr marL="0" lvl="0" indent="0" algn="l" rtl="0">
+              <a:spcBef>
+                <a:spcPts val="1600"/>
+              </a:spcBef>
+              <a:spcAft>
+                <a:spcPts val="0"/>
+              </a:spcAft>
+              <a:buNone/>
+            </a:pPr>
+            <a:endParaRPr sz="1900" b="1">
+              <a:latin typeface="Open Sans"/>
+              <a:ea typeface="Open Sans"/>
+              <a:cs typeface="Open Sans"/>
+              <a:sym typeface="Open Sans"/>
+            </a:endParaRPr>
+          </a:p>
+          <a:p>
+            <a:pPr marL="0" lvl="0" indent="0" algn="l" rtl="0">
+              <a:lnSpc>
+                <a:spcPct val="170000"/>
+              </a:lnSpc>
+              <a:spcBef>
+                <a:spcPts val="1600"/>
+              </a:spcBef>
+              <a:spcAft>
+                <a:spcPts val="0"/>
+              </a:spcAft>
+              <a:buClr>
+                <a:schemeClr val="dk1"/>
+              </a:buClr>
+              <a:buSzPts val="1100"/>
+              <a:buFont typeface="Arial"/>
+              <a:buNone/>
+            </a:pPr>
+            <a:r>
+              <a:rPr lang="en" sz="1200">
+                <a:solidFill>
+                  <a:srgbClr val="525C65"/>
+                </a:solidFill>
+                <a:highlight>
+                  <a:schemeClr val="lt1"/>
+                </a:highlight>
+                <a:latin typeface="Open Sans"/>
+                <a:ea typeface="Open Sans"/>
+                <a:cs typeface="Open Sans"/>
+                <a:sym typeface="Open Sans"/>
+              </a:rPr>
+              <a:t>    </a:t>
+            </a:r>
+            <a:r>
+              <a:rPr lang="en" sz="1200">
+                <a:solidFill>
+                  <a:srgbClr val="FF0000"/>
+                </a:solidFill>
+                <a:highlight>
+                  <a:schemeClr val="lt1"/>
+                </a:highlight>
+                <a:latin typeface="Open Sans"/>
+                <a:ea typeface="Open Sans"/>
+                <a:cs typeface="Open Sans"/>
+                <a:sym typeface="Open Sans"/>
+              </a:rPr>
+              <a:t>** Replace example screenshot below with your response, and include the query in a SQL file</a:t>
+            </a:r>
+            <a:endParaRPr sz="1900" b="1">
+              <a:latin typeface="Open Sans"/>
+              <a:ea typeface="Open Sans"/>
+              <a:cs typeface="Open Sans"/>
+              <a:sym typeface="Open Sans"/>
+            </a:endParaRPr>
+          </a:p>
+          <a:p>
+            <a:pPr marL="0" lvl="0" indent="0" algn="l" rtl="0">
+              <a:spcBef>
+                <a:spcPts val="0"/>
+              </a:spcBef>
+              <a:spcAft>
+                <a:spcPts val="0"/>
+              </a:spcAft>
+              <a:buNone/>
+            </a:pPr>
+            <a:endParaRPr sz="1900" b="1">
+              <a:latin typeface="Open Sans"/>
+              <a:ea typeface="Open Sans"/>
+              <a:cs typeface="Open Sans"/>
+              <a:sym typeface="Open Sans"/>
+            </a:endParaRPr>
+          </a:p>
+          <a:p>
+            <a:pPr marL="0" lvl="0" indent="0" algn="l" rtl="0">
+              <a:spcBef>
+                <a:spcPts val="1600"/>
+              </a:spcBef>
+              <a:spcAft>
+                <a:spcPts val="0"/>
+              </a:spcAft>
+              <a:buNone/>
+            </a:pPr>
+            <a:endParaRPr sz="1900" b="1">
+              <a:latin typeface="Open Sans"/>
+              <a:ea typeface="Open Sans"/>
+              <a:cs typeface="Open Sans"/>
+              <a:sym typeface="Open Sans"/>
+            </a:endParaRPr>
+          </a:p>
+          <a:p>
+            <a:pPr marL="0" lvl="0" indent="0" algn="l" rtl="0">
+              <a:spcBef>
+                <a:spcPts val="1600"/>
+              </a:spcBef>
+              <a:spcAft>
+                <a:spcPts val="0"/>
+              </a:spcAft>
+              <a:buNone/>
+            </a:pPr>
+            <a:endParaRPr sz="1900" b="1">
+              <a:latin typeface="Open Sans"/>
+              <a:ea typeface="Open Sans"/>
+              <a:cs typeface="Open Sans"/>
+              <a:sym typeface="Open Sans"/>
+            </a:endParaRPr>
+          </a:p>
+          <a:p>
+            <a:pPr marL="0" lvl="0" indent="0" algn="l" rtl="0">
+              <a:spcBef>
+                <a:spcPts val="1600"/>
+              </a:spcBef>
+              <a:spcAft>
+                <a:spcPts val="0"/>
+              </a:spcAft>
+              <a:buNone/>
+            </a:pPr>
+            <a:endParaRPr sz="1900" b="1">
+              <a:latin typeface="Open Sans"/>
+              <a:ea typeface="Open Sans"/>
+              <a:cs typeface="Open Sans"/>
+              <a:sym typeface="Open Sans"/>
+            </a:endParaRPr>
+          </a:p>
+          <a:p>
+            <a:pPr marL="457200" lvl="0" indent="0" algn="l" rtl="0">
+              <a:spcBef>
+                <a:spcPts val="1600"/>
+              </a:spcBef>
+              <a:spcAft>
+                <a:spcPts val="0"/>
+              </a:spcAft>
+              <a:buNone/>
+            </a:pPr>
+            <a:endParaRPr sz="1900" b="1">
+              <a:latin typeface="Open Sans"/>
+              <a:ea typeface="Open Sans"/>
+              <a:cs typeface="Open Sans"/>
+              <a:sym typeface="Open Sans"/>
+            </a:endParaRPr>
+          </a:p>
+          <a:p>
+            <a:pPr marL="0" lvl="0" indent="0" algn="l" rtl="0">
+              <a:spcBef>
+                <a:spcPts val="1600"/>
+              </a:spcBef>
+              <a:spcAft>
+                <a:spcPts val="0"/>
+              </a:spcAft>
+              <a:buNone/>
+            </a:pPr>
+            <a:endParaRPr sz="1900" b="1">
+              <a:latin typeface="Open Sans"/>
+              <a:ea typeface="Open Sans"/>
+              <a:cs typeface="Open Sans"/>
+              <a:sym typeface="Open Sans"/>
+            </a:endParaRPr>
+          </a:p>
+          <a:p>
+            <a:pPr marL="0" lvl="0" indent="0" algn="l" rtl="0">
+              <a:spcBef>
+                <a:spcPts val="1600"/>
+              </a:spcBef>
+              <a:spcAft>
+                <a:spcPts val="0"/>
+              </a:spcAft>
+              <a:buNone/>
+            </a:pPr>
+            <a:endParaRPr sz="1900" b="1">
+              <a:latin typeface="Open Sans"/>
+              <a:ea typeface="Open Sans"/>
+              <a:cs typeface="Open Sans"/>
+              <a:sym typeface="Open Sans"/>
+            </a:endParaRPr>
+          </a:p>
+          <a:p>
+            <a:pPr marL="0" lvl="0" indent="0" algn="l" rtl="0">
+              <a:spcBef>
+                <a:spcPts val="1600"/>
+              </a:spcBef>
+              <a:spcAft>
+                <a:spcPts val="0"/>
+              </a:spcAft>
+              <a:buNone/>
+            </a:pPr>
+            <a:endParaRPr sz="1900"/>
+          </a:p>
+          <a:p>
+            <a:pPr marL="457200" lvl="0" indent="0" algn="l" rtl="0">
+              <a:spcBef>
+                <a:spcPts val="1600"/>
+              </a:spcBef>
+              <a:spcAft>
+                <a:spcPts val="0"/>
+              </a:spcAft>
+              <a:buNone/>
+            </a:pPr>
+            <a:endParaRPr sz="1900"/>
+          </a:p>
+          <a:p>
+            <a:pPr marL="457200" lvl="0" indent="0" algn="l" rtl="0">
+              <a:spcBef>
+                <a:spcPts val="1600"/>
+              </a:spcBef>
+              <a:spcAft>
+                <a:spcPts val="0"/>
+              </a:spcAft>
+              <a:buNone/>
+            </a:pPr>
+            <a:endParaRPr sz="1900"/>
+          </a:p>
+          <a:p>
+            <a:pPr marL="457200" lvl="0" indent="0" algn="l" rtl="0">
+              <a:spcBef>
+                <a:spcPts val="1600"/>
+              </a:spcBef>
+              <a:spcAft>
+                <a:spcPts val="1600"/>
+              </a:spcAft>
+              <a:buNone/>
+            </a:pPr>
+            <a:endParaRPr sz="1900"/>
+          </a:p>
+        </p:txBody>
+      </p:sp>
+      <p:pic>
+        <p:nvPicPr>
+          <p:cNvPr id="297" name="Google Shape;297;p69"/>
+          <p:cNvPicPr preferRelativeResize="0"/>
+          <p:nvPr/>
+        </p:nvPicPr>
+        <p:blipFill>
+          <a:blip r:embed="rId3">
+            <a:alphaModFix/>
+          </a:blip>
+          <a:stretch>
+            <a:fillRect/>
+          </a:stretch>
+        </p:blipFill>
+        <p:spPr>
+          <a:xfrm>
+            <a:off x="1088175" y="4781750"/>
+            <a:ext cx="5036025" cy="3241700"/>
+          </a:xfrm>
+          <a:prstGeom prst="rect">
+            <a:avLst/>
+          </a:prstGeom>
+          <a:noFill/>
+          <a:ln w="9525" cap="flat" cmpd="sng">
+            <a:solidFill>
+              <a:schemeClr val="dk2"/>
+            </a:solidFill>
+            <a:prstDash val="solid"/>
+            <a:round/>
+            <a:headEnd type="none" w="sm" len="sm"/>
+            <a:tailEnd type="none" w="sm" len="sm"/>
+          </a:ln>
+        </p:spPr>
+      </p:pic>
+    </p:spTree>
+  </p:cSld>
+  <p:clrMapOvr>
+    <a:masterClrMapping/>
+  </p:clrMapOvr>
+</p:sld>
+</file>
+
+<file path=ppt/slides/slide21.xml><?xml version="1.0" encoding="utf-8"?>
+<p:sld xmlns:a="http://schemas.openxmlformats.org/drawingml/2006/main" xmlns:r="http://schemas.openxmlformats.org/officeDocument/2006/relationships" xmlns:p="http://schemas.openxmlformats.org/presentationml/2006/main">
+  <p:cSld>
+    <p:spTree>
+      <p:nvGrpSpPr>
         <p:cNvPr id="1" name="Shape 301"/>
         <p:cNvGrpSpPr/>
         <p:nvPr/>
@@ -32052,7 +33015,7 @@
 </p:sld>
 </file>
 
-<file path=ppt/slides/slide21.xml><?xml version="1.0" encoding="utf-8"?>
+<file path=ppt/slides/slide22.xml><?xml version="1.0" encoding="utf-8"?>
 <p:sld xmlns:a="http://schemas.openxmlformats.org/drawingml/2006/main" xmlns:r="http://schemas.openxmlformats.org/officeDocument/2006/relationships" xmlns:p="http://schemas.openxmlformats.org/presentationml/2006/main">
   <p:cSld>
     <p:spTree>
@@ -32477,7 +33440,7 @@
 </p:sld>
 </file>
 
-<file path=ppt/slides/slide22.xml><?xml version="1.0" encoding="utf-8"?>
+<file path=ppt/slides/slide23.xml><?xml version="1.0" encoding="utf-8"?>
 <p:sld xmlns:a="http://schemas.openxmlformats.org/drawingml/2006/main" xmlns:r="http://schemas.openxmlformats.org/officeDocument/2006/relationships" xmlns:p="http://schemas.openxmlformats.org/presentationml/2006/main">
   <p:cSld>
     <p:spTree>
@@ -32878,7 +33841,7 @@
 </p:sld>
 </file>
 
-<file path=ppt/slides/slide23.xml><?xml version="1.0" encoding="utf-8"?>
+<file path=ppt/slides/slide24.xml><?xml version="1.0" encoding="utf-8"?>
 <p:sld xmlns:a="http://schemas.openxmlformats.org/drawingml/2006/main" xmlns:r="http://schemas.openxmlformats.org/officeDocument/2006/relationships" xmlns:p="http://schemas.openxmlformats.org/presentationml/2006/main">
   <p:cSld>
     <p:spTree>
@@ -33262,7 +34225,7 @@
 </p:sld>
 </file>
 
-<file path=ppt/slides/slide24.xml><?xml version="1.0" encoding="utf-8"?>
+<file path=ppt/slides/slide25.xml><?xml version="1.0" encoding="utf-8"?>
 <p:sld xmlns:a="http://schemas.openxmlformats.org/drawingml/2006/main" xmlns:r="http://schemas.openxmlformats.org/officeDocument/2006/relationships" xmlns:p="http://schemas.openxmlformats.org/presentationml/2006/main">
   <p:cSld>
     <p:spTree>

--- a/Modules/03-Data-Architect/projects/Project 1 - Human Resources Database Design/report/HR_Database_Design_Project_Arjun_Avalakki_Mohan.pptx
+++ b/Modules/03-Data-Architect/projects/Project 1 - Human Resources Database Design/report/HR_Database_Design_Project_Arjun_Avalakki_Mohan.pptx
@@ -309,7 +309,7 @@
 <file path=ppt/revisionInfo.xml><?xml version="1.0" encoding="utf-8"?>
 <p1510:revInfo xmlns:a="http://schemas.openxmlformats.org/drawingml/2006/main" xmlns:r="http://schemas.openxmlformats.org/officeDocument/2006/relationships" xmlns:p1510="http://schemas.microsoft.com/office/powerpoint/2015/10/main">
   <p1510:revLst>
-    <p1510:client id="{CEECDE29-5A9E-4E44-A6A5-88C1A3F6F982}" v="6" dt="2026-05-23T06:54:00.445"/>
+    <p1510:client id="{CEECDE29-5A9E-4E44-A6A5-88C1A3F6F982}" v="8" dt="2026-05-24T06:08:02.044"/>
   </p1510:revLst>
 </p1510:revInfo>
 </file>
@@ -319,7 +319,7 @@
   <pc:docChgLst>
     <pc:chgData name="ARJUN AVALAKKI MOHAN" userId="be4ab9aaf12c5868" providerId="LiveId" clId="{C81E60EF-EF5F-4B4B-A4E1-3178676F15CC}"/>
     <pc:docChg chg="undo custSel addSld delSld modSld">
-      <pc:chgData name="ARJUN AVALAKKI MOHAN" userId="be4ab9aaf12c5868" providerId="LiveId" clId="{C81E60EF-EF5F-4B4B-A4E1-3178676F15CC}" dt="2026-05-23T06:54:48.325" v="927" actId="2890"/>
+      <pc:chgData name="ARJUN AVALAKKI MOHAN" userId="be4ab9aaf12c5868" providerId="LiveId" clId="{C81E60EF-EF5F-4B4B-A4E1-3178676F15CC}" dt="2026-05-24T06:22:16.735" v="1033" actId="14100"/>
       <pc:docMkLst>
         <pc:docMk/>
       </pc:docMkLst>
@@ -415,13 +415,13 @@
         </pc:spChg>
       </pc:sldChg>
       <pc:sldChg chg="modSp mod modNotes">
-        <pc:chgData name="ARJUN AVALAKKI MOHAN" userId="be4ab9aaf12c5868" providerId="LiveId" clId="{C81E60EF-EF5F-4B4B-A4E1-3178676F15CC}" dt="2026-05-20T03:42:14.650" v="624" actId="113"/>
+        <pc:chgData name="ARJUN AVALAKKI MOHAN" userId="be4ab9aaf12c5868" providerId="LiveId" clId="{C81E60EF-EF5F-4B4B-A4E1-3178676F15CC}" dt="2026-05-24T06:16:00.399" v="1028" actId="6549"/>
         <pc:sldMkLst>
           <pc:docMk/>
           <pc:sldMk cId="0" sldId="263"/>
         </pc:sldMkLst>
         <pc:spChg chg="mod">
-          <ac:chgData name="ARJUN AVALAKKI MOHAN" userId="be4ab9aaf12c5868" providerId="LiveId" clId="{C81E60EF-EF5F-4B4B-A4E1-3178676F15CC}" dt="2026-05-20T03:42:14.650" v="624" actId="113"/>
+          <ac:chgData name="ARJUN AVALAKKI MOHAN" userId="be4ab9aaf12c5868" providerId="LiveId" clId="{C81E60EF-EF5F-4B4B-A4E1-3178676F15CC}" dt="2026-05-24T06:16:00.399" v="1028" actId="6549"/>
           <ac:spMkLst>
             <pc:docMk/>
             <pc:sldMk cId="0" sldId="263"/>
@@ -535,14 +535,6 @@
             <ac:spMk id="263" creationId="{00000000-0000-0000-0000-000000000000}"/>
           </ac:spMkLst>
         </pc:spChg>
-        <pc:picChg chg="add del mod">
-          <ac:chgData name="ARJUN AVALAKKI MOHAN" userId="be4ab9aaf12c5868" providerId="LiveId" clId="{C81E60EF-EF5F-4B4B-A4E1-3178676F15CC}" dt="2026-05-22T05:43:32.080" v="826" actId="478"/>
-          <ac:picMkLst>
-            <pc:docMk/>
-            <pc:sldMk cId="0" sldId="269"/>
-            <ac:picMk id="2" creationId="{0EF06449-C1BE-E8BF-BC30-2A5B2F94F517}"/>
-          </ac:picMkLst>
-        </pc:picChg>
         <pc:picChg chg="add mod">
           <ac:chgData name="ARJUN AVALAKKI MOHAN" userId="be4ab9aaf12c5868" providerId="LiveId" clId="{C81E60EF-EF5F-4B4B-A4E1-3178676F15CC}" dt="2026-05-23T06:17:57.735" v="895" actId="2085"/>
           <ac:picMkLst>
@@ -557,14 +549,6 @@
             <pc:docMk/>
             <pc:sldMk cId="0" sldId="269"/>
             <ac:picMk id="4" creationId="{ECCD54A3-5A7D-7962-92AF-B50CC087C9F0}"/>
-          </ac:picMkLst>
-        </pc:picChg>
-        <pc:picChg chg="del">
-          <ac:chgData name="ARJUN AVALAKKI MOHAN" userId="be4ab9aaf12c5868" providerId="LiveId" clId="{C81E60EF-EF5F-4B4B-A4E1-3178676F15CC}" dt="2026-05-22T05:40:26.984" v="816" actId="478"/>
-          <ac:picMkLst>
-            <pc:docMk/>
-            <pc:sldMk cId="0" sldId="269"/>
-            <ac:picMk id="264" creationId="{00000000-0000-0000-0000-000000000000}"/>
           </ac:picMkLst>
         </pc:picChg>
       </pc:sldChg>
@@ -654,54 +638,214 @@
           </ac:picMkLst>
         </pc:picChg>
       </pc:sldChg>
-      <pc:sldChg chg="modNotes">
-        <pc:chgData name="ARJUN AVALAKKI MOHAN" userId="be4ab9aaf12c5868" providerId="LiveId" clId="{C81E60EF-EF5F-4B4B-A4E1-3178676F15CC}" dt="2026-05-20T03:54:24.689" v="721"/>
+      <pc:sldChg chg="addSp delSp modSp mod modNotes">
+        <pc:chgData name="ARJUN AVALAKKI MOHAN" userId="be4ab9aaf12c5868" providerId="LiveId" clId="{C81E60EF-EF5F-4B4B-A4E1-3178676F15CC}" dt="2026-05-24T06:22:16.735" v="1033" actId="14100"/>
         <pc:sldMkLst>
           <pc:docMk/>
           <pc:sldMk cId="0" sldId="273"/>
         </pc:sldMkLst>
+        <pc:spChg chg="mod">
+          <ac:chgData name="ARJUN AVALAKKI MOHAN" userId="be4ab9aaf12c5868" providerId="LiveId" clId="{C81E60EF-EF5F-4B4B-A4E1-3178676F15CC}" dt="2026-05-24T05:46:13.843" v="957" actId="1076"/>
+          <ac:spMkLst>
+            <pc:docMk/>
+            <pc:sldMk cId="0" sldId="273"/>
+            <ac:spMk id="289" creationId="{00000000-0000-0000-0000-000000000000}"/>
+          </ac:spMkLst>
+        </pc:spChg>
+        <pc:picChg chg="add del mod">
+          <ac:chgData name="ARJUN AVALAKKI MOHAN" userId="be4ab9aaf12c5868" providerId="LiveId" clId="{C81E60EF-EF5F-4B4B-A4E1-3178676F15CC}" dt="2026-05-24T06:22:07.148" v="1029" actId="478"/>
+          <ac:picMkLst>
+            <pc:docMk/>
+            <pc:sldMk cId="0" sldId="273"/>
+            <ac:picMk id="3" creationId="{EA0E80B0-48C1-3292-CFC4-6DB6C9AE6DFC}"/>
+          </ac:picMkLst>
+        </pc:picChg>
+        <pc:picChg chg="add mod">
+          <ac:chgData name="ARJUN AVALAKKI MOHAN" userId="be4ab9aaf12c5868" providerId="LiveId" clId="{C81E60EF-EF5F-4B4B-A4E1-3178676F15CC}" dt="2026-05-24T06:22:16.735" v="1033" actId="14100"/>
+          <ac:picMkLst>
+            <pc:docMk/>
+            <pc:sldMk cId="0" sldId="273"/>
+            <ac:picMk id="4" creationId="{E7D7F0C1-09C7-B9D4-ADCE-9AB087EE1367}"/>
+          </ac:picMkLst>
+        </pc:picChg>
+        <pc:picChg chg="del">
+          <ac:chgData name="ARJUN AVALAKKI MOHAN" userId="be4ab9aaf12c5868" providerId="LiveId" clId="{C81E60EF-EF5F-4B4B-A4E1-3178676F15CC}" dt="2026-05-24T05:45:46.602" v="949" actId="478"/>
+          <ac:picMkLst>
+            <pc:docMk/>
+            <pc:sldMk cId="0" sldId="273"/>
+            <ac:picMk id="290" creationId="{00000000-0000-0000-0000-000000000000}"/>
+          </ac:picMkLst>
+        </pc:picChg>
       </pc:sldChg>
-      <pc:sldChg chg="modNotes">
-        <pc:chgData name="ARJUN AVALAKKI MOHAN" userId="be4ab9aaf12c5868" providerId="LiveId" clId="{C81E60EF-EF5F-4B4B-A4E1-3178676F15CC}" dt="2026-05-20T03:54:24.689" v="721"/>
+      <pc:sldChg chg="addSp delSp modSp mod modNotes">
+        <pc:chgData name="ARJUN AVALAKKI MOHAN" userId="be4ab9aaf12c5868" providerId="LiveId" clId="{C81E60EF-EF5F-4B4B-A4E1-3178676F15CC}" dt="2026-05-24T05:53:38.804" v="963" actId="1076"/>
         <pc:sldMkLst>
           <pc:docMk/>
           <pc:sldMk cId="0" sldId="274"/>
         </pc:sldMkLst>
+        <pc:spChg chg="mod">
+          <ac:chgData name="ARJUN AVALAKKI MOHAN" userId="be4ab9aaf12c5868" providerId="LiveId" clId="{C81E60EF-EF5F-4B4B-A4E1-3178676F15CC}" dt="2026-05-24T05:53:34.405" v="961" actId="6549"/>
+          <ac:spMkLst>
+            <pc:docMk/>
+            <pc:sldMk cId="0" sldId="274"/>
+            <ac:spMk id="296" creationId="{00000000-0000-0000-0000-000000000000}"/>
+          </ac:spMkLst>
+        </pc:spChg>
+        <pc:picChg chg="add mod">
+          <ac:chgData name="ARJUN AVALAKKI MOHAN" userId="be4ab9aaf12c5868" providerId="LiveId" clId="{C81E60EF-EF5F-4B4B-A4E1-3178676F15CC}" dt="2026-05-24T05:53:38.804" v="963" actId="1076"/>
+          <ac:picMkLst>
+            <pc:docMk/>
+            <pc:sldMk cId="0" sldId="274"/>
+            <ac:picMk id="3" creationId="{9C254158-8C0A-2798-C371-0E517A405794}"/>
+          </ac:picMkLst>
+        </pc:picChg>
+        <pc:picChg chg="del">
+          <ac:chgData name="ARJUN AVALAKKI MOHAN" userId="be4ab9aaf12c5868" providerId="LiveId" clId="{C81E60EF-EF5F-4B4B-A4E1-3178676F15CC}" dt="2026-05-24T05:53:30.469" v="960" actId="478"/>
+          <ac:picMkLst>
+            <pc:docMk/>
+            <pc:sldMk cId="0" sldId="274"/>
+            <ac:picMk id="297" creationId="{00000000-0000-0000-0000-000000000000}"/>
+          </ac:picMkLst>
+        </pc:picChg>
       </pc:sldChg>
-      <pc:sldChg chg="modNotes">
-        <pc:chgData name="ARJUN AVALAKKI MOHAN" userId="be4ab9aaf12c5868" providerId="LiveId" clId="{C81E60EF-EF5F-4B4B-A4E1-3178676F15CC}" dt="2026-05-20T03:54:24.689" v="721"/>
+      <pc:sldChg chg="addSp delSp modSp mod modNotes">
+        <pc:chgData name="ARJUN AVALAKKI MOHAN" userId="be4ab9aaf12c5868" providerId="LiveId" clId="{C81E60EF-EF5F-4B4B-A4E1-3178676F15CC}" dt="2026-05-24T05:55:40.958" v="973" actId="1076"/>
         <pc:sldMkLst>
           <pc:docMk/>
           <pc:sldMk cId="0" sldId="275"/>
         </pc:sldMkLst>
+        <pc:spChg chg="mod">
+          <ac:chgData name="ARJUN AVALAKKI MOHAN" userId="be4ab9aaf12c5868" providerId="LiveId" clId="{C81E60EF-EF5F-4B4B-A4E1-3178676F15CC}" dt="2026-05-24T05:55:37.894" v="972" actId="1076"/>
+          <ac:spMkLst>
+            <pc:docMk/>
+            <pc:sldMk cId="0" sldId="275"/>
+            <ac:spMk id="303" creationId="{00000000-0000-0000-0000-000000000000}"/>
+          </ac:spMkLst>
+        </pc:spChg>
+        <pc:picChg chg="add mod">
+          <ac:chgData name="ARJUN AVALAKKI MOHAN" userId="be4ab9aaf12c5868" providerId="LiveId" clId="{C81E60EF-EF5F-4B4B-A4E1-3178676F15CC}" dt="2026-05-24T05:55:40.958" v="973" actId="1076"/>
+          <ac:picMkLst>
+            <pc:docMk/>
+            <pc:sldMk cId="0" sldId="275"/>
+            <ac:picMk id="3" creationId="{26EEDA14-9EDB-090D-C1DB-8484BDC7DB29}"/>
+          </ac:picMkLst>
+        </pc:picChg>
+        <pc:picChg chg="del">
+          <ac:chgData name="ARJUN AVALAKKI MOHAN" userId="be4ab9aaf12c5868" providerId="LiveId" clId="{C81E60EF-EF5F-4B4B-A4E1-3178676F15CC}" dt="2026-05-24T05:55:17.560" v="964" actId="478"/>
+          <ac:picMkLst>
+            <pc:docMk/>
+            <pc:sldMk cId="0" sldId="275"/>
+            <ac:picMk id="304" creationId="{00000000-0000-0000-0000-000000000000}"/>
+          </ac:picMkLst>
+        </pc:picChg>
       </pc:sldChg>
-      <pc:sldChg chg="modNotes">
-        <pc:chgData name="ARJUN AVALAKKI MOHAN" userId="be4ab9aaf12c5868" providerId="LiveId" clId="{C81E60EF-EF5F-4B4B-A4E1-3178676F15CC}" dt="2026-05-20T03:54:24.689" v="721"/>
+      <pc:sldChg chg="addSp delSp modSp mod modNotes">
+        <pc:chgData name="ARJUN AVALAKKI MOHAN" userId="be4ab9aaf12c5868" providerId="LiveId" clId="{C81E60EF-EF5F-4B4B-A4E1-3178676F15CC}" dt="2026-05-24T05:59:48.090" v="984" actId="14100"/>
         <pc:sldMkLst>
           <pc:docMk/>
           <pc:sldMk cId="0" sldId="276"/>
         </pc:sldMkLst>
+        <pc:spChg chg="mod">
+          <ac:chgData name="ARJUN AVALAKKI MOHAN" userId="be4ab9aaf12c5868" providerId="LiveId" clId="{C81E60EF-EF5F-4B4B-A4E1-3178676F15CC}" dt="2026-05-24T05:59:40.193" v="982" actId="1076"/>
+          <ac:spMkLst>
+            <pc:docMk/>
+            <pc:sldMk cId="0" sldId="276"/>
+            <ac:spMk id="310" creationId="{00000000-0000-0000-0000-000000000000}"/>
+          </ac:spMkLst>
+        </pc:spChg>
+        <pc:picChg chg="add mod">
+          <ac:chgData name="ARJUN AVALAKKI MOHAN" userId="be4ab9aaf12c5868" providerId="LiveId" clId="{C81E60EF-EF5F-4B4B-A4E1-3178676F15CC}" dt="2026-05-24T05:59:48.090" v="984" actId="14100"/>
+          <ac:picMkLst>
+            <pc:docMk/>
+            <pc:sldMk cId="0" sldId="276"/>
+            <ac:picMk id="3" creationId="{BADAC383-CE7A-5023-827F-1EEAFC70C372}"/>
+          </ac:picMkLst>
+        </pc:picChg>
+        <pc:picChg chg="del">
+          <ac:chgData name="ARJUN AVALAKKI MOHAN" userId="be4ab9aaf12c5868" providerId="LiveId" clId="{C81E60EF-EF5F-4B4B-A4E1-3178676F15CC}" dt="2026-05-24T05:59:19.569" v="974" actId="478"/>
+          <ac:picMkLst>
+            <pc:docMk/>
+            <pc:sldMk cId="0" sldId="276"/>
+            <ac:picMk id="311" creationId="{00000000-0000-0000-0000-000000000000}"/>
+          </ac:picMkLst>
+        </pc:picChg>
       </pc:sldChg>
-      <pc:sldChg chg="modNotes">
-        <pc:chgData name="ARJUN AVALAKKI MOHAN" userId="be4ab9aaf12c5868" providerId="LiveId" clId="{C81E60EF-EF5F-4B4B-A4E1-3178676F15CC}" dt="2026-05-20T03:54:24.689" v="721"/>
+      <pc:sldChg chg="addSp delSp modSp mod modNotes">
+        <pc:chgData name="ARJUN AVALAKKI MOHAN" userId="be4ab9aaf12c5868" providerId="LiveId" clId="{C81E60EF-EF5F-4B4B-A4E1-3178676F15CC}" dt="2026-05-24T06:03:31.527" v="1002" actId="14100"/>
         <pc:sldMkLst>
           <pc:docMk/>
           <pc:sldMk cId="0" sldId="277"/>
         </pc:sldMkLst>
+        <pc:spChg chg="mod">
+          <ac:chgData name="ARJUN AVALAKKI MOHAN" userId="be4ab9aaf12c5868" providerId="LiveId" clId="{C81E60EF-EF5F-4B4B-A4E1-3178676F15CC}" dt="2026-05-24T06:03:20.026" v="998" actId="20577"/>
+          <ac:spMkLst>
+            <pc:docMk/>
+            <pc:sldMk cId="0" sldId="277"/>
+            <ac:spMk id="317" creationId="{00000000-0000-0000-0000-000000000000}"/>
+          </ac:spMkLst>
+        </pc:spChg>
+        <pc:picChg chg="add mod">
+          <ac:chgData name="ARJUN AVALAKKI MOHAN" userId="be4ab9aaf12c5868" providerId="LiveId" clId="{C81E60EF-EF5F-4B4B-A4E1-3178676F15CC}" dt="2026-05-24T06:03:31.527" v="1002" actId="14100"/>
+          <ac:picMkLst>
+            <pc:docMk/>
+            <pc:sldMk cId="0" sldId="277"/>
+            <ac:picMk id="3" creationId="{C9927469-411D-D575-839D-84C34A8510E9}"/>
+          </ac:picMkLst>
+        </pc:picChg>
+        <pc:picChg chg="del">
+          <ac:chgData name="ARJUN AVALAKKI MOHAN" userId="be4ab9aaf12c5868" providerId="LiveId" clId="{C81E60EF-EF5F-4B4B-A4E1-3178676F15CC}" dt="2026-05-24T06:02:59.447" v="985" actId="478"/>
+          <ac:picMkLst>
+            <pc:docMk/>
+            <pc:sldMk cId="0" sldId="277"/>
+            <ac:picMk id="318" creationId="{00000000-0000-0000-0000-000000000000}"/>
+          </ac:picMkLst>
+        </pc:picChg>
       </pc:sldChg>
-      <pc:sldChg chg="modNotes">
-        <pc:chgData name="ARJUN AVALAKKI MOHAN" userId="be4ab9aaf12c5868" providerId="LiveId" clId="{C81E60EF-EF5F-4B4B-A4E1-3178676F15CC}" dt="2026-05-20T03:54:24.689" v="721"/>
+      <pc:sldChg chg="addSp delSp modSp mod modNotes">
+        <pc:chgData name="ARJUN AVALAKKI MOHAN" userId="be4ab9aaf12c5868" providerId="LiveId" clId="{C81E60EF-EF5F-4B4B-A4E1-3178676F15CC}" dt="2026-05-24T06:06:03.388" v="1013" actId="14100"/>
         <pc:sldMkLst>
           <pc:docMk/>
           <pc:sldMk cId="0" sldId="278"/>
         </pc:sldMkLst>
+        <pc:spChg chg="mod">
+          <ac:chgData name="ARJUN AVALAKKI MOHAN" userId="be4ab9aaf12c5868" providerId="LiveId" clId="{C81E60EF-EF5F-4B4B-A4E1-3178676F15CC}" dt="2026-05-24T06:05:44.177" v="1009" actId="14100"/>
+          <ac:spMkLst>
+            <pc:docMk/>
+            <pc:sldMk cId="0" sldId="278"/>
+            <ac:spMk id="324" creationId="{00000000-0000-0000-0000-000000000000}"/>
+          </ac:spMkLst>
+        </pc:spChg>
+        <pc:picChg chg="add mod">
+          <ac:chgData name="ARJUN AVALAKKI MOHAN" userId="be4ab9aaf12c5868" providerId="LiveId" clId="{C81E60EF-EF5F-4B4B-A4E1-3178676F15CC}" dt="2026-05-24T06:06:03.388" v="1013" actId="14100"/>
+          <ac:picMkLst>
+            <pc:docMk/>
+            <pc:sldMk cId="0" sldId="278"/>
+            <ac:picMk id="3" creationId="{ACFCD5A7-D41D-6C52-2B9C-D691A8AA9C0D}"/>
+          </ac:picMkLst>
+        </pc:picChg>
+        <pc:picChg chg="del">
+          <ac:chgData name="ARJUN AVALAKKI MOHAN" userId="be4ab9aaf12c5868" providerId="LiveId" clId="{C81E60EF-EF5F-4B4B-A4E1-3178676F15CC}" dt="2026-05-24T06:05:21.764" v="1003" actId="478"/>
+          <ac:picMkLst>
+            <pc:docMk/>
+            <pc:sldMk cId="0" sldId="278"/>
+            <ac:picMk id="325" creationId="{00000000-0000-0000-0000-000000000000}"/>
+          </ac:picMkLst>
+        </pc:picChg>
       </pc:sldChg>
-      <pc:sldChg chg="modNotes">
-        <pc:chgData name="ARJUN AVALAKKI MOHAN" userId="be4ab9aaf12c5868" providerId="LiveId" clId="{C81E60EF-EF5F-4B4B-A4E1-3178676F15CC}" dt="2026-05-20T03:54:24.689" v="721"/>
+      <pc:sldChg chg="modSp mod modNotes">
+        <pc:chgData name="ARJUN AVALAKKI MOHAN" userId="be4ab9aaf12c5868" providerId="LiveId" clId="{C81E60EF-EF5F-4B4B-A4E1-3178676F15CC}" dt="2026-05-24T06:08:54.692" v="1027" actId="14100"/>
         <pc:sldMkLst>
           <pc:docMk/>
           <pc:sldMk cId="0" sldId="279"/>
         </pc:sldMkLst>
+        <pc:spChg chg="mod">
+          <ac:chgData name="ARJUN AVALAKKI MOHAN" userId="be4ab9aaf12c5868" providerId="LiveId" clId="{C81E60EF-EF5F-4B4B-A4E1-3178676F15CC}" dt="2026-05-24T06:08:54.692" v="1027" actId="14100"/>
+          <ac:spMkLst>
+            <pc:docMk/>
+            <pc:sldMk cId="0" sldId="279"/>
+            <ac:spMk id="331" creationId="{00000000-0000-0000-0000-000000000000}"/>
+          </ac:spMkLst>
+        </pc:spChg>
       </pc:sldChg>
       <pc:sldChg chg="modSp new mod">
         <pc:chgData name="ARJUN AVALAKKI MOHAN" userId="be4ab9aaf12c5868" providerId="LiveId" clId="{C81E60EF-EF5F-4B4B-A4E1-3178676F15CC}" dt="2026-05-19T05:49:43.113" v="518" actId="2710"/>
@@ -726,12 +870,60 @@
           </ac:spMkLst>
         </pc:spChg>
       </pc:sldChg>
-      <pc:sldChg chg="add">
-        <pc:chgData name="ARJUN AVALAKKI MOHAN" userId="be4ab9aaf12c5868" providerId="LiveId" clId="{C81E60EF-EF5F-4B4B-A4E1-3178676F15CC}" dt="2026-05-23T06:54:48.325" v="927" actId="2890"/>
+      <pc:sldChg chg="addSp delSp modSp add mod">
+        <pc:chgData name="ARJUN AVALAKKI MOHAN" userId="be4ab9aaf12c5868" providerId="LiveId" clId="{C81E60EF-EF5F-4B4B-A4E1-3178676F15CC}" dt="2026-05-24T05:39:32.306" v="948" actId="1076"/>
         <pc:sldMkLst>
           <pc:docMk/>
           <pc:sldMk cId="484767743" sldId="288"/>
         </pc:sldMkLst>
+        <pc:spChg chg="mod">
+          <ac:chgData name="ARJUN AVALAKKI MOHAN" userId="be4ab9aaf12c5868" providerId="LiveId" clId="{C81E60EF-EF5F-4B4B-A4E1-3178676F15CC}" dt="2026-05-24T05:39:32.306" v="948" actId="1076"/>
+          <ac:spMkLst>
+            <pc:docMk/>
+            <pc:sldMk cId="484767743" sldId="288"/>
+            <ac:spMk id="11" creationId="{97E99462-E313-08C0-92C2-6581D6E45DD1}"/>
+          </ac:spMkLst>
+        </pc:spChg>
+        <pc:picChg chg="add del mod">
+          <ac:chgData name="ARJUN AVALAKKI MOHAN" userId="be4ab9aaf12c5868" providerId="LiveId" clId="{C81E60EF-EF5F-4B4B-A4E1-3178676F15CC}" dt="2026-05-24T05:37:17.572" v="935" actId="478"/>
+          <ac:picMkLst>
+            <pc:docMk/>
+            <pc:sldMk cId="484767743" sldId="288"/>
+            <ac:picMk id="3" creationId="{C7EEF720-796D-98E9-C6CF-1B68DA78435F}"/>
+          </ac:picMkLst>
+        </pc:picChg>
+        <pc:picChg chg="del">
+          <ac:chgData name="ARJUN AVALAKKI MOHAN" userId="be4ab9aaf12c5868" providerId="LiveId" clId="{C81E60EF-EF5F-4B4B-A4E1-3178676F15CC}" dt="2026-05-24T05:29:58.375" v="928" actId="478"/>
+          <ac:picMkLst>
+            <pc:docMk/>
+            <pc:sldMk cId="484767743" sldId="288"/>
+            <ac:picMk id="4" creationId="{CC73533D-2F9C-7644-C31A-DD9AB972C2D8}"/>
+          </ac:picMkLst>
+        </pc:picChg>
+        <pc:picChg chg="add del mod">
+          <ac:chgData name="ARJUN AVALAKKI MOHAN" userId="be4ab9aaf12c5868" providerId="LiveId" clId="{C81E60EF-EF5F-4B4B-A4E1-3178676F15CC}" dt="2026-05-24T05:38:58.308" v="940" actId="478"/>
+          <ac:picMkLst>
+            <pc:docMk/>
+            <pc:sldMk cId="484767743" sldId="288"/>
+            <ac:picMk id="6" creationId="{6037F583-1076-4A43-642A-3448DBE7BF97}"/>
+          </ac:picMkLst>
+        </pc:picChg>
+        <pc:picChg chg="add mod">
+          <ac:chgData name="ARJUN AVALAKKI MOHAN" userId="be4ab9aaf12c5868" providerId="LiveId" clId="{C81E60EF-EF5F-4B4B-A4E1-3178676F15CC}" dt="2026-05-24T05:39:06.059" v="944" actId="14100"/>
+          <ac:picMkLst>
+            <pc:docMk/>
+            <pc:sldMk cId="484767743" sldId="288"/>
+            <ac:picMk id="8" creationId="{7506F691-7B00-3236-49B2-A466B351F89B}"/>
+          </ac:picMkLst>
+        </pc:picChg>
+        <pc:picChg chg="del">
+          <ac:chgData name="ARJUN AVALAKKI MOHAN" userId="be4ab9aaf12c5868" providerId="LiveId" clId="{C81E60EF-EF5F-4B4B-A4E1-3178676F15CC}" dt="2026-05-24T05:29:59.320" v="929" actId="478"/>
+          <ac:picMkLst>
+            <pc:docMk/>
+            <pc:sldMk cId="484767743" sldId="288"/>
+            <ac:picMk id="10" creationId="{691005A1-7CCE-407F-FBB7-4EED88154932}"/>
+          </ac:picMkLst>
+        </pc:picChg>
       </pc:sldChg>
     </pc:docChg>
   </pc:docChgLst>
@@ -29347,10 +29539,10 @@
               <a:buNone/>
             </a:pPr>
             <a:r>
-              <a:rPr lang="en"/>
+              <a:rPr lang="en" dirty="0"/>
               <a:t>Step 3: Create A Physical Database</a:t>
             </a:r>
-            <a:endParaRPr/>
+            <a:endParaRPr dirty="0"/>
           </a:p>
         </p:txBody>
       </p:sp>
@@ -29397,7 +29589,7 @@
               <a:buNone/>
             </a:pPr>
             <a:r>
-              <a:rPr lang="en" sz="1550">
+              <a:rPr lang="en" sz="1550" dirty="0">
                 <a:solidFill>
                   <a:srgbClr val="525C65"/>
                 </a:solidFill>
@@ -29411,7 +29603,7 @@
               </a:rPr>
               <a:t>In this step, you will be turning your database model into a physical database.</a:t>
             </a:r>
-            <a:endParaRPr sz="1550">
+            <a:endParaRPr sz="1550" dirty="0">
               <a:solidFill>
                 <a:srgbClr val="525C65"/>
               </a:solidFill>
@@ -29443,7 +29635,7 @@
               <a:buNone/>
             </a:pPr>
             <a:r>
-              <a:rPr lang="en" sz="1550" b="1">
+              <a:rPr lang="en" sz="1550" b="1" dirty="0">
                 <a:solidFill>
                   <a:srgbClr val="525C65"/>
                 </a:solidFill>
@@ -29457,7 +29649,7 @@
               </a:rPr>
               <a:t>You will:</a:t>
             </a:r>
-            <a:endParaRPr sz="1550" b="1">
+            <a:endParaRPr sz="1550" b="1" dirty="0">
               <a:solidFill>
                 <a:srgbClr val="525C65"/>
               </a:solidFill>
@@ -29489,7 +29681,7 @@
               <a:buChar char="●"/>
             </a:pPr>
             <a:r>
-              <a:rPr lang="en" sz="1550">
+              <a:rPr lang="en" sz="1550" dirty="0">
                 <a:solidFill>
                   <a:srgbClr val="525C65"/>
                 </a:solidFill>
@@ -29503,7 +29695,7 @@
               </a:rPr>
               <a:t>Create the database using SQL DDL commands</a:t>
             </a:r>
-            <a:endParaRPr sz="1550">
+            <a:endParaRPr sz="1550" dirty="0">
               <a:solidFill>
                 <a:srgbClr val="525C65"/>
               </a:solidFill>
@@ -29535,7 +29727,7 @@
               <a:buChar char="●"/>
             </a:pPr>
             <a:r>
-              <a:rPr lang="en" sz="1550">
+              <a:rPr lang="en" sz="1550" dirty="0">
                 <a:solidFill>
                   <a:srgbClr val="525C65"/>
                 </a:solidFill>
@@ -29549,7 +29741,7 @@
               </a:rPr>
               <a:t>Load the data into your database, utilizing flat file ETL</a:t>
             </a:r>
-            <a:endParaRPr sz="1550">
+            <a:endParaRPr sz="1550" dirty="0">
               <a:solidFill>
                 <a:srgbClr val="525C65"/>
               </a:solidFill>
@@ -29581,7 +29773,7 @@
               <a:buChar char="●"/>
             </a:pPr>
             <a:r>
-              <a:rPr lang="en" sz="1550">
+              <a:rPr lang="en" sz="1550" dirty="0">
                 <a:solidFill>
                   <a:srgbClr val="525C65"/>
                 </a:solidFill>
@@ -29595,7 +29787,7 @@
               </a:rPr>
               <a:t>Answer a series of questions using CRUD SQL commands to demonstrate your database was created and populated correctly</a:t>
             </a:r>
-            <a:endParaRPr sz="1550">
+            <a:endParaRPr sz="1550" dirty="0">
               <a:solidFill>
                 <a:srgbClr val="525C65"/>
               </a:solidFill>
@@ -29626,7 +29818,7 @@
               <a:buFont typeface="Arial"/>
               <a:buNone/>
             </a:pPr>
-            <a:endParaRPr sz="1350" b="1">
+            <a:endParaRPr sz="1350" b="1" dirty="0">
               <a:solidFill>
                 <a:srgbClr val="525C65"/>
               </a:solidFill>
@@ -29658,7 +29850,7 @@
               <a:buNone/>
             </a:pPr>
             <a:r>
-              <a:rPr lang="en" sz="1550" b="1">
+              <a:rPr lang="en" sz="1550" b="1" dirty="0">
                 <a:solidFill>
                   <a:srgbClr val="525C65"/>
                 </a:solidFill>
@@ -29672,7 +29864,7 @@
               </a:rPr>
               <a:t>Submission</a:t>
             </a:r>
-            <a:endParaRPr sz="1550" b="1">
+            <a:endParaRPr sz="1550" b="1" dirty="0">
               <a:solidFill>
                 <a:srgbClr val="525C65"/>
               </a:solidFill>
@@ -29704,7 +29896,7 @@
               <a:buNone/>
             </a:pPr>
             <a:r>
-              <a:rPr lang="en" sz="1550">
+              <a:rPr lang="en" sz="1550" dirty="0">
                 <a:solidFill>
                   <a:srgbClr val="525C65"/>
                 </a:solidFill>
@@ -29718,7 +29910,7 @@
               </a:rPr>
               <a:t>For this step, you will need to submit SQL files containing all DDL SQL scripts used to create the database.</a:t>
             </a:r>
-            <a:endParaRPr sz="1550">
+            <a:endParaRPr sz="1550" dirty="0">
               <a:solidFill>
                 <a:srgbClr val="525C65"/>
               </a:solidFill>
@@ -29749,7 +29941,7 @@
               <a:buFont typeface="Arial"/>
               <a:buNone/>
             </a:pPr>
-            <a:endParaRPr sz="1550">
+            <a:endParaRPr sz="1550" dirty="0">
               <a:solidFill>
                 <a:srgbClr val="525C65"/>
               </a:solidFill>
@@ -29781,7 +29973,7 @@
               <a:buNone/>
             </a:pPr>
             <a:r>
-              <a:rPr lang="en" sz="1550">
+              <a:rPr lang="en" sz="1550" dirty="0">
                 <a:solidFill>
                   <a:srgbClr val="525C65"/>
                 </a:solidFill>
@@ -29795,7 +29987,7 @@
               </a:rPr>
               <a:t>You will also have to submit screenshots showing CRUD commands, along with results for each of the questions found in the starter template.</a:t>
             </a:r>
-            <a:endParaRPr sz="1550">
+            <a:endParaRPr sz="1550" dirty="0">
               <a:solidFill>
                 <a:srgbClr val="525C65"/>
               </a:solidFill>
@@ -29826,7 +30018,7 @@
               <a:buFont typeface="Arial"/>
               <a:buNone/>
             </a:pPr>
-            <a:endParaRPr sz="1350">
+            <a:endParaRPr sz="1350" dirty="0">
               <a:solidFill>
                 <a:srgbClr val="525C65"/>
               </a:solidFill>
@@ -29857,7 +30049,7 @@
               <a:buFont typeface="Arial"/>
               <a:buNone/>
             </a:pPr>
-            <a:endParaRPr sz="1350">
+            <a:endParaRPr sz="1350" dirty="0">
               <a:solidFill>
                 <a:srgbClr val="525C65"/>
               </a:solidFill>
@@ -29889,7 +30081,7 @@
               <a:buNone/>
             </a:pPr>
             <a:r>
-              <a:rPr lang="en" sz="1550" b="1">
+              <a:rPr lang="en" sz="1550" b="1" dirty="0">
                 <a:solidFill>
                   <a:srgbClr val="525C65"/>
                 </a:solidFill>
@@ -29903,7 +30095,7 @@
               </a:rPr>
               <a:t>Hints</a:t>
             </a:r>
-            <a:endParaRPr sz="1550" b="1">
+            <a:endParaRPr sz="1550" b="1" dirty="0">
               <a:solidFill>
                 <a:srgbClr val="525C65"/>
               </a:solidFill>
@@ -29935,7 +30127,7 @@
               <a:buNone/>
             </a:pPr>
             <a:r>
-              <a:rPr lang="en" sz="1550">
+              <a:rPr lang="en" sz="1550" dirty="0">
                 <a:solidFill>
                   <a:srgbClr val="525C65"/>
                 </a:solidFill>
@@ -29949,7 +30141,7 @@
               </a:rPr>
               <a:t>Your DDL script will be graded by running the code you submit. Please ensure your SQL code runs properly!</a:t>
             </a:r>
-            <a:endParaRPr sz="1550">
+            <a:endParaRPr sz="1550" dirty="0">
               <a:solidFill>
                 <a:srgbClr val="525C65"/>
               </a:solidFill>
@@ -29980,7 +30172,7 @@
               <a:buFont typeface="Arial"/>
               <a:buNone/>
             </a:pPr>
-            <a:endParaRPr sz="1550">
+            <a:endParaRPr sz="1550" dirty="0">
               <a:solidFill>
                 <a:srgbClr val="525C65"/>
               </a:solidFill>
@@ -30012,7 +30204,7 @@
               <a:buNone/>
             </a:pPr>
             <a:r>
-              <a:rPr lang="en" sz="1550">
+              <a:rPr lang="en" sz="1550" dirty="0">
                 <a:solidFill>
                   <a:srgbClr val="525C65"/>
                 </a:solidFill>
@@ -30026,7 +30218,7 @@
               </a:rPr>
               <a:t>Foreign keys cannot be created on tables that do not exist yet, so it may be easier to create all tables in the database, then to go back and run modify statements on the tables to create foreign key constraints.</a:t>
             </a:r>
-            <a:endParaRPr sz="1550">
+            <a:endParaRPr sz="1550" dirty="0">
               <a:solidFill>
                 <a:srgbClr val="525C65"/>
               </a:solidFill>
@@ -30057,7 +30249,7 @@
               <a:buFont typeface="Arial"/>
               <a:buNone/>
             </a:pPr>
-            <a:endParaRPr sz="1550">
+            <a:endParaRPr sz="1550" dirty="0">
               <a:solidFill>
                 <a:srgbClr val="525C65"/>
               </a:solidFill>
@@ -30089,7 +30281,7 @@
               <a:buNone/>
             </a:pPr>
             <a:r>
-              <a:rPr lang="en" sz="1550">
+              <a:rPr lang="en" sz="1550" dirty="0">
                 <a:solidFill>
                   <a:srgbClr val="525C65"/>
                 </a:solidFill>
@@ -30104,7 +30296,7 @@
               <a:t>After running CRUD commands like update, insert, or delete, run a </a:t>
             </a:r>
             <a:r>
-              <a:rPr lang="en" sz="1550">
+              <a:rPr lang="en" sz="1550" dirty="0">
                 <a:solidFill>
                   <a:srgbClr val="525C65"/>
                 </a:solidFill>
@@ -30119,7 +30311,7 @@
               <a:t>SELECT*</a:t>
             </a:r>
             <a:r>
-              <a:rPr lang="en" sz="1550">
+              <a:rPr lang="en" sz="1550" dirty="0">
                 <a:solidFill>
                   <a:srgbClr val="525C65"/>
                 </a:solidFill>
@@ -30133,7 +30325,7 @@
               </a:rPr>
               <a:t> command on the affected table, so the reviewer can see the results of the command.</a:t>
             </a:r>
-            <a:endParaRPr sz="1050">
+            <a:endParaRPr sz="1050" dirty="0">
               <a:solidFill>
                 <a:srgbClr val="525C65"/>
               </a:solidFill>
@@ -30156,7 +30348,7 @@
               </a:spcAft>
               <a:buNone/>
             </a:pPr>
-            <a:endParaRPr sz="2200">
+            <a:endParaRPr sz="2200" dirty="0">
               <a:solidFill>
                 <a:srgbClr val="525C65"/>
               </a:solidFill>
@@ -30849,12 +31041,305 @@
           </a:p>
         </p:txBody>
       </p:sp>
+      <p:sp>
+        <p:nvSpPr>
+          <p:cNvPr id="11" name="Google Shape;282;p67">
+            <a:extLst>
+              <a:ext uri="{FF2B5EF4-FFF2-40B4-BE49-F238E27FC236}">
+                <a16:creationId xmlns:a16="http://schemas.microsoft.com/office/drawing/2014/main" id="{97E99462-E313-08C0-92C2-6581D6E45DD1}"/>
+              </a:ext>
+            </a:extLst>
+          </p:cNvPr>
+          <p:cNvSpPr txBox="1">
+            <a:spLocks/>
+          </p:cNvSpPr>
+          <p:nvPr/>
+        </p:nvSpPr>
+        <p:spPr>
+          <a:xfrm>
+            <a:off x="264855" y="2783095"/>
+            <a:ext cx="3002891" cy="590527"/>
+          </a:xfrm>
+          <a:prstGeom prst="rect">
+            <a:avLst/>
+          </a:prstGeom>
+          <a:noFill/>
+          <a:ln>
+            <a:noFill/>
+          </a:ln>
+        </p:spPr>
+        <p:txBody>
+          <a:bodyPr spcFirstLastPara="1" wrap="square" lIns="91425" tIns="91425" rIns="91425" bIns="91425" anchor="t" anchorCtr="0">
+            <a:noAutofit/>
+          </a:bodyPr>
+          <a:lstStyle>
+            <a:defPPr marR="0" lvl="0" algn="l" rtl="0">
+              <a:lnSpc>
+                <a:spcPct val="100000"/>
+              </a:lnSpc>
+              <a:spcBef>
+                <a:spcPts val="0"/>
+              </a:spcBef>
+              <a:spcAft>
+                <a:spcPts val="0"/>
+              </a:spcAft>
+            </a:defPPr>
+            <a:lvl1pPr marL="457200" marR="0" lvl="0" indent="-419100" algn="l" rtl="0">
+              <a:lnSpc>
+                <a:spcPct val="115000"/>
+              </a:lnSpc>
+              <a:spcBef>
+                <a:spcPts val="0"/>
+              </a:spcBef>
+              <a:spcAft>
+                <a:spcPts val="0"/>
+              </a:spcAft>
+              <a:buClr>
+                <a:schemeClr val="dk2"/>
+              </a:buClr>
+              <a:buSzPts val="3000"/>
+              <a:buFont typeface="Open Sans Light"/>
+              <a:buChar char="●"/>
+              <a:defRPr sz="3000" b="0" i="0" u="none" strike="noStrike" cap="none">
+                <a:solidFill>
+                  <a:schemeClr val="dk2"/>
+                </a:solidFill>
+                <a:latin typeface="Open Sans Light"/>
+                <a:ea typeface="Open Sans Light"/>
+                <a:cs typeface="Open Sans Light"/>
+                <a:sym typeface="Open Sans Light"/>
+              </a:defRPr>
+            </a:lvl1pPr>
+            <a:lvl2pPr marL="914400" marR="0" lvl="1" indent="-381000" algn="l" rtl="0">
+              <a:lnSpc>
+                <a:spcPct val="115000"/>
+              </a:lnSpc>
+              <a:spcBef>
+                <a:spcPts val="1600"/>
+              </a:spcBef>
+              <a:spcAft>
+                <a:spcPts val="0"/>
+              </a:spcAft>
+              <a:buClr>
+                <a:schemeClr val="dk2"/>
+              </a:buClr>
+              <a:buSzPts val="2400"/>
+              <a:buFont typeface="Open Sans Light"/>
+              <a:buChar char="○"/>
+              <a:defRPr sz="2400" b="0" i="0" u="none" strike="noStrike" cap="none">
+                <a:solidFill>
+                  <a:schemeClr val="dk2"/>
+                </a:solidFill>
+                <a:latin typeface="Open Sans Light"/>
+                <a:ea typeface="Open Sans Light"/>
+                <a:cs typeface="Open Sans Light"/>
+                <a:sym typeface="Open Sans Light"/>
+              </a:defRPr>
+            </a:lvl2pPr>
+            <a:lvl3pPr marL="1371600" marR="0" lvl="2" indent="-342900" algn="l" rtl="0">
+              <a:lnSpc>
+                <a:spcPct val="115000"/>
+              </a:lnSpc>
+              <a:spcBef>
+                <a:spcPts val="1600"/>
+              </a:spcBef>
+              <a:spcAft>
+                <a:spcPts val="0"/>
+              </a:spcAft>
+              <a:buClr>
+                <a:schemeClr val="dk2"/>
+              </a:buClr>
+              <a:buSzPts val="1800"/>
+              <a:buFont typeface="Open Sans Light"/>
+              <a:buChar char="■"/>
+              <a:defRPr sz="1800" b="0" i="0" u="none" strike="noStrike" cap="none">
+                <a:solidFill>
+                  <a:schemeClr val="dk2"/>
+                </a:solidFill>
+                <a:latin typeface="Open Sans Light"/>
+                <a:ea typeface="Open Sans Light"/>
+                <a:cs typeface="Open Sans Light"/>
+                <a:sym typeface="Open Sans Light"/>
+              </a:defRPr>
+            </a:lvl3pPr>
+            <a:lvl4pPr marL="1828800" marR="0" lvl="3" indent="-317500" algn="l" rtl="0">
+              <a:lnSpc>
+                <a:spcPct val="115000"/>
+              </a:lnSpc>
+              <a:spcBef>
+                <a:spcPts val="1600"/>
+              </a:spcBef>
+              <a:spcAft>
+                <a:spcPts val="0"/>
+              </a:spcAft>
+              <a:buClr>
+                <a:schemeClr val="dk2"/>
+              </a:buClr>
+              <a:buSzPts val="1400"/>
+              <a:buFont typeface="Open Sans Light"/>
+              <a:buChar char="●"/>
+              <a:defRPr sz="1400" b="0" i="0" u="none" strike="noStrike" cap="none">
+                <a:solidFill>
+                  <a:schemeClr val="dk2"/>
+                </a:solidFill>
+                <a:latin typeface="Open Sans Light"/>
+                <a:ea typeface="Open Sans Light"/>
+                <a:cs typeface="Open Sans Light"/>
+                <a:sym typeface="Open Sans Light"/>
+              </a:defRPr>
+            </a:lvl4pPr>
+            <a:lvl5pPr marL="2286000" marR="0" lvl="4" indent="-317500" algn="l" rtl="0">
+              <a:lnSpc>
+                <a:spcPct val="115000"/>
+              </a:lnSpc>
+              <a:spcBef>
+                <a:spcPts val="1600"/>
+              </a:spcBef>
+              <a:spcAft>
+                <a:spcPts val="0"/>
+              </a:spcAft>
+              <a:buClr>
+                <a:schemeClr val="dk2"/>
+              </a:buClr>
+              <a:buSzPts val="1400"/>
+              <a:buFont typeface="Open Sans Light"/>
+              <a:buChar char="○"/>
+              <a:defRPr sz="1400" b="0" i="0" u="none" strike="noStrike" cap="none">
+                <a:solidFill>
+                  <a:schemeClr val="dk2"/>
+                </a:solidFill>
+                <a:latin typeface="Open Sans Light"/>
+                <a:ea typeface="Open Sans Light"/>
+                <a:cs typeface="Open Sans Light"/>
+                <a:sym typeface="Open Sans Light"/>
+              </a:defRPr>
+            </a:lvl5pPr>
+            <a:lvl6pPr marL="2743200" marR="0" lvl="5" indent="-317500" algn="l" rtl="0">
+              <a:lnSpc>
+                <a:spcPct val="115000"/>
+              </a:lnSpc>
+              <a:spcBef>
+                <a:spcPts val="1600"/>
+              </a:spcBef>
+              <a:spcAft>
+                <a:spcPts val="0"/>
+              </a:spcAft>
+              <a:buClr>
+                <a:schemeClr val="dk2"/>
+              </a:buClr>
+              <a:buSzPts val="1400"/>
+              <a:buFont typeface="Open Sans Light"/>
+              <a:buChar char="■"/>
+              <a:defRPr sz="1400" b="0" i="0" u="none" strike="noStrike" cap="none">
+                <a:solidFill>
+                  <a:schemeClr val="dk2"/>
+                </a:solidFill>
+                <a:latin typeface="Open Sans Light"/>
+                <a:ea typeface="Open Sans Light"/>
+                <a:cs typeface="Open Sans Light"/>
+                <a:sym typeface="Open Sans Light"/>
+              </a:defRPr>
+            </a:lvl6pPr>
+            <a:lvl7pPr marL="3200400" marR="0" lvl="6" indent="-317500" algn="l" rtl="0">
+              <a:lnSpc>
+                <a:spcPct val="115000"/>
+              </a:lnSpc>
+              <a:spcBef>
+                <a:spcPts val="1600"/>
+              </a:spcBef>
+              <a:spcAft>
+                <a:spcPts val="0"/>
+              </a:spcAft>
+              <a:buClr>
+                <a:schemeClr val="dk2"/>
+              </a:buClr>
+              <a:buSzPts val="1400"/>
+              <a:buFont typeface="Open Sans Light"/>
+              <a:buChar char="●"/>
+              <a:defRPr sz="1400" b="0" i="0" u="none" strike="noStrike" cap="none">
+                <a:solidFill>
+                  <a:schemeClr val="dk2"/>
+                </a:solidFill>
+                <a:latin typeface="Open Sans Light"/>
+                <a:ea typeface="Open Sans Light"/>
+                <a:cs typeface="Open Sans Light"/>
+                <a:sym typeface="Open Sans Light"/>
+              </a:defRPr>
+            </a:lvl7pPr>
+            <a:lvl8pPr marL="3657600" marR="0" lvl="7" indent="-317500" algn="l" rtl="0">
+              <a:lnSpc>
+                <a:spcPct val="115000"/>
+              </a:lnSpc>
+              <a:spcBef>
+                <a:spcPts val="1600"/>
+              </a:spcBef>
+              <a:spcAft>
+                <a:spcPts val="0"/>
+              </a:spcAft>
+              <a:buClr>
+                <a:schemeClr val="dk2"/>
+              </a:buClr>
+              <a:buSzPts val="1400"/>
+              <a:buFont typeface="Open Sans Light"/>
+              <a:buChar char="○"/>
+              <a:defRPr sz="1400" b="0" i="0" u="none" strike="noStrike" cap="none">
+                <a:solidFill>
+                  <a:schemeClr val="dk2"/>
+                </a:solidFill>
+                <a:latin typeface="Open Sans Light"/>
+                <a:ea typeface="Open Sans Light"/>
+                <a:cs typeface="Open Sans Light"/>
+                <a:sym typeface="Open Sans Light"/>
+              </a:defRPr>
+            </a:lvl8pPr>
+            <a:lvl9pPr marL="4114800" marR="0" lvl="8" indent="-317500" algn="l" rtl="0">
+              <a:lnSpc>
+                <a:spcPct val="115000"/>
+              </a:lnSpc>
+              <a:spcBef>
+                <a:spcPts val="1600"/>
+              </a:spcBef>
+              <a:spcAft>
+                <a:spcPts val="1600"/>
+              </a:spcAft>
+              <a:buClr>
+                <a:schemeClr val="dk2"/>
+              </a:buClr>
+              <a:buSzPts val="1400"/>
+              <a:buFont typeface="Open Sans Light"/>
+              <a:buChar char="■"/>
+              <a:defRPr sz="1400" b="0" i="0" u="none" strike="noStrike" cap="none">
+                <a:solidFill>
+                  <a:schemeClr val="dk2"/>
+                </a:solidFill>
+                <a:latin typeface="Open Sans Light"/>
+                <a:ea typeface="Open Sans Light"/>
+                <a:cs typeface="Open Sans Light"/>
+                <a:sym typeface="Open Sans Light"/>
+              </a:defRPr>
+            </a:lvl9pPr>
+          </a:lstStyle>
+          <a:p>
+            <a:pPr marL="0" indent="0">
+              <a:buNone/>
+            </a:pPr>
+            <a:r>
+              <a:rPr lang="en-US" sz="1900" b="1" dirty="0">
+                <a:solidFill>
+                  <a:srgbClr val="FF0000"/>
+                </a:solidFill>
+              </a:rPr>
+              <a:t>02_etl_load_data.sql</a:t>
+            </a:r>
+          </a:p>
+        </p:txBody>
+      </p:sp>
       <p:pic>
         <p:nvPicPr>
-          <p:cNvPr id="4" name="Picture 3">
+          <p:cNvPr id="8" name="Picture 7">
             <a:extLst>
               <a:ext uri="{FF2B5EF4-FFF2-40B4-BE49-F238E27FC236}">
-                <a16:creationId xmlns:a16="http://schemas.microsoft.com/office/drawing/2014/main" id="{CC73533D-2F9C-7644-C31A-DD9AB972C2D8}"/>
+                <a16:creationId xmlns:a16="http://schemas.microsoft.com/office/drawing/2014/main" id="{7506F691-7B00-3236-49B2-A466B351F89B}"/>
               </a:ext>
             </a:extLst>
           </p:cNvPr>
@@ -30871,337 +31356,14 @@
         </p:blipFill>
         <p:spPr>
           <a:xfrm>
-            <a:off x="376059" y="3521903"/>
-            <a:ext cx="3184900" cy="6322473"/>
+            <a:off x="264855" y="3496286"/>
+            <a:ext cx="7242600" cy="4829239"/>
           </a:xfrm>
           <a:prstGeom prst="rect">
             <a:avLst/>
           </a:prstGeom>
         </p:spPr>
       </p:pic>
-      <p:pic>
-        <p:nvPicPr>
-          <p:cNvPr id="10" name="Picture 9">
-            <a:extLst>
-              <a:ext uri="{FF2B5EF4-FFF2-40B4-BE49-F238E27FC236}">
-                <a16:creationId xmlns:a16="http://schemas.microsoft.com/office/drawing/2014/main" id="{691005A1-7CCE-407F-FBB7-4EED88154932}"/>
-              </a:ext>
-            </a:extLst>
-          </p:cNvPr>
-          <p:cNvPicPr>
-            <a:picLocks noChangeAspect="1"/>
-          </p:cNvPicPr>
-          <p:nvPr/>
-        </p:nvPicPr>
-        <p:blipFill>
-          <a:blip r:embed="rId4"/>
-          <a:stretch>
-            <a:fillRect/>
-          </a:stretch>
-        </p:blipFill>
-        <p:spPr>
-          <a:xfrm>
-            <a:off x="4211443" y="3521903"/>
-            <a:ext cx="3315163" cy="5563376"/>
-          </a:xfrm>
-          <a:prstGeom prst="rect">
-            <a:avLst/>
-          </a:prstGeom>
-        </p:spPr>
-      </p:pic>
-      <p:sp>
-        <p:nvSpPr>
-          <p:cNvPr id="11" name="Google Shape;282;p67">
-            <a:extLst>
-              <a:ext uri="{FF2B5EF4-FFF2-40B4-BE49-F238E27FC236}">
-                <a16:creationId xmlns:a16="http://schemas.microsoft.com/office/drawing/2014/main" id="{97E99462-E313-08C0-92C2-6581D6E45DD1}"/>
-              </a:ext>
-            </a:extLst>
-          </p:cNvPr>
-          <p:cNvSpPr txBox="1">
-            <a:spLocks/>
-          </p:cNvSpPr>
-          <p:nvPr/>
-        </p:nvSpPr>
-        <p:spPr>
-          <a:xfrm>
-            <a:off x="284006" y="2773336"/>
-            <a:ext cx="3002891" cy="590527"/>
-          </a:xfrm>
-          <a:prstGeom prst="rect">
-            <a:avLst/>
-          </a:prstGeom>
-          <a:noFill/>
-          <a:ln>
-            <a:noFill/>
-          </a:ln>
-        </p:spPr>
-        <p:txBody>
-          <a:bodyPr spcFirstLastPara="1" wrap="square" lIns="91425" tIns="91425" rIns="91425" bIns="91425" anchor="t" anchorCtr="0">
-            <a:noAutofit/>
-          </a:bodyPr>
-          <a:lstStyle>
-            <a:defPPr marR="0" lvl="0" algn="l" rtl="0">
-              <a:lnSpc>
-                <a:spcPct val="100000"/>
-              </a:lnSpc>
-              <a:spcBef>
-                <a:spcPts val="0"/>
-              </a:spcBef>
-              <a:spcAft>
-                <a:spcPts val="0"/>
-              </a:spcAft>
-            </a:defPPr>
-            <a:lvl1pPr marL="457200" marR="0" lvl="0" indent="-419100" algn="l" rtl="0">
-              <a:lnSpc>
-                <a:spcPct val="115000"/>
-              </a:lnSpc>
-              <a:spcBef>
-                <a:spcPts val="0"/>
-              </a:spcBef>
-              <a:spcAft>
-                <a:spcPts val="0"/>
-              </a:spcAft>
-              <a:buClr>
-                <a:schemeClr val="dk2"/>
-              </a:buClr>
-              <a:buSzPts val="3000"/>
-              <a:buFont typeface="Open Sans Light"/>
-              <a:buChar char="●"/>
-              <a:defRPr sz="3000" b="0" i="0" u="none" strike="noStrike" cap="none">
-                <a:solidFill>
-                  <a:schemeClr val="dk2"/>
-                </a:solidFill>
-                <a:latin typeface="Open Sans Light"/>
-                <a:ea typeface="Open Sans Light"/>
-                <a:cs typeface="Open Sans Light"/>
-                <a:sym typeface="Open Sans Light"/>
-              </a:defRPr>
-            </a:lvl1pPr>
-            <a:lvl2pPr marL="914400" marR="0" lvl="1" indent="-381000" algn="l" rtl="0">
-              <a:lnSpc>
-                <a:spcPct val="115000"/>
-              </a:lnSpc>
-              <a:spcBef>
-                <a:spcPts val="1600"/>
-              </a:spcBef>
-              <a:spcAft>
-                <a:spcPts val="0"/>
-              </a:spcAft>
-              <a:buClr>
-                <a:schemeClr val="dk2"/>
-              </a:buClr>
-              <a:buSzPts val="2400"/>
-              <a:buFont typeface="Open Sans Light"/>
-              <a:buChar char="○"/>
-              <a:defRPr sz="2400" b="0" i="0" u="none" strike="noStrike" cap="none">
-                <a:solidFill>
-                  <a:schemeClr val="dk2"/>
-                </a:solidFill>
-                <a:latin typeface="Open Sans Light"/>
-                <a:ea typeface="Open Sans Light"/>
-                <a:cs typeface="Open Sans Light"/>
-                <a:sym typeface="Open Sans Light"/>
-              </a:defRPr>
-            </a:lvl2pPr>
-            <a:lvl3pPr marL="1371600" marR="0" lvl="2" indent="-342900" algn="l" rtl="0">
-              <a:lnSpc>
-                <a:spcPct val="115000"/>
-              </a:lnSpc>
-              <a:spcBef>
-                <a:spcPts val="1600"/>
-              </a:spcBef>
-              <a:spcAft>
-                <a:spcPts val="0"/>
-              </a:spcAft>
-              <a:buClr>
-                <a:schemeClr val="dk2"/>
-              </a:buClr>
-              <a:buSzPts val="1800"/>
-              <a:buFont typeface="Open Sans Light"/>
-              <a:buChar char="■"/>
-              <a:defRPr sz="1800" b="0" i="0" u="none" strike="noStrike" cap="none">
-                <a:solidFill>
-                  <a:schemeClr val="dk2"/>
-                </a:solidFill>
-                <a:latin typeface="Open Sans Light"/>
-                <a:ea typeface="Open Sans Light"/>
-                <a:cs typeface="Open Sans Light"/>
-                <a:sym typeface="Open Sans Light"/>
-              </a:defRPr>
-            </a:lvl3pPr>
-            <a:lvl4pPr marL="1828800" marR="0" lvl="3" indent="-317500" algn="l" rtl="0">
-              <a:lnSpc>
-                <a:spcPct val="115000"/>
-              </a:lnSpc>
-              <a:spcBef>
-                <a:spcPts val="1600"/>
-              </a:spcBef>
-              <a:spcAft>
-                <a:spcPts val="0"/>
-              </a:spcAft>
-              <a:buClr>
-                <a:schemeClr val="dk2"/>
-              </a:buClr>
-              <a:buSzPts val="1400"/>
-              <a:buFont typeface="Open Sans Light"/>
-              <a:buChar char="●"/>
-              <a:defRPr sz="1400" b="0" i="0" u="none" strike="noStrike" cap="none">
-                <a:solidFill>
-                  <a:schemeClr val="dk2"/>
-                </a:solidFill>
-                <a:latin typeface="Open Sans Light"/>
-                <a:ea typeface="Open Sans Light"/>
-                <a:cs typeface="Open Sans Light"/>
-                <a:sym typeface="Open Sans Light"/>
-              </a:defRPr>
-            </a:lvl4pPr>
-            <a:lvl5pPr marL="2286000" marR="0" lvl="4" indent="-317500" algn="l" rtl="0">
-              <a:lnSpc>
-                <a:spcPct val="115000"/>
-              </a:lnSpc>
-              <a:spcBef>
-                <a:spcPts val="1600"/>
-              </a:spcBef>
-              <a:spcAft>
-                <a:spcPts val="0"/>
-              </a:spcAft>
-              <a:buClr>
-                <a:schemeClr val="dk2"/>
-              </a:buClr>
-              <a:buSzPts val="1400"/>
-              <a:buFont typeface="Open Sans Light"/>
-              <a:buChar char="○"/>
-              <a:defRPr sz="1400" b="0" i="0" u="none" strike="noStrike" cap="none">
-                <a:solidFill>
-                  <a:schemeClr val="dk2"/>
-                </a:solidFill>
-                <a:latin typeface="Open Sans Light"/>
-                <a:ea typeface="Open Sans Light"/>
-                <a:cs typeface="Open Sans Light"/>
-                <a:sym typeface="Open Sans Light"/>
-              </a:defRPr>
-            </a:lvl5pPr>
-            <a:lvl6pPr marL="2743200" marR="0" lvl="5" indent="-317500" algn="l" rtl="0">
-              <a:lnSpc>
-                <a:spcPct val="115000"/>
-              </a:lnSpc>
-              <a:spcBef>
-                <a:spcPts val="1600"/>
-              </a:spcBef>
-              <a:spcAft>
-                <a:spcPts val="0"/>
-              </a:spcAft>
-              <a:buClr>
-                <a:schemeClr val="dk2"/>
-              </a:buClr>
-              <a:buSzPts val="1400"/>
-              <a:buFont typeface="Open Sans Light"/>
-              <a:buChar char="■"/>
-              <a:defRPr sz="1400" b="0" i="0" u="none" strike="noStrike" cap="none">
-                <a:solidFill>
-                  <a:schemeClr val="dk2"/>
-                </a:solidFill>
-                <a:latin typeface="Open Sans Light"/>
-                <a:ea typeface="Open Sans Light"/>
-                <a:cs typeface="Open Sans Light"/>
-                <a:sym typeface="Open Sans Light"/>
-              </a:defRPr>
-            </a:lvl6pPr>
-            <a:lvl7pPr marL="3200400" marR="0" lvl="6" indent="-317500" algn="l" rtl="0">
-              <a:lnSpc>
-                <a:spcPct val="115000"/>
-              </a:lnSpc>
-              <a:spcBef>
-                <a:spcPts val="1600"/>
-              </a:spcBef>
-              <a:spcAft>
-                <a:spcPts val="0"/>
-              </a:spcAft>
-              <a:buClr>
-                <a:schemeClr val="dk2"/>
-              </a:buClr>
-              <a:buSzPts val="1400"/>
-              <a:buFont typeface="Open Sans Light"/>
-              <a:buChar char="●"/>
-              <a:defRPr sz="1400" b="0" i="0" u="none" strike="noStrike" cap="none">
-                <a:solidFill>
-                  <a:schemeClr val="dk2"/>
-                </a:solidFill>
-                <a:latin typeface="Open Sans Light"/>
-                <a:ea typeface="Open Sans Light"/>
-                <a:cs typeface="Open Sans Light"/>
-                <a:sym typeface="Open Sans Light"/>
-              </a:defRPr>
-            </a:lvl7pPr>
-            <a:lvl8pPr marL="3657600" marR="0" lvl="7" indent="-317500" algn="l" rtl="0">
-              <a:lnSpc>
-                <a:spcPct val="115000"/>
-              </a:lnSpc>
-              <a:spcBef>
-                <a:spcPts val="1600"/>
-              </a:spcBef>
-              <a:spcAft>
-                <a:spcPts val="0"/>
-              </a:spcAft>
-              <a:buClr>
-                <a:schemeClr val="dk2"/>
-              </a:buClr>
-              <a:buSzPts val="1400"/>
-              <a:buFont typeface="Open Sans Light"/>
-              <a:buChar char="○"/>
-              <a:defRPr sz="1400" b="0" i="0" u="none" strike="noStrike" cap="none">
-                <a:solidFill>
-                  <a:schemeClr val="dk2"/>
-                </a:solidFill>
-                <a:latin typeface="Open Sans Light"/>
-                <a:ea typeface="Open Sans Light"/>
-                <a:cs typeface="Open Sans Light"/>
-                <a:sym typeface="Open Sans Light"/>
-              </a:defRPr>
-            </a:lvl8pPr>
-            <a:lvl9pPr marL="4114800" marR="0" lvl="8" indent="-317500" algn="l" rtl="0">
-              <a:lnSpc>
-                <a:spcPct val="115000"/>
-              </a:lnSpc>
-              <a:spcBef>
-                <a:spcPts val="1600"/>
-              </a:spcBef>
-              <a:spcAft>
-                <a:spcPts val="1600"/>
-              </a:spcAft>
-              <a:buClr>
-                <a:schemeClr val="dk2"/>
-              </a:buClr>
-              <a:buSzPts val="1400"/>
-              <a:buFont typeface="Open Sans Light"/>
-              <a:buChar char="■"/>
-              <a:defRPr sz="1400" b="0" i="0" u="none" strike="noStrike" cap="none">
-                <a:solidFill>
-                  <a:schemeClr val="dk2"/>
-                </a:solidFill>
-                <a:latin typeface="Open Sans Light"/>
-                <a:ea typeface="Open Sans Light"/>
-                <a:cs typeface="Open Sans Light"/>
-                <a:sym typeface="Open Sans Light"/>
-              </a:defRPr>
-            </a:lvl9pPr>
-          </a:lstStyle>
-          <a:p>
-            <a:pPr marL="0" indent="0">
-              <a:buNone/>
-            </a:pPr>
-            <a:r>
-              <a:rPr lang="en-US" sz="1900" b="1" dirty="0">
-                <a:solidFill>
-                  <a:srgbClr val="FF0000"/>
-                </a:solidFill>
-              </a:rPr>
-              <a:t>01_create_tables.sql</a:t>
-            </a:r>
-          </a:p>
-        </p:txBody>
-      </p:sp>
     </p:spTree>
     <p:extLst>
       <p:ext uri="{BB962C8B-B14F-4D97-AF65-F5344CB8AC3E}">
@@ -31267,10 +31429,10 @@
               <a:buNone/>
             </a:pPr>
             <a:r>
-              <a:rPr lang="en"/>
+              <a:rPr lang="en" dirty="0"/>
               <a:t>CRUD</a:t>
             </a:r>
-            <a:endParaRPr/>
+            <a:endParaRPr dirty="0"/>
           </a:p>
         </p:txBody>
       </p:sp>
@@ -31286,8 +31448,8 @@
         </p:nvSpPr>
         <p:spPr>
           <a:xfrm>
-            <a:off x="264950" y="2156849"/>
-            <a:ext cx="7242600" cy="7731900"/>
+            <a:off x="264900" y="1751330"/>
+            <a:ext cx="7242600" cy="1119900"/>
           </a:xfrm>
           <a:prstGeom prst="rect">
             <a:avLst/>
@@ -31299,18 +31461,6 @@
           </a:bodyPr>
           <a:lstStyle/>
           <a:p>
-            <a:pPr marL="0" lvl="0" indent="0" algn="l" rtl="0">
-              <a:spcBef>
-                <a:spcPts val="0"/>
-              </a:spcBef>
-              <a:spcAft>
-                <a:spcPts val="0"/>
-              </a:spcAft>
-              <a:buNone/>
-            </a:pPr>
-            <a:endParaRPr sz="1900"/>
-          </a:p>
-          <a:p>
             <a:pPr marL="457200" lvl="0" indent="-349250" algn="l" rtl="0">
               <a:spcBef>
                 <a:spcPts val="1600"/>
@@ -31323,7 +31473,7 @@
               <a:buChar char="●"/>
             </a:pPr>
             <a:r>
-              <a:rPr lang="en" sz="1900" b="1">
+              <a:rPr lang="en" sz="1900" b="1" dirty="0">
                 <a:latin typeface="Open Sans"/>
                 <a:ea typeface="Open Sans"/>
                 <a:cs typeface="Open Sans"/>
@@ -31331,7 +31481,7 @@
               </a:rPr>
               <a:t>Question 1: Return a list of employees with Job Titles and Department Names</a:t>
             </a:r>
-            <a:endParaRPr sz="1900" b="1">
+            <a:endParaRPr sz="1900" b="1" dirty="0">
               <a:latin typeface="Open Sans"/>
               <a:ea typeface="Open Sans"/>
               <a:cs typeface="Open Sans"/>
@@ -31348,7 +31498,7 @@
               </a:spcAft>
               <a:buNone/>
             </a:pPr>
-            <a:endParaRPr sz="1900" b="1">
+            <a:endParaRPr sz="1900" b="1" dirty="0">
               <a:latin typeface="Open Sans"/>
               <a:ea typeface="Open Sans"/>
               <a:cs typeface="Open Sans"/>
@@ -31374,7 +31524,7 @@
               <a:buNone/>
             </a:pPr>
             <a:r>
-              <a:rPr lang="en" sz="1200">
+              <a:rPr lang="en" sz="1200" dirty="0">
                 <a:solidFill>
                   <a:srgbClr val="525C65"/>
                 </a:solidFill>
@@ -31388,22 +31538,7 @@
               </a:rPr>
               <a:t>     </a:t>
             </a:r>
-            <a:r>
-              <a:rPr lang="en" sz="1200">
-                <a:solidFill>
-                  <a:srgbClr val="FF0000"/>
-                </a:solidFill>
-                <a:highlight>
-                  <a:schemeClr val="lt1"/>
-                </a:highlight>
-                <a:latin typeface="Open Sans"/>
-                <a:ea typeface="Open Sans"/>
-                <a:cs typeface="Open Sans"/>
-                <a:sym typeface="Open Sans"/>
-              </a:rPr>
-              <a:t>** Replace example screenshot below with your response, and include the query in a SQL file</a:t>
-            </a:r>
-            <a:endParaRPr sz="1900" b="1">
+            <a:endParaRPr sz="1900" b="1" dirty="0">
               <a:latin typeface="Open Sans"/>
               <a:ea typeface="Open Sans"/>
               <a:cs typeface="Open Sans"/>
@@ -31413,14 +31548,14 @@
           <a:p>
             <a:pPr marL="0" lvl="0" indent="0" algn="l" rtl="0">
               <a:spcBef>
-                <a:spcPts val="0"/>
+                <a:spcPts val="1600"/>
               </a:spcBef>
               <a:spcAft>
                 <a:spcPts val="0"/>
               </a:spcAft>
               <a:buNone/>
             </a:pPr>
-            <a:endParaRPr sz="1900" b="1">
+            <a:endParaRPr sz="1900" b="1" dirty="0">
               <a:latin typeface="Open Sans"/>
               <a:ea typeface="Open Sans"/>
               <a:cs typeface="Open Sans"/>
@@ -31428,7 +31563,7 @@
             </a:endParaRPr>
           </a:p>
           <a:p>
-            <a:pPr marL="0" lvl="0" indent="0" algn="l" rtl="0">
+            <a:pPr marL="457200" lvl="0" indent="0" algn="l" rtl="0">
               <a:spcBef>
                 <a:spcPts val="1600"/>
               </a:spcBef>
@@ -31437,7 +31572,7 @@
               </a:spcAft>
               <a:buNone/>
             </a:pPr>
-            <a:endParaRPr sz="1900" b="1">
+            <a:endParaRPr sz="1900" b="1" dirty="0">
               <a:latin typeface="Open Sans"/>
               <a:ea typeface="Open Sans"/>
               <a:cs typeface="Open Sans"/>
@@ -31445,7 +31580,7 @@
             </a:endParaRPr>
           </a:p>
           <a:p>
-            <a:pPr marL="457200" lvl="0" indent="0" algn="l" rtl="0">
+            <a:pPr marL="0" lvl="0" indent="0" algn="l" rtl="0">
               <a:spcBef>
                 <a:spcPts val="1600"/>
               </a:spcBef>
@@ -31454,7 +31589,7 @@
               </a:spcAft>
               <a:buNone/>
             </a:pPr>
-            <a:endParaRPr sz="1900" b="1">
+            <a:endParaRPr sz="1900" b="1" dirty="0">
               <a:latin typeface="Open Sans"/>
               <a:ea typeface="Open Sans"/>
               <a:cs typeface="Open Sans"/>
@@ -31471,7 +31606,7 @@
               </a:spcAft>
               <a:buNone/>
             </a:pPr>
-            <a:endParaRPr sz="1900" b="1">
+            <a:endParaRPr sz="1900" b="1" dirty="0">
               <a:latin typeface="Open Sans"/>
               <a:ea typeface="Open Sans"/>
               <a:cs typeface="Open Sans"/>
@@ -31488,15 +31623,10 @@
               </a:spcAft>
               <a:buNone/>
             </a:pPr>
-            <a:endParaRPr sz="1900" b="1">
-              <a:latin typeface="Open Sans"/>
-              <a:ea typeface="Open Sans"/>
-              <a:cs typeface="Open Sans"/>
-              <a:sym typeface="Open Sans"/>
-            </a:endParaRPr>
-          </a:p>
-          <a:p>
-            <a:pPr marL="0" lvl="0" indent="0" algn="l" rtl="0">
+            <a:endParaRPr sz="1900" dirty="0"/>
+          </a:p>
+          <a:p>
+            <a:pPr marL="457200" lvl="0" indent="0" algn="l" rtl="0">
               <a:spcBef>
                 <a:spcPts val="1600"/>
               </a:spcBef>
@@ -31505,7 +31635,7 @@
               </a:spcAft>
               <a:buNone/>
             </a:pPr>
-            <a:endParaRPr sz="1900"/>
+            <a:endParaRPr sz="1900" dirty="0"/>
           </a:p>
           <a:p>
             <a:pPr marL="457200" lvl="0" indent="0" algn="l" rtl="0">
@@ -31517,7 +31647,7 @@
               </a:spcAft>
               <a:buNone/>
             </a:pPr>
-            <a:endParaRPr sz="1900"/>
+            <a:endParaRPr sz="1900" dirty="0"/>
           </a:p>
           <a:p>
             <a:pPr marL="457200" lvl="0" indent="0" algn="l" rtl="0">
@@ -31525,58 +31655,42 @@
                 <a:spcPts val="1600"/>
               </a:spcBef>
               <a:spcAft>
-                <a:spcPts val="0"/>
+                <a:spcPts val="1600"/>
               </a:spcAft>
               <a:buNone/>
             </a:pPr>
-            <a:endParaRPr sz="1900"/>
-          </a:p>
-          <a:p>
-            <a:pPr marL="457200" lvl="0" indent="0" algn="l" rtl="0">
-              <a:spcBef>
-                <a:spcPts val="1600"/>
-              </a:spcBef>
-              <a:spcAft>
-                <a:spcPts val="1600"/>
-              </a:spcAft>
-              <a:buNone/>
-            </a:pPr>
-            <a:endParaRPr sz="1900"/>
+            <a:endParaRPr sz="1900" dirty="0"/>
           </a:p>
         </p:txBody>
       </p:sp>
       <p:pic>
         <p:nvPicPr>
-          <p:cNvPr id="290" name="Google Shape;290;p68"/>
-          <p:cNvPicPr preferRelativeResize="0"/>
+          <p:cNvPr id="4" name="Picture 3">
+            <a:extLst>
+              <a:ext uri="{FF2B5EF4-FFF2-40B4-BE49-F238E27FC236}">
+                <a16:creationId xmlns:a16="http://schemas.microsoft.com/office/drawing/2014/main" id="{E7D7F0C1-09C7-B9D4-ADCE-9AB087EE1367}"/>
+              </a:ext>
+            </a:extLst>
+          </p:cNvPr>
+          <p:cNvPicPr>
+            <a:picLocks noChangeAspect="1"/>
+          </p:cNvPicPr>
           <p:nvPr/>
         </p:nvPicPr>
         <p:blipFill>
-          <a:blip r:embed="rId3">
-            <a:alphaModFix/>
-          </a:blip>
+          <a:blip r:embed="rId3"/>
           <a:stretch>
             <a:fillRect/>
           </a:stretch>
         </p:blipFill>
         <p:spPr>
           <a:xfrm>
-            <a:off x="1088175" y="4781750"/>
-            <a:ext cx="5036025" cy="3241700"/>
+            <a:off x="464820" y="2871230"/>
+            <a:ext cx="7042680" cy="5074742"/>
           </a:xfrm>
           <a:prstGeom prst="rect">
             <a:avLst/>
           </a:prstGeom>
-          <a:noFill/>
-          <a:ln w="9525" cap="flat" cmpd="sng">
-            <a:solidFill>
-              <a:schemeClr val="dk2"/>
-            </a:solidFill>
-            <a:prstDash val="solid"/>
-            <a:round/>
-            <a:headEnd type="none" w="sm" len="sm"/>
-            <a:tailEnd type="none" w="sm" len="sm"/>
-          </a:ln>
         </p:spPr>
       </p:pic>
     </p:spTree>
@@ -32277,7 +32391,7 @@
               </a:spcAft>
               <a:buNone/>
             </a:pPr>
-            <a:endParaRPr sz="1900"/>
+            <a:endParaRPr sz="1900" dirty="0"/>
           </a:p>
           <a:p>
             <a:pPr marL="457200" lvl="0" indent="-349250" algn="l" rtl="0">
@@ -32292,7 +32406,7 @@
               <a:buChar char="●"/>
             </a:pPr>
             <a:r>
-              <a:rPr lang="en" sz="1900" b="1">
+              <a:rPr lang="en" sz="1900" b="1" dirty="0">
                 <a:latin typeface="Open Sans"/>
                 <a:ea typeface="Open Sans"/>
                 <a:cs typeface="Open Sans"/>
@@ -32300,7 +32414,7 @@
               </a:rPr>
               <a:t>Question 2: Insert Web Programmer as a new job title</a:t>
             </a:r>
-            <a:endParaRPr sz="1900" b="1">
+            <a:endParaRPr sz="1900" b="1" dirty="0">
               <a:latin typeface="Open Sans"/>
               <a:ea typeface="Open Sans"/>
               <a:cs typeface="Open Sans"/>
@@ -32317,7 +32431,7 @@
               </a:spcAft>
               <a:buNone/>
             </a:pPr>
-            <a:endParaRPr sz="1900" b="1">
+            <a:endParaRPr sz="1900" b="1" dirty="0">
               <a:latin typeface="Open Sans"/>
               <a:ea typeface="Open Sans"/>
               <a:cs typeface="Open Sans"/>
@@ -32326,53 +32440,15 @@
           </a:p>
           <a:p>
             <a:pPr marL="0" lvl="0" indent="0" algn="l" rtl="0">
-              <a:lnSpc>
-                <a:spcPct val="170000"/>
-              </a:lnSpc>
-              <a:spcBef>
-                <a:spcPts val="1600"/>
-              </a:spcBef>
-              <a:spcAft>
-                <a:spcPts val="0"/>
-              </a:spcAft>
-              <a:buClr>
-                <a:schemeClr val="dk1"/>
-              </a:buClr>
-              <a:buSzPts val="1100"/>
-              <a:buFont typeface="Arial"/>
+              <a:spcBef>
+                <a:spcPts val="0"/>
+              </a:spcBef>
+              <a:spcAft>
+                <a:spcPts val="0"/>
+              </a:spcAft>
               <a:buNone/>
             </a:pPr>
-            <a:r>
-              <a:rPr lang="en" sz="1200">
-                <a:solidFill>
-                  <a:srgbClr val="525C65"/>
-                </a:solidFill>
-                <a:highlight>
-                  <a:schemeClr val="lt1"/>
-                </a:highlight>
-                <a:latin typeface="Open Sans"/>
-                <a:ea typeface="Open Sans"/>
-                <a:cs typeface="Open Sans"/>
-                <a:sym typeface="Open Sans"/>
-              </a:rPr>
-              <a:t>    </a:t>
-            </a:r>
-            <a:r>
-              <a:rPr lang="en" sz="1200">
-                <a:solidFill>
-                  <a:srgbClr val="FF0000"/>
-                </a:solidFill>
-                <a:highlight>
-                  <a:schemeClr val="lt1"/>
-                </a:highlight>
-                <a:latin typeface="Open Sans"/>
-                <a:ea typeface="Open Sans"/>
-                <a:cs typeface="Open Sans"/>
-                <a:sym typeface="Open Sans"/>
-              </a:rPr>
-              <a:t>** Replace example screenshot below with your response, and include the query in a SQL file</a:t>
-            </a:r>
-            <a:endParaRPr sz="1900" b="1">
+            <a:endParaRPr sz="1900" b="1" dirty="0">
               <a:latin typeface="Open Sans"/>
               <a:ea typeface="Open Sans"/>
               <a:cs typeface="Open Sans"/>
@@ -32382,14 +32458,14 @@
           <a:p>
             <a:pPr marL="0" lvl="0" indent="0" algn="l" rtl="0">
               <a:spcBef>
-                <a:spcPts val="0"/>
+                <a:spcPts val="1600"/>
               </a:spcBef>
               <a:spcAft>
                 <a:spcPts val="0"/>
               </a:spcAft>
               <a:buNone/>
             </a:pPr>
-            <a:endParaRPr sz="1900" b="1">
+            <a:endParaRPr sz="1900" b="1" dirty="0">
               <a:latin typeface="Open Sans"/>
               <a:ea typeface="Open Sans"/>
               <a:cs typeface="Open Sans"/>
@@ -32406,7 +32482,7 @@
               </a:spcAft>
               <a:buNone/>
             </a:pPr>
-            <a:endParaRPr sz="1900" b="1">
+            <a:endParaRPr sz="1900" b="1" dirty="0">
               <a:latin typeface="Open Sans"/>
               <a:ea typeface="Open Sans"/>
               <a:cs typeface="Open Sans"/>
@@ -32423,7 +32499,7 @@
               </a:spcAft>
               <a:buNone/>
             </a:pPr>
-            <a:endParaRPr sz="1900" b="1">
+            <a:endParaRPr sz="1900" b="1" dirty="0">
               <a:latin typeface="Open Sans"/>
               <a:ea typeface="Open Sans"/>
               <a:cs typeface="Open Sans"/>
@@ -32431,7 +32507,7 @@
             </a:endParaRPr>
           </a:p>
           <a:p>
-            <a:pPr marL="0" lvl="0" indent="0" algn="l" rtl="0">
+            <a:pPr marL="457200" lvl="0" indent="0" algn="l" rtl="0">
               <a:spcBef>
                 <a:spcPts val="1600"/>
               </a:spcBef>
@@ -32440,7 +32516,7 @@
               </a:spcAft>
               <a:buNone/>
             </a:pPr>
-            <a:endParaRPr sz="1900" b="1">
+            <a:endParaRPr sz="1900" b="1" dirty="0">
               <a:latin typeface="Open Sans"/>
               <a:ea typeface="Open Sans"/>
               <a:cs typeface="Open Sans"/>
@@ -32448,7 +32524,7 @@
             </a:endParaRPr>
           </a:p>
           <a:p>
-            <a:pPr marL="457200" lvl="0" indent="0" algn="l" rtl="0">
+            <a:pPr marL="0" lvl="0" indent="0" algn="l" rtl="0">
               <a:spcBef>
                 <a:spcPts val="1600"/>
               </a:spcBef>
@@ -32457,7 +32533,7 @@
               </a:spcAft>
               <a:buNone/>
             </a:pPr>
-            <a:endParaRPr sz="1900" b="1">
+            <a:endParaRPr sz="1900" b="1" dirty="0">
               <a:latin typeface="Open Sans"/>
               <a:ea typeface="Open Sans"/>
               <a:cs typeface="Open Sans"/>
@@ -32474,7 +32550,7 @@
               </a:spcAft>
               <a:buNone/>
             </a:pPr>
-            <a:endParaRPr sz="1900" b="1">
+            <a:endParaRPr sz="1900" b="1" dirty="0">
               <a:latin typeface="Open Sans"/>
               <a:ea typeface="Open Sans"/>
               <a:cs typeface="Open Sans"/>
@@ -32491,15 +32567,10 @@
               </a:spcAft>
               <a:buNone/>
             </a:pPr>
-            <a:endParaRPr sz="1900" b="1">
-              <a:latin typeface="Open Sans"/>
-              <a:ea typeface="Open Sans"/>
-              <a:cs typeface="Open Sans"/>
-              <a:sym typeface="Open Sans"/>
-            </a:endParaRPr>
-          </a:p>
-          <a:p>
-            <a:pPr marL="0" lvl="0" indent="0" algn="l" rtl="0">
+            <a:endParaRPr sz="1900" dirty="0"/>
+          </a:p>
+          <a:p>
+            <a:pPr marL="457200" lvl="0" indent="0" algn="l" rtl="0">
               <a:spcBef>
                 <a:spcPts val="1600"/>
               </a:spcBef>
@@ -32508,7 +32579,7 @@
               </a:spcAft>
               <a:buNone/>
             </a:pPr>
-            <a:endParaRPr sz="1900"/>
+            <a:endParaRPr sz="1900" dirty="0"/>
           </a:p>
           <a:p>
             <a:pPr marL="457200" lvl="0" indent="0" algn="l" rtl="0">
@@ -32520,7 +32591,7 @@
               </a:spcAft>
               <a:buNone/>
             </a:pPr>
-            <a:endParaRPr sz="1900"/>
+            <a:endParaRPr sz="1900" dirty="0"/>
           </a:p>
           <a:p>
             <a:pPr marL="457200" lvl="0" indent="0" algn="l" rtl="0">
@@ -32528,58 +32599,42 @@
                 <a:spcPts val="1600"/>
               </a:spcBef>
               <a:spcAft>
-                <a:spcPts val="0"/>
+                <a:spcPts val="1600"/>
               </a:spcAft>
               <a:buNone/>
             </a:pPr>
-            <a:endParaRPr sz="1900"/>
-          </a:p>
-          <a:p>
-            <a:pPr marL="457200" lvl="0" indent="0" algn="l" rtl="0">
-              <a:spcBef>
-                <a:spcPts val="1600"/>
-              </a:spcBef>
-              <a:spcAft>
-                <a:spcPts val="1600"/>
-              </a:spcAft>
-              <a:buNone/>
-            </a:pPr>
-            <a:endParaRPr sz="1900"/>
+            <a:endParaRPr sz="1900" dirty="0"/>
           </a:p>
         </p:txBody>
       </p:sp>
       <p:pic>
         <p:nvPicPr>
-          <p:cNvPr id="297" name="Google Shape;297;p69"/>
-          <p:cNvPicPr preferRelativeResize="0"/>
+          <p:cNvPr id="3" name="Picture 2">
+            <a:extLst>
+              <a:ext uri="{FF2B5EF4-FFF2-40B4-BE49-F238E27FC236}">
+                <a16:creationId xmlns:a16="http://schemas.microsoft.com/office/drawing/2014/main" id="{9C254158-8C0A-2798-C371-0E517A405794}"/>
+              </a:ext>
+            </a:extLst>
+          </p:cNvPr>
+          <p:cNvPicPr>
+            <a:picLocks noChangeAspect="1"/>
+          </p:cNvPicPr>
           <p:nvPr/>
         </p:nvPicPr>
         <p:blipFill>
-          <a:blip r:embed="rId3">
-            <a:alphaModFix/>
-          </a:blip>
+          <a:blip r:embed="rId3"/>
           <a:stretch>
             <a:fillRect/>
           </a:stretch>
         </p:blipFill>
         <p:spPr>
           <a:xfrm>
-            <a:off x="1088175" y="4781750"/>
-            <a:ext cx="5036025" cy="3241700"/>
+            <a:off x="547221" y="3884393"/>
+            <a:ext cx="6677957" cy="3772426"/>
           </a:xfrm>
           <a:prstGeom prst="rect">
             <a:avLst/>
           </a:prstGeom>
-          <a:noFill/>
-          <a:ln w="9525" cap="flat" cmpd="sng">
-            <a:solidFill>
-              <a:schemeClr val="dk2"/>
-            </a:solidFill>
-            <a:prstDash val="solid"/>
-            <a:round/>
-            <a:headEnd type="none" w="sm" len="sm"/>
-            <a:tailEnd type="none" w="sm" len="sm"/>
-          </a:ln>
         </p:spPr>
       </p:pic>
     </p:spTree>
@@ -32661,8 +32716,8 @@
         </p:nvSpPr>
         <p:spPr>
           <a:xfrm>
-            <a:off x="264950" y="2118049"/>
-            <a:ext cx="7242600" cy="7731900"/>
+            <a:off x="264945" y="1990171"/>
+            <a:ext cx="7242600" cy="1119900"/>
           </a:xfrm>
           <a:prstGeom prst="rect">
             <a:avLst/>
@@ -32674,18 +32729,6 @@
           </a:bodyPr>
           <a:lstStyle/>
           <a:p>
-            <a:pPr marL="0" lvl="0" indent="0" algn="l" rtl="0">
-              <a:spcBef>
-                <a:spcPts val="0"/>
-              </a:spcBef>
-              <a:spcAft>
-                <a:spcPts val="0"/>
-              </a:spcAft>
-              <a:buNone/>
-            </a:pPr>
-            <a:endParaRPr sz="1900"/>
-          </a:p>
-          <a:p>
             <a:pPr marL="457200" lvl="0" indent="-349250" algn="l" rtl="0">
               <a:spcBef>
                 <a:spcPts val="1600"/>
@@ -32698,7 +32741,7 @@
               <a:buChar char="●"/>
             </a:pPr>
             <a:r>
-              <a:rPr lang="en" sz="1900" b="1">
+              <a:rPr lang="en" sz="1900" b="1" dirty="0">
                 <a:latin typeface="Open Sans"/>
                 <a:ea typeface="Open Sans"/>
                 <a:cs typeface="Open Sans"/>
@@ -32706,7 +32749,7 @@
               </a:rPr>
               <a:t>Question 3: Correct the job title from web programmer to web developer</a:t>
             </a:r>
-            <a:endParaRPr sz="1900" b="1">
+            <a:endParaRPr sz="1900" b="1" dirty="0">
               <a:latin typeface="Open Sans"/>
               <a:ea typeface="Open Sans"/>
               <a:cs typeface="Open Sans"/>
@@ -32727,7 +32770,7 @@
               <a:buNone/>
             </a:pPr>
             <a:r>
-              <a:rPr lang="en" sz="1200">
+              <a:rPr lang="en" sz="1200" dirty="0">
                 <a:solidFill>
                   <a:srgbClr val="525C65"/>
                 </a:solidFill>
@@ -32741,7 +32784,7 @@
               </a:rPr>
               <a:t>     </a:t>
             </a:r>
-            <a:endParaRPr sz="1200">
+            <a:endParaRPr sz="1200" dirty="0">
               <a:solidFill>
                 <a:srgbClr val="525C65"/>
               </a:solidFill>
@@ -32756,9 +32799,6 @@
           </a:p>
           <a:p>
             <a:pPr marL="0" lvl="0" indent="0" algn="l" rtl="0">
-              <a:lnSpc>
-                <a:spcPct val="170000"/>
-              </a:lnSpc>
               <a:spcBef>
                 <a:spcPts val="0"/>
               </a:spcBef>
@@ -32767,37 +32807,7 @@
               </a:spcAft>
               <a:buNone/>
             </a:pPr>
-            <a:r>
-              <a:rPr lang="en" sz="1200">
-                <a:solidFill>
-                  <a:srgbClr val="525C65"/>
-                </a:solidFill>
-                <a:highlight>
-                  <a:schemeClr val="lt1"/>
-                </a:highlight>
-                <a:latin typeface="Open Sans"/>
-                <a:ea typeface="Open Sans"/>
-                <a:cs typeface="Open Sans"/>
-                <a:sym typeface="Open Sans"/>
-              </a:rPr>
-              <a:t>  </a:t>
-            </a:r>
-            <a:r>
-              <a:rPr lang="en" sz="1200">
-                <a:solidFill>
-                  <a:srgbClr val="FF0000"/>
-                </a:solidFill>
-                <a:highlight>
-                  <a:schemeClr val="lt1"/>
-                </a:highlight>
-                <a:latin typeface="Open Sans"/>
-                <a:ea typeface="Open Sans"/>
-                <a:cs typeface="Open Sans"/>
-                <a:sym typeface="Open Sans"/>
-              </a:rPr>
-              <a:t>** Replace example screenshot below with your response, and include the query in a SQL file</a:t>
-            </a:r>
-            <a:endParaRPr sz="1900" b="1">
+            <a:endParaRPr sz="1900" b="1" dirty="0">
               <a:latin typeface="Open Sans"/>
               <a:ea typeface="Open Sans"/>
               <a:cs typeface="Open Sans"/>
@@ -32807,14 +32817,14 @@
           <a:p>
             <a:pPr marL="0" lvl="0" indent="0" algn="l" rtl="0">
               <a:spcBef>
-                <a:spcPts val="0"/>
+                <a:spcPts val="1600"/>
               </a:spcBef>
               <a:spcAft>
                 <a:spcPts val="0"/>
               </a:spcAft>
               <a:buNone/>
             </a:pPr>
-            <a:endParaRPr sz="1900" b="1">
+            <a:endParaRPr sz="1900" b="1" dirty="0">
               <a:latin typeface="Open Sans"/>
               <a:ea typeface="Open Sans"/>
               <a:cs typeface="Open Sans"/>
@@ -32831,7 +32841,7 @@
               </a:spcAft>
               <a:buNone/>
             </a:pPr>
-            <a:endParaRPr sz="1900" b="1">
+            <a:endParaRPr sz="1900" b="1" dirty="0">
               <a:latin typeface="Open Sans"/>
               <a:ea typeface="Open Sans"/>
               <a:cs typeface="Open Sans"/>
@@ -32848,7 +32858,7 @@
               </a:spcAft>
               <a:buNone/>
             </a:pPr>
-            <a:endParaRPr sz="1900" b="1">
+            <a:endParaRPr sz="1900" b="1" dirty="0">
               <a:latin typeface="Open Sans"/>
               <a:ea typeface="Open Sans"/>
               <a:cs typeface="Open Sans"/>
@@ -32856,7 +32866,7 @@
             </a:endParaRPr>
           </a:p>
           <a:p>
-            <a:pPr marL="0" lvl="0" indent="0" algn="l" rtl="0">
+            <a:pPr marL="457200" lvl="0" indent="0" algn="l" rtl="0">
               <a:spcBef>
                 <a:spcPts val="1600"/>
               </a:spcBef>
@@ -32865,7 +32875,7 @@
               </a:spcAft>
               <a:buNone/>
             </a:pPr>
-            <a:endParaRPr sz="1900" b="1">
+            <a:endParaRPr sz="1900" b="1" dirty="0">
               <a:latin typeface="Open Sans"/>
               <a:ea typeface="Open Sans"/>
               <a:cs typeface="Open Sans"/>
@@ -32873,7 +32883,7 @@
             </a:endParaRPr>
           </a:p>
           <a:p>
-            <a:pPr marL="457200" lvl="0" indent="0" algn="l" rtl="0">
+            <a:pPr marL="0" lvl="0" indent="0" algn="l" rtl="0">
               <a:spcBef>
                 <a:spcPts val="1600"/>
               </a:spcBef>
@@ -32882,7 +32892,7 @@
               </a:spcAft>
               <a:buNone/>
             </a:pPr>
-            <a:endParaRPr sz="1900" b="1">
+            <a:endParaRPr sz="1900" b="1" dirty="0">
               <a:latin typeface="Open Sans"/>
               <a:ea typeface="Open Sans"/>
               <a:cs typeface="Open Sans"/>
@@ -32899,7 +32909,7 @@
               </a:spcAft>
               <a:buNone/>
             </a:pPr>
-            <a:endParaRPr sz="1900" b="1">
+            <a:endParaRPr sz="1900" b="1" dirty="0">
               <a:latin typeface="Open Sans"/>
               <a:ea typeface="Open Sans"/>
               <a:cs typeface="Open Sans"/>
@@ -32916,15 +32926,10 @@
               </a:spcAft>
               <a:buNone/>
             </a:pPr>
-            <a:endParaRPr sz="1900" b="1">
-              <a:latin typeface="Open Sans"/>
-              <a:ea typeface="Open Sans"/>
-              <a:cs typeface="Open Sans"/>
-              <a:sym typeface="Open Sans"/>
-            </a:endParaRPr>
-          </a:p>
-          <a:p>
-            <a:pPr marL="0" lvl="0" indent="0" algn="l" rtl="0">
+            <a:endParaRPr sz="1900" dirty="0"/>
+          </a:p>
+          <a:p>
+            <a:pPr marL="457200" lvl="0" indent="0" algn="l" rtl="0">
               <a:spcBef>
                 <a:spcPts val="1600"/>
               </a:spcBef>
@@ -32933,7 +32938,7 @@
               </a:spcAft>
               <a:buNone/>
             </a:pPr>
-            <a:endParaRPr sz="1900"/>
+            <a:endParaRPr sz="1900" dirty="0"/>
           </a:p>
           <a:p>
             <a:pPr marL="457200" lvl="0" indent="0" algn="l" rtl="0">
@@ -32945,7 +32950,7 @@
               </a:spcAft>
               <a:buNone/>
             </a:pPr>
-            <a:endParaRPr sz="1900"/>
+            <a:endParaRPr sz="1900" dirty="0"/>
           </a:p>
           <a:p>
             <a:pPr marL="457200" lvl="0" indent="0" algn="l" rtl="0">
@@ -32953,58 +32958,42 @@
                 <a:spcPts val="1600"/>
               </a:spcBef>
               <a:spcAft>
-                <a:spcPts val="0"/>
+                <a:spcPts val="1600"/>
               </a:spcAft>
               <a:buNone/>
             </a:pPr>
-            <a:endParaRPr sz="1900"/>
-          </a:p>
-          <a:p>
-            <a:pPr marL="457200" lvl="0" indent="0" algn="l" rtl="0">
-              <a:spcBef>
-                <a:spcPts val="1600"/>
-              </a:spcBef>
-              <a:spcAft>
-                <a:spcPts val="1600"/>
-              </a:spcAft>
-              <a:buNone/>
-            </a:pPr>
-            <a:endParaRPr sz="1900"/>
+            <a:endParaRPr sz="1900" dirty="0"/>
           </a:p>
         </p:txBody>
       </p:sp>
       <p:pic>
         <p:nvPicPr>
-          <p:cNvPr id="304" name="Google Shape;304;p70"/>
-          <p:cNvPicPr preferRelativeResize="0"/>
+          <p:cNvPr id="3" name="Picture 2">
+            <a:extLst>
+              <a:ext uri="{FF2B5EF4-FFF2-40B4-BE49-F238E27FC236}">
+                <a16:creationId xmlns:a16="http://schemas.microsoft.com/office/drawing/2014/main" id="{26EEDA14-9EDB-090D-C1DB-8484BDC7DB29}"/>
+              </a:ext>
+            </a:extLst>
+          </p:cNvPr>
+          <p:cNvPicPr>
+            <a:picLocks noChangeAspect="1"/>
+          </p:cNvPicPr>
           <p:nvPr/>
         </p:nvPicPr>
         <p:blipFill>
-          <a:blip r:embed="rId3">
-            <a:alphaModFix/>
-          </a:blip>
+          <a:blip r:embed="rId3"/>
           <a:stretch>
             <a:fillRect/>
           </a:stretch>
         </p:blipFill>
         <p:spPr>
           <a:xfrm>
-            <a:off x="1088175" y="4781750"/>
-            <a:ext cx="5036025" cy="3241700"/>
+            <a:off x="575800" y="3265391"/>
+            <a:ext cx="6620799" cy="5677692"/>
           </a:xfrm>
           <a:prstGeom prst="rect">
             <a:avLst/>
           </a:prstGeom>
-          <a:noFill/>
-          <a:ln w="9525" cap="flat" cmpd="sng">
-            <a:solidFill>
-              <a:schemeClr val="dk2"/>
-            </a:solidFill>
-            <a:prstDash val="solid"/>
-            <a:round/>
-            <a:headEnd type="none" w="sm" len="sm"/>
-            <a:tailEnd type="none" w="sm" len="sm"/>
-          </a:ln>
         </p:spPr>
       </p:pic>
     </p:spTree>
@@ -33086,8 +33075,8 @@
         </p:nvSpPr>
         <p:spPr>
           <a:xfrm>
-            <a:off x="264950" y="2118049"/>
-            <a:ext cx="7242600" cy="7731900"/>
+            <a:off x="264945" y="1722633"/>
+            <a:ext cx="7242600" cy="1119900"/>
           </a:xfrm>
           <a:prstGeom prst="rect">
             <a:avLst/>
@@ -33099,18 +33088,6 @@
           </a:bodyPr>
           <a:lstStyle/>
           <a:p>
-            <a:pPr marL="0" lvl="0" indent="0" algn="l" rtl="0">
-              <a:spcBef>
-                <a:spcPts val="0"/>
-              </a:spcBef>
-              <a:spcAft>
-                <a:spcPts val="0"/>
-              </a:spcAft>
-              <a:buNone/>
-            </a:pPr>
-            <a:endParaRPr sz="1900"/>
-          </a:p>
-          <a:p>
             <a:pPr marL="457200" lvl="0" indent="-349250" algn="l" rtl="0">
               <a:spcBef>
                 <a:spcPts val="1600"/>
@@ -33123,7 +33100,7 @@
               <a:buChar char="●"/>
             </a:pPr>
             <a:r>
-              <a:rPr lang="en" sz="1900" b="1">
+              <a:rPr lang="en" sz="1900" b="1" dirty="0">
                 <a:latin typeface="Open Sans"/>
                 <a:ea typeface="Open Sans"/>
                 <a:cs typeface="Open Sans"/>
@@ -33131,28 +33108,8 @@
               </a:rPr>
               <a:t>Question 4: Delete the job title Web Developer from the database</a:t>
             </a:r>
-            <a:endParaRPr sz="1900" b="1">
-              <a:latin typeface="Open Sans"/>
-              <a:ea typeface="Open Sans"/>
-              <a:cs typeface="Open Sans"/>
-              <a:sym typeface="Open Sans"/>
-            </a:endParaRPr>
-          </a:p>
-          <a:p>
-            <a:pPr marL="0" lvl="0" indent="0" algn="l" rtl="0">
-              <a:lnSpc>
-                <a:spcPct val="170000"/>
-              </a:lnSpc>
-              <a:spcBef>
-                <a:spcPts val="1600"/>
-              </a:spcBef>
-              <a:spcAft>
-                <a:spcPts val="0"/>
-              </a:spcAft>
-              <a:buNone/>
-            </a:pPr>
             <a:r>
-              <a:rPr lang="en" sz="1200">
+              <a:rPr lang="en" sz="1200" dirty="0">
                 <a:solidFill>
                   <a:srgbClr val="525C65"/>
                 </a:solidFill>
@@ -33166,7 +33123,7 @@
               </a:rPr>
               <a:t>         </a:t>
             </a:r>
-            <a:endParaRPr sz="1200">
+            <a:endParaRPr sz="1200" dirty="0">
               <a:solidFill>
                 <a:srgbClr val="525C65"/>
               </a:solidFill>
@@ -33193,7 +33150,7 @@
               <a:buNone/>
             </a:pPr>
             <a:r>
-              <a:rPr lang="en" sz="1200">
+              <a:rPr lang="en" sz="1200" dirty="0">
                 <a:solidFill>
                   <a:srgbClr val="525C65"/>
                 </a:solidFill>
@@ -33207,22 +33164,7 @@
               </a:rPr>
               <a:t> </a:t>
             </a:r>
-            <a:r>
-              <a:rPr lang="en" sz="1200">
-                <a:solidFill>
-                  <a:srgbClr val="FF0000"/>
-                </a:solidFill>
-                <a:highlight>
-                  <a:schemeClr val="lt1"/>
-                </a:highlight>
-                <a:latin typeface="Open Sans"/>
-                <a:ea typeface="Open Sans"/>
-                <a:cs typeface="Open Sans"/>
-                <a:sym typeface="Open Sans"/>
-              </a:rPr>
-              <a:t>** Replace example screenshot below with your response, and include the query in a SQL file</a:t>
-            </a:r>
-            <a:endParaRPr sz="1900" b="1">
+            <a:endParaRPr sz="1900" b="1" dirty="0">
               <a:latin typeface="Open Sans"/>
               <a:ea typeface="Open Sans"/>
               <a:cs typeface="Open Sans"/>
@@ -33232,14 +33174,14 @@
           <a:p>
             <a:pPr marL="0" lvl="0" indent="0" algn="l" rtl="0">
               <a:spcBef>
-                <a:spcPts val="0"/>
+                <a:spcPts val="1600"/>
               </a:spcBef>
               <a:spcAft>
                 <a:spcPts val="0"/>
               </a:spcAft>
               <a:buNone/>
             </a:pPr>
-            <a:endParaRPr sz="1900" b="1">
+            <a:endParaRPr sz="1900" b="1" dirty="0">
               <a:latin typeface="Open Sans"/>
               <a:ea typeface="Open Sans"/>
               <a:cs typeface="Open Sans"/>
@@ -33256,7 +33198,7 @@
               </a:spcAft>
               <a:buNone/>
             </a:pPr>
-            <a:endParaRPr sz="1900" b="1">
+            <a:endParaRPr sz="1900" b="1" dirty="0">
               <a:latin typeface="Open Sans"/>
               <a:ea typeface="Open Sans"/>
               <a:cs typeface="Open Sans"/>
@@ -33273,7 +33215,7 @@
               </a:spcAft>
               <a:buNone/>
             </a:pPr>
-            <a:endParaRPr sz="1900" b="1">
+            <a:endParaRPr sz="1900" b="1" dirty="0">
               <a:latin typeface="Open Sans"/>
               <a:ea typeface="Open Sans"/>
               <a:cs typeface="Open Sans"/>
@@ -33281,7 +33223,7 @@
             </a:endParaRPr>
           </a:p>
           <a:p>
-            <a:pPr marL="0" lvl="0" indent="0" algn="l" rtl="0">
+            <a:pPr marL="457200" lvl="0" indent="0" algn="l" rtl="0">
               <a:spcBef>
                 <a:spcPts val="1600"/>
               </a:spcBef>
@@ -33290,7 +33232,7 @@
               </a:spcAft>
               <a:buNone/>
             </a:pPr>
-            <a:endParaRPr sz="1900" b="1">
+            <a:endParaRPr sz="1900" b="1" dirty="0">
               <a:latin typeface="Open Sans"/>
               <a:ea typeface="Open Sans"/>
               <a:cs typeface="Open Sans"/>
@@ -33298,7 +33240,7 @@
             </a:endParaRPr>
           </a:p>
           <a:p>
-            <a:pPr marL="457200" lvl="0" indent="0" algn="l" rtl="0">
+            <a:pPr marL="0" lvl="0" indent="0" algn="l" rtl="0">
               <a:spcBef>
                 <a:spcPts val="1600"/>
               </a:spcBef>
@@ -33307,7 +33249,7 @@
               </a:spcAft>
               <a:buNone/>
             </a:pPr>
-            <a:endParaRPr sz="1900" b="1">
+            <a:endParaRPr sz="1900" b="1" dirty="0">
               <a:latin typeface="Open Sans"/>
               <a:ea typeface="Open Sans"/>
               <a:cs typeface="Open Sans"/>
@@ -33324,7 +33266,7 @@
               </a:spcAft>
               <a:buNone/>
             </a:pPr>
-            <a:endParaRPr sz="1900" b="1">
+            <a:endParaRPr sz="1900" b="1" dirty="0">
               <a:latin typeface="Open Sans"/>
               <a:ea typeface="Open Sans"/>
               <a:cs typeface="Open Sans"/>
@@ -33341,15 +33283,10 @@
               </a:spcAft>
               <a:buNone/>
             </a:pPr>
-            <a:endParaRPr sz="1900" b="1">
-              <a:latin typeface="Open Sans"/>
-              <a:ea typeface="Open Sans"/>
-              <a:cs typeface="Open Sans"/>
-              <a:sym typeface="Open Sans"/>
-            </a:endParaRPr>
-          </a:p>
-          <a:p>
-            <a:pPr marL="0" lvl="0" indent="0" algn="l" rtl="0">
+            <a:endParaRPr sz="1900" dirty="0"/>
+          </a:p>
+          <a:p>
+            <a:pPr marL="457200" lvl="0" indent="0" algn="l" rtl="0">
               <a:spcBef>
                 <a:spcPts val="1600"/>
               </a:spcBef>
@@ -33358,7 +33295,7 @@
               </a:spcAft>
               <a:buNone/>
             </a:pPr>
-            <a:endParaRPr sz="1900"/>
+            <a:endParaRPr sz="1900" dirty="0"/>
           </a:p>
           <a:p>
             <a:pPr marL="457200" lvl="0" indent="0" algn="l" rtl="0">
@@ -33370,7 +33307,7 @@
               </a:spcAft>
               <a:buNone/>
             </a:pPr>
-            <a:endParaRPr sz="1900"/>
+            <a:endParaRPr sz="1900" dirty="0"/>
           </a:p>
           <a:p>
             <a:pPr marL="457200" lvl="0" indent="0" algn="l" rtl="0">
@@ -33378,58 +33315,42 @@
                 <a:spcPts val="1600"/>
               </a:spcBef>
               <a:spcAft>
-                <a:spcPts val="0"/>
+                <a:spcPts val="1600"/>
               </a:spcAft>
               <a:buNone/>
             </a:pPr>
-            <a:endParaRPr sz="1900"/>
-          </a:p>
-          <a:p>
-            <a:pPr marL="457200" lvl="0" indent="0" algn="l" rtl="0">
-              <a:spcBef>
-                <a:spcPts val="1600"/>
-              </a:spcBef>
-              <a:spcAft>
-                <a:spcPts val="1600"/>
-              </a:spcAft>
-              <a:buNone/>
-            </a:pPr>
-            <a:endParaRPr sz="1900"/>
+            <a:endParaRPr sz="1900" dirty="0"/>
           </a:p>
         </p:txBody>
       </p:sp>
       <p:pic>
         <p:nvPicPr>
-          <p:cNvPr id="311" name="Google Shape;311;p71"/>
-          <p:cNvPicPr preferRelativeResize="0"/>
+          <p:cNvPr id="3" name="Picture 2">
+            <a:extLst>
+              <a:ext uri="{FF2B5EF4-FFF2-40B4-BE49-F238E27FC236}">
+                <a16:creationId xmlns:a16="http://schemas.microsoft.com/office/drawing/2014/main" id="{BADAC383-CE7A-5023-827F-1EEAFC70C372}"/>
+              </a:ext>
+            </a:extLst>
+          </p:cNvPr>
+          <p:cNvPicPr>
+            <a:picLocks noChangeAspect="1"/>
+          </p:cNvPicPr>
           <p:nvPr/>
         </p:nvPicPr>
         <p:blipFill>
-          <a:blip r:embed="rId3">
-            <a:alphaModFix/>
-          </a:blip>
+          <a:blip r:embed="rId3"/>
           <a:stretch>
             <a:fillRect/>
           </a:stretch>
         </p:blipFill>
         <p:spPr>
           <a:xfrm>
-            <a:off x="1088175" y="4781750"/>
-            <a:ext cx="5036025" cy="3241700"/>
+            <a:off x="590090" y="2751705"/>
+            <a:ext cx="6592220" cy="6973063"/>
           </a:xfrm>
           <a:prstGeom prst="rect">
             <a:avLst/>
           </a:prstGeom>
-          <a:noFill/>
-          <a:ln w="9525" cap="flat" cmpd="sng">
-            <a:solidFill>
-              <a:schemeClr val="dk2"/>
-            </a:solidFill>
-            <a:prstDash val="solid"/>
-            <a:round/>
-            <a:headEnd type="none" w="sm" len="sm"/>
-            <a:tailEnd type="none" w="sm" len="sm"/>
-          </a:ln>
         </p:spPr>
       </p:pic>
     </p:spTree>
@@ -33511,8 +33432,8 @@
         </p:nvSpPr>
         <p:spPr>
           <a:xfrm>
-            <a:off x="264950" y="2118049"/>
-            <a:ext cx="7242600" cy="7731900"/>
+            <a:off x="264855" y="1772060"/>
+            <a:ext cx="7242600" cy="1119900"/>
           </a:xfrm>
           <a:prstGeom prst="rect">
             <a:avLst/>
@@ -33524,18 +33445,6 @@
           </a:bodyPr>
           <a:lstStyle/>
           <a:p>
-            <a:pPr marL="0" lvl="0" indent="0" algn="l" rtl="0">
-              <a:spcBef>
-                <a:spcPts val="0"/>
-              </a:spcBef>
-              <a:spcAft>
-                <a:spcPts val="0"/>
-              </a:spcAft>
-              <a:buNone/>
-            </a:pPr>
-            <a:endParaRPr sz="1900"/>
-          </a:p>
-          <a:p>
             <a:pPr marL="457200" lvl="0" indent="-349250" algn="l" rtl="0">
               <a:spcBef>
                 <a:spcPts val="1600"/>
@@ -33548,7 +33457,7 @@
               <a:buChar char="●"/>
             </a:pPr>
             <a:r>
-              <a:rPr lang="en" sz="1900" b="1">
+              <a:rPr lang="en" sz="1900" b="1" dirty="0">
                 <a:latin typeface="Open Sans"/>
                 <a:ea typeface="Open Sans"/>
                 <a:cs typeface="Open Sans"/>
@@ -33556,7 +33465,7 @@
               </a:rPr>
               <a:t>Question 5: How many employees are in each department?</a:t>
             </a:r>
-            <a:endParaRPr sz="1900" b="1">
+            <a:endParaRPr sz="1900" b="1" dirty="0">
               <a:latin typeface="Open Sans"/>
               <a:ea typeface="Open Sans"/>
               <a:cs typeface="Open Sans"/>
@@ -33564,7 +33473,7 @@
             </a:endParaRPr>
           </a:p>
           <a:p>
-            <a:pPr marL="457200" lvl="0" indent="0" algn="l" rtl="0">
+            <a:pPr marL="0" lvl="0" indent="0" algn="l" rtl="0">
               <a:spcBef>
                 <a:spcPts val="1600"/>
               </a:spcBef>
@@ -33573,7 +33482,7 @@
               </a:spcAft>
               <a:buNone/>
             </a:pPr>
-            <a:endParaRPr sz="1900" b="1">
+            <a:endParaRPr lang="en-US" sz="1900" b="1" dirty="0">
               <a:latin typeface="Open Sans"/>
               <a:ea typeface="Open Sans"/>
               <a:cs typeface="Open Sans"/>
@@ -33582,9 +33491,6 @@
           </a:p>
           <a:p>
             <a:pPr marL="0" lvl="0" indent="0" algn="l" rtl="0">
-              <a:lnSpc>
-                <a:spcPct val="170000"/>
-              </a:lnSpc>
               <a:spcBef>
                 <a:spcPts val="1600"/>
               </a:spcBef>
@@ -33593,37 +33499,7 @@
               </a:spcAft>
               <a:buNone/>
             </a:pPr>
-            <a:r>
-              <a:rPr lang="en" sz="1200">
-                <a:solidFill>
-                  <a:srgbClr val="525C65"/>
-                </a:solidFill>
-                <a:highlight>
-                  <a:schemeClr val="lt1"/>
-                </a:highlight>
-                <a:latin typeface="Open Sans"/>
-                <a:ea typeface="Open Sans"/>
-                <a:cs typeface="Open Sans"/>
-                <a:sym typeface="Open Sans"/>
-              </a:rPr>
-              <a:t>      </a:t>
-            </a:r>
-            <a:r>
-              <a:rPr lang="en" sz="1200">
-                <a:solidFill>
-                  <a:srgbClr val="FF0000"/>
-                </a:solidFill>
-                <a:highlight>
-                  <a:schemeClr val="lt1"/>
-                </a:highlight>
-                <a:latin typeface="Open Sans"/>
-                <a:ea typeface="Open Sans"/>
-                <a:cs typeface="Open Sans"/>
-                <a:sym typeface="Open Sans"/>
-              </a:rPr>
-              <a:t>** Replace example screenshot below with your response, and include the query in a SQL file</a:t>
-            </a:r>
-            <a:endParaRPr sz="1900" b="1">
+            <a:endParaRPr sz="1900" b="1" dirty="0">
               <a:latin typeface="Open Sans"/>
               <a:ea typeface="Open Sans"/>
               <a:cs typeface="Open Sans"/>
@@ -33633,14 +33509,14 @@
           <a:p>
             <a:pPr marL="0" lvl="0" indent="0" algn="l" rtl="0">
               <a:spcBef>
-                <a:spcPts val="0"/>
+                <a:spcPts val="1600"/>
               </a:spcBef>
               <a:spcAft>
                 <a:spcPts val="0"/>
               </a:spcAft>
               <a:buNone/>
             </a:pPr>
-            <a:endParaRPr sz="1900" b="1">
+            <a:endParaRPr sz="1900" b="1" dirty="0">
               <a:latin typeface="Open Sans"/>
               <a:ea typeface="Open Sans"/>
               <a:cs typeface="Open Sans"/>
@@ -33648,7 +33524,7 @@
             </a:endParaRPr>
           </a:p>
           <a:p>
-            <a:pPr marL="0" lvl="0" indent="0" algn="l" rtl="0">
+            <a:pPr marL="457200" lvl="0" indent="0" algn="l" rtl="0">
               <a:spcBef>
                 <a:spcPts val="1600"/>
               </a:spcBef>
@@ -33657,7 +33533,7 @@
               </a:spcAft>
               <a:buNone/>
             </a:pPr>
-            <a:endParaRPr sz="1900" b="1">
+            <a:endParaRPr sz="1900" b="1" dirty="0">
               <a:latin typeface="Open Sans"/>
               <a:ea typeface="Open Sans"/>
               <a:cs typeface="Open Sans"/>
@@ -33674,7 +33550,7 @@
               </a:spcAft>
               <a:buNone/>
             </a:pPr>
-            <a:endParaRPr sz="1900" b="1">
+            <a:endParaRPr sz="1900" b="1" dirty="0">
               <a:latin typeface="Open Sans"/>
               <a:ea typeface="Open Sans"/>
               <a:cs typeface="Open Sans"/>
@@ -33691,7 +33567,7 @@
               </a:spcAft>
               <a:buNone/>
             </a:pPr>
-            <a:endParaRPr sz="1900" b="1">
+            <a:endParaRPr sz="1900" b="1" dirty="0">
               <a:latin typeface="Open Sans"/>
               <a:ea typeface="Open Sans"/>
               <a:cs typeface="Open Sans"/>
@@ -33699,6 +33575,18 @@
             </a:endParaRPr>
           </a:p>
           <a:p>
+            <a:pPr marL="0" lvl="0" indent="0" algn="l" rtl="0">
+              <a:spcBef>
+                <a:spcPts val="1600"/>
+              </a:spcBef>
+              <a:spcAft>
+                <a:spcPts val="0"/>
+              </a:spcAft>
+              <a:buNone/>
+            </a:pPr>
+            <a:endParaRPr sz="1900" dirty="0"/>
+          </a:p>
+          <a:p>
             <a:pPr marL="457200" lvl="0" indent="0" algn="l" rtl="0">
               <a:spcBef>
                 <a:spcPts val="1600"/>
@@ -33708,15 +33596,10 @@
               </a:spcAft>
               <a:buNone/>
             </a:pPr>
-            <a:endParaRPr sz="1900" b="1">
-              <a:latin typeface="Open Sans"/>
-              <a:ea typeface="Open Sans"/>
-              <a:cs typeface="Open Sans"/>
-              <a:sym typeface="Open Sans"/>
-            </a:endParaRPr>
-          </a:p>
-          <a:p>
-            <a:pPr marL="0" lvl="0" indent="0" algn="l" rtl="0">
+            <a:endParaRPr sz="1900" dirty="0"/>
+          </a:p>
+          <a:p>
+            <a:pPr marL="457200" lvl="0" indent="0" algn="l" rtl="0">
               <a:spcBef>
                 <a:spcPts val="1600"/>
               </a:spcBef>
@@ -33725,112 +33608,50 @@
               </a:spcAft>
               <a:buNone/>
             </a:pPr>
-            <a:endParaRPr sz="1900" b="1">
-              <a:latin typeface="Open Sans"/>
-              <a:ea typeface="Open Sans"/>
-              <a:cs typeface="Open Sans"/>
-              <a:sym typeface="Open Sans"/>
-            </a:endParaRPr>
-          </a:p>
-          <a:p>
-            <a:pPr marL="0" lvl="0" indent="0" algn="l" rtl="0">
+            <a:endParaRPr sz="1900" dirty="0"/>
+          </a:p>
+          <a:p>
+            <a:pPr marL="457200" lvl="0" indent="0" algn="l" rtl="0">
               <a:spcBef>
                 <a:spcPts val="1600"/>
               </a:spcBef>
               <a:spcAft>
-                <a:spcPts val="0"/>
+                <a:spcPts val="1600"/>
               </a:spcAft>
               <a:buNone/>
             </a:pPr>
-            <a:endParaRPr sz="1900" b="1">
-              <a:latin typeface="Open Sans"/>
-              <a:ea typeface="Open Sans"/>
-              <a:cs typeface="Open Sans"/>
-              <a:sym typeface="Open Sans"/>
-            </a:endParaRPr>
-          </a:p>
-          <a:p>
-            <a:pPr marL="0" lvl="0" indent="0" algn="l" rtl="0">
-              <a:spcBef>
-                <a:spcPts val="1600"/>
-              </a:spcBef>
-              <a:spcAft>
-                <a:spcPts val="0"/>
-              </a:spcAft>
-              <a:buNone/>
-            </a:pPr>
-            <a:endParaRPr sz="1900"/>
-          </a:p>
-          <a:p>
-            <a:pPr marL="457200" lvl="0" indent="0" algn="l" rtl="0">
-              <a:spcBef>
-                <a:spcPts val="1600"/>
-              </a:spcBef>
-              <a:spcAft>
-                <a:spcPts val="0"/>
-              </a:spcAft>
-              <a:buNone/>
-            </a:pPr>
-            <a:endParaRPr sz="1900"/>
-          </a:p>
-          <a:p>
-            <a:pPr marL="457200" lvl="0" indent="0" algn="l" rtl="0">
-              <a:spcBef>
-                <a:spcPts val="1600"/>
-              </a:spcBef>
-              <a:spcAft>
-                <a:spcPts val="0"/>
-              </a:spcAft>
-              <a:buNone/>
-            </a:pPr>
-            <a:endParaRPr sz="1900"/>
-          </a:p>
-          <a:p>
-            <a:pPr marL="457200" lvl="0" indent="0" algn="l" rtl="0">
-              <a:spcBef>
-                <a:spcPts val="1600"/>
-              </a:spcBef>
-              <a:spcAft>
-                <a:spcPts val="1600"/>
-              </a:spcAft>
-              <a:buNone/>
-            </a:pPr>
-            <a:endParaRPr sz="1900"/>
+            <a:endParaRPr sz="1900" dirty="0"/>
           </a:p>
         </p:txBody>
       </p:sp>
       <p:pic>
         <p:nvPicPr>
-          <p:cNvPr id="318" name="Google Shape;318;p72"/>
-          <p:cNvPicPr preferRelativeResize="0"/>
+          <p:cNvPr id="3" name="Picture 2">
+            <a:extLst>
+              <a:ext uri="{FF2B5EF4-FFF2-40B4-BE49-F238E27FC236}">
+                <a16:creationId xmlns:a16="http://schemas.microsoft.com/office/drawing/2014/main" id="{C9927469-411D-D575-839D-84C34A8510E9}"/>
+              </a:ext>
+            </a:extLst>
+          </p:cNvPr>
+          <p:cNvPicPr>
+            <a:picLocks noChangeAspect="1"/>
+          </p:cNvPicPr>
           <p:nvPr/>
         </p:nvPicPr>
         <p:blipFill>
-          <a:blip r:embed="rId3">
-            <a:alphaModFix/>
-          </a:blip>
+          <a:blip r:embed="rId3"/>
           <a:stretch>
             <a:fillRect/>
           </a:stretch>
         </p:blipFill>
         <p:spPr>
           <a:xfrm>
-            <a:off x="1088175" y="4781750"/>
-            <a:ext cx="5036025" cy="3241700"/>
+            <a:off x="432486" y="3290341"/>
+            <a:ext cx="7074969" cy="3876100"/>
           </a:xfrm>
           <a:prstGeom prst="rect">
             <a:avLst/>
           </a:prstGeom>
-          <a:noFill/>
-          <a:ln w="9525" cap="flat" cmpd="sng">
-            <a:solidFill>
-              <a:schemeClr val="dk2"/>
-            </a:solidFill>
-            <a:prstDash val="solid"/>
-            <a:round/>
-            <a:headEnd type="none" w="sm" len="sm"/>
-            <a:tailEnd type="none" w="sm" len="sm"/>
-          </a:ln>
         </p:spPr>
       </p:pic>
     </p:spTree>
@@ -33912,8 +33733,8 @@
         </p:nvSpPr>
         <p:spPr>
           <a:xfrm>
-            <a:off x="264950" y="2118049"/>
-            <a:ext cx="7242600" cy="7731900"/>
+            <a:off x="264900" y="1722632"/>
+            <a:ext cx="7242600" cy="1786687"/>
           </a:xfrm>
           <a:prstGeom prst="rect">
             <a:avLst/>
@@ -33925,18 +33746,6 @@
           </a:bodyPr>
           <a:lstStyle/>
           <a:p>
-            <a:pPr marL="0" lvl="0" indent="0" algn="l" rtl="0">
-              <a:spcBef>
-                <a:spcPts val="0"/>
-              </a:spcBef>
-              <a:spcAft>
-                <a:spcPts val="0"/>
-              </a:spcAft>
-              <a:buNone/>
-            </a:pPr>
-            <a:endParaRPr sz="1900"/>
-          </a:p>
-          <a:p>
             <a:pPr marL="457200" lvl="0" indent="-349250" algn="l" rtl="0">
               <a:spcBef>
                 <a:spcPts val="1600"/>
@@ -33949,7 +33758,7 @@
               <a:buChar char="●"/>
             </a:pPr>
             <a:r>
-              <a:rPr lang="en" sz="1900" b="1">
+              <a:rPr lang="en" sz="1900" b="1" dirty="0">
                 <a:latin typeface="Open Sans"/>
                 <a:ea typeface="Open Sans"/>
                 <a:cs typeface="Open Sans"/>
@@ -33957,264 +33766,43 @@
               </a:rPr>
               <a:t>Question 6: Write a query that returns current and past jobs (include employee name, job title, department, manager name, start and end date for position) for employee Toni Lembeck.</a:t>
             </a:r>
-            <a:endParaRPr sz="1900" b="1">
+            <a:endParaRPr sz="1900" b="1" dirty="0">
               <a:latin typeface="Open Sans"/>
               <a:ea typeface="Open Sans"/>
               <a:cs typeface="Open Sans"/>
               <a:sym typeface="Open Sans"/>
             </a:endParaRPr>
           </a:p>
-          <a:p>
-            <a:pPr marL="0" lvl="0" indent="0" algn="l" rtl="0">
-              <a:lnSpc>
-                <a:spcPct val="170000"/>
-              </a:lnSpc>
-              <a:spcBef>
-                <a:spcPts val="1600"/>
-              </a:spcBef>
-              <a:spcAft>
-                <a:spcPts val="0"/>
-              </a:spcAft>
-              <a:buNone/>
-            </a:pPr>
-            <a:r>
-              <a:rPr lang="en" sz="1200">
-                <a:solidFill>
-                  <a:srgbClr val="525C65"/>
-                </a:solidFill>
-                <a:highlight>
-                  <a:schemeClr val="lt1"/>
-                </a:highlight>
-                <a:latin typeface="Open Sans"/>
-                <a:ea typeface="Open Sans"/>
-                <a:cs typeface="Open Sans"/>
-                <a:sym typeface="Open Sans"/>
-              </a:rPr>
-              <a:t>          </a:t>
-            </a:r>
-            <a:r>
-              <a:rPr lang="en" sz="1200">
-                <a:solidFill>
-                  <a:srgbClr val="FF0000"/>
-                </a:solidFill>
-                <a:highlight>
-                  <a:schemeClr val="lt1"/>
-                </a:highlight>
-                <a:latin typeface="Open Sans"/>
-                <a:ea typeface="Open Sans"/>
-                <a:cs typeface="Open Sans"/>
-                <a:sym typeface="Open Sans"/>
-              </a:rPr>
-              <a:t>** Replace example screenshot below with your response, and include the query in a SQL file</a:t>
-            </a:r>
-            <a:endParaRPr sz="1900" b="1">
-              <a:latin typeface="Open Sans"/>
-              <a:ea typeface="Open Sans"/>
-              <a:cs typeface="Open Sans"/>
-              <a:sym typeface="Open Sans"/>
-            </a:endParaRPr>
-          </a:p>
-          <a:p>
-            <a:pPr marL="0" lvl="0" indent="0" algn="l" rtl="0">
-              <a:spcBef>
-                <a:spcPts val="0"/>
-              </a:spcBef>
-              <a:spcAft>
-                <a:spcPts val="0"/>
-              </a:spcAft>
-              <a:buNone/>
-            </a:pPr>
-            <a:endParaRPr sz="1900" b="1">
-              <a:latin typeface="Open Sans"/>
-              <a:ea typeface="Open Sans"/>
-              <a:cs typeface="Open Sans"/>
-              <a:sym typeface="Open Sans"/>
-            </a:endParaRPr>
-          </a:p>
-          <a:p>
-            <a:pPr marL="0" lvl="0" indent="0" algn="l" rtl="0">
-              <a:spcBef>
-                <a:spcPts val="1600"/>
-              </a:spcBef>
-              <a:spcAft>
-                <a:spcPts val="0"/>
-              </a:spcAft>
-              <a:buNone/>
-            </a:pPr>
-            <a:endParaRPr sz="1900" b="1">
-              <a:latin typeface="Open Sans"/>
-              <a:ea typeface="Open Sans"/>
-              <a:cs typeface="Open Sans"/>
-              <a:sym typeface="Open Sans"/>
-            </a:endParaRPr>
-          </a:p>
-          <a:p>
-            <a:pPr marL="0" lvl="0" indent="0" algn="l" rtl="0">
-              <a:spcBef>
-                <a:spcPts val="1600"/>
-              </a:spcBef>
-              <a:spcAft>
-                <a:spcPts val="0"/>
-              </a:spcAft>
-              <a:buNone/>
-            </a:pPr>
-            <a:endParaRPr sz="1900" b="1">
-              <a:latin typeface="Open Sans"/>
-              <a:ea typeface="Open Sans"/>
-              <a:cs typeface="Open Sans"/>
-              <a:sym typeface="Open Sans"/>
-            </a:endParaRPr>
-          </a:p>
-          <a:p>
-            <a:pPr marL="0" lvl="0" indent="0" algn="l" rtl="0">
-              <a:spcBef>
-                <a:spcPts val="1600"/>
-              </a:spcBef>
-              <a:spcAft>
-                <a:spcPts val="0"/>
-              </a:spcAft>
-              <a:buNone/>
-            </a:pPr>
-            <a:endParaRPr sz="1900" b="1">
-              <a:latin typeface="Open Sans"/>
-              <a:ea typeface="Open Sans"/>
-              <a:cs typeface="Open Sans"/>
-              <a:sym typeface="Open Sans"/>
-            </a:endParaRPr>
-          </a:p>
-          <a:p>
-            <a:pPr marL="457200" lvl="0" indent="0" algn="l" rtl="0">
-              <a:spcBef>
-                <a:spcPts val="1600"/>
-              </a:spcBef>
-              <a:spcAft>
-                <a:spcPts val="0"/>
-              </a:spcAft>
-              <a:buNone/>
-            </a:pPr>
-            <a:endParaRPr sz="1900" b="1">
-              <a:latin typeface="Open Sans"/>
-              <a:ea typeface="Open Sans"/>
-              <a:cs typeface="Open Sans"/>
-              <a:sym typeface="Open Sans"/>
-            </a:endParaRPr>
-          </a:p>
-          <a:p>
-            <a:pPr marL="0" lvl="0" indent="0" algn="l" rtl="0">
-              <a:spcBef>
-                <a:spcPts val="1600"/>
-              </a:spcBef>
-              <a:spcAft>
-                <a:spcPts val="0"/>
-              </a:spcAft>
-              <a:buNone/>
-            </a:pPr>
-            <a:endParaRPr sz="1900" b="1">
-              <a:latin typeface="Open Sans"/>
-              <a:ea typeface="Open Sans"/>
-              <a:cs typeface="Open Sans"/>
-              <a:sym typeface="Open Sans"/>
-            </a:endParaRPr>
-          </a:p>
-          <a:p>
-            <a:pPr marL="0" lvl="0" indent="0" algn="l" rtl="0">
-              <a:spcBef>
-                <a:spcPts val="1600"/>
-              </a:spcBef>
-              <a:spcAft>
-                <a:spcPts val="0"/>
-              </a:spcAft>
-              <a:buNone/>
-            </a:pPr>
-            <a:endParaRPr sz="1900" b="1">
-              <a:latin typeface="Open Sans"/>
-              <a:ea typeface="Open Sans"/>
-              <a:cs typeface="Open Sans"/>
-              <a:sym typeface="Open Sans"/>
-            </a:endParaRPr>
-          </a:p>
-          <a:p>
-            <a:pPr marL="0" lvl="0" indent="0" algn="l" rtl="0">
-              <a:spcBef>
-                <a:spcPts val="1600"/>
-              </a:spcBef>
-              <a:spcAft>
-                <a:spcPts val="0"/>
-              </a:spcAft>
-              <a:buNone/>
-            </a:pPr>
-            <a:endParaRPr sz="1900"/>
-          </a:p>
-          <a:p>
-            <a:pPr marL="457200" lvl="0" indent="0" algn="l" rtl="0">
-              <a:spcBef>
-                <a:spcPts val="1600"/>
-              </a:spcBef>
-              <a:spcAft>
-                <a:spcPts val="0"/>
-              </a:spcAft>
-              <a:buNone/>
-            </a:pPr>
-            <a:endParaRPr sz="1900"/>
-          </a:p>
-          <a:p>
-            <a:pPr marL="457200" lvl="0" indent="0" algn="l" rtl="0">
-              <a:spcBef>
-                <a:spcPts val="1600"/>
-              </a:spcBef>
-              <a:spcAft>
-                <a:spcPts val="0"/>
-              </a:spcAft>
-              <a:buNone/>
-            </a:pPr>
-            <a:endParaRPr sz="1900"/>
-          </a:p>
-          <a:p>
-            <a:pPr marL="457200" lvl="0" indent="0" algn="l" rtl="0">
-              <a:spcBef>
-                <a:spcPts val="1600"/>
-              </a:spcBef>
-              <a:spcAft>
-                <a:spcPts val="1600"/>
-              </a:spcAft>
-              <a:buNone/>
-            </a:pPr>
-            <a:endParaRPr sz="1900"/>
-          </a:p>
         </p:txBody>
       </p:sp>
       <p:pic>
         <p:nvPicPr>
-          <p:cNvPr id="325" name="Google Shape;325;p73"/>
-          <p:cNvPicPr preferRelativeResize="0"/>
+          <p:cNvPr id="3" name="Picture 2">
+            <a:extLst>
+              <a:ext uri="{FF2B5EF4-FFF2-40B4-BE49-F238E27FC236}">
+                <a16:creationId xmlns:a16="http://schemas.microsoft.com/office/drawing/2014/main" id="{ACFCD5A7-D41D-6C52-2B9C-D691A8AA9C0D}"/>
+              </a:ext>
+            </a:extLst>
+          </p:cNvPr>
+          <p:cNvPicPr>
+            <a:picLocks noChangeAspect="1"/>
+          </p:cNvPicPr>
           <p:nvPr/>
         </p:nvPicPr>
         <p:blipFill>
-          <a:blip r:embed="rId3">
-            <a:alphaModFix/>
-          </a:blip>
+          <a:blip r:embed="rId3"/>
           <a:stretch>
             <a:fillRect/>
           </a:stretch>
         </p:blipFill>
         <p:spPr>
           <a:xfrm>
-            <a:off x="1088175" y="4781750"/>
-            <a:ext cx="5036025" cy="3241700"/>
+            <a:off x="529800" y="3888316"/>
+            <a:ext cx="6822470" cy="3229176"/>
           </a:xfrm>
           <a:prstGeom prst="rect">
             <a:avLst/>
           </a:prstGeom>
-          <a:noFill/>
-          <a:ln w="9525" cap="flat" cmpd="sng">
-            <a:solidFill>
-              <a:schemeClr val="dk2"/>
-            </a:solidFill>
-            <a:prstDash val="solid"/>
-            <a:round/>
-            <a:headEnd type="none" w="sm" len="sm"/>
-            <a:tailEnd type="none" w="sm" len="sm"/>
-          </a:ln>
         </p:spPr>
       </p:pic>
     </p:spTree>
@@ -34297,7 +33885,7 @@
         <p:spPr>
           <a:xfrm>
             <a:off x="264950" y="2253724"/>
-            <a:ext cx="7242600" cy="7731900"/>
+            <a:ext cx="7242600" cy="4035865"/>
           </a:xfrm>
           <a:prstGeom prst="rect">
             <a:avLst/>
@@ -34321,7 +33909,7 @@
               <a:buChar char="●"/>
             </a:pPr>
             <a:r>
-              <a:rPr lang="en" sz="1900" b="1">
+              <a:rPr lang="en" sz="1900" b="1" dirty="0">
                 <a:latin typeface="Open Sans"/>
                 <a:ea typeface="Open Sans"/>
                 <a:cs typeface="Open Sans"/>
@@ -34329,7 +33917,7 @@
               </a:rPr>
               <a:t>Question 7: Describe how you would apply table security to restrict access to employee salaries using an SQL server.</a:t>
             </a:r>
-            <a:endParaRPr sz="1900" b="1">
+            <a:endParaRPr sz="1900" b="1" dirty="0">
               <a:latin typeface="Open Sans"/>
               <a:ea typeface="Open Sans"/>
               <a:cs typeface="Open Sans"/>
@@ -34337,38 +33925,65 @@
             </a:endParaRPr>
           </a:p>
           <a:p>
-            <a:pPr marL="0" lvl="0" indent="0" algn="l" rtl="0">
+            <a:pPr lvl="0" indent="0">
               <a:spcBef>
                 <a:spcPts val="1600"/>
               </a:spcBef>
-              <a:spcAft>
-                <a:spcPts val="0"/>
-              </a:spcAft>
               <a:buNone/>
             </a:pPr>
             <a:r>
-              <a:rPr lang="en" sz="1900" b="1">
-                <a:solidFill>
-                  <a:srgbClr val="FF0000"/>
-                </a:solidFill>
-                <a:latin typeface="Open Sans"/>
-                <a:ea typeface="Open Sans"/>
-                <a:cs typeface="Open Sans"/>
-                <a:sym typeface="Open Sans"/>
-              </a:rPr>
-              <a:t>** answer in a short paragraph, how you would apply table security to restrict access to employee salaries</a:t>
+              <a:rPr lang="en-GB" sz="1400" dirty="0"/>
+              <a:t>- I would apply table security by creating database roles and granting salary table access only to authorized users such as HR or Payroll teams. </a:t>
             </a:r>
-            <a:endParaRPr sz="1900" b="1">
-              <a:solidFill>
-                <a:srgbClr val="FF0000"/>
-              </a:solidFill>
-              <a:latin typeface="Open Sans"/>
-              <a:ea typeface="Open Sans"/>
-              <a:cs typeface="Open Sans"/>
+          </a:p>
+          <a:p>
+            <a:pPr lvl="0" indent="0">
+              <a:spcBef>
+                <a:spcPts val="1600"/>
+              </a:spcBef>
+              <a:buNone/>
+            </a:pPr>
+            <a:r>
+              <a:rPr lang="en-GB" sz="1400" dirty="0"/>
+              <a:t>- Regular users would be denied direct access to the </a:t>
+            </a:r>
+            <a:r>
+              <a:rPr lang="en-GB" sz="1400" dirty="0" err="1"/>
+              <a:t>employee_salary</a:t>
+            </a:r>
+            <a:r>
+              <a:rPr lang="en-GB" sz="1400" dirty="0"/>
+              <a:t> table using REVOKE statements, while approved users would receive SELECT, INSERT, or UPDATE permissions as required. </a:t>
+            </a:r>
+          </a:p>
+          <a:p>
+            <a:pPr lvl="0" indent="0">
+              <a:spcBef>
+                <a:spcPts val="1600"/>
+              </a:spcBef>
+              <a:buNone/>
+            </a:pPr>
+            <a:r>
+              <a:rPr lang="en-GB" sz="1400" dirty="0"/>
+              <a:t>- Additional security could include views to hide sensitive salary information and auditing to track who accesses salary data.</a:t>
+            </a:r>
+            <a:endParaRPr sz="1400" dirty="0">
               <a:sym typeface="Open Sans"/>
             </a:endParaRPr>
           </a:p>
           <a:p>
+            <a:pPr marL="0" lvl="0" indent="0" algn="l" rtl="0">
+              <a:spcBef>
+                <a:spcPts val="1600"/>
+              </a:spcBef>
+              <a:spcAft>
+                <a:spcPts val="0"/>
+              </a:spcAft>
+              <a:buNone/>
+            </a:pPr>
+            <a:endParaRPr sz="1900" dirty="0"/>
+          </a:p>
+          <a:p>
             <a:pPr marL="457200" lvl="0" indent="0" algn="l" rtl="0">
               <a:spcBef>
                 <a:spcPts val="1600"/>
@@ -34378,15 +33993,10 @@
               </a:spcAft>
               <a:buNone/>
             </a:pPr>
-            <a:endParaRPr sz="1900" b="1">
-              <a:latin typeface="Open Sans"/>
-              <a:ea typeface="Open Sans"/>
-              <a:cs typeface="Open Sans"/>
-              <a:sym typeface="Open Sans"/>
-            </a:endParaRPr>
-          </a:p>
-          <a:p>
-            <a:pPr marL="0" lvl="0" indent="0" algn="l" rtl="0">
+            <a:endParaRPr sz="1900" dirty="0"/>
+          </a:p>
+          <a:p>
+            <a:pPr marL="457200" lvl="0" indent="0" algn="l" rtl="0">
               <a:spcBef>
                 <a:spcPts val="1600"/>
               </a:spcBef>
@@ -34395,7 +34005,7 @@
               </a:spcAft>
               <a:buNone/>
             </a:pPr>
-            <a:endParaRPr sz="1900"/>
+            <a:endParaRPr sz="1900" dirty="0"/>
           </a:p>
           <a:p>
             <a:pPr marL="457200" lvl="0" indent="0" algn="l" rtl="0">
@@ -34403,35 +34013,11 @@
                 <a:spcPts val="1600"/>
               </a:spcBef>
               <a:spcAft>
-                <a:spcPts val="0"/>
+                <a:spcPts val="1600"/>
               </a:spcAft>
               <a:buNone/>
             </a:pPr>
-            <a:endParaRPr sz="1900"/>
-          </a:p>
-          <a:p>
-            <a:pPr marL="457200" lvl="0" indent="0" algn="l" rtl="0">
-              <a:spcBef>
-                <a:spcPts val="1600"/>
-              </a:spcBef>
-              <a:spcAft>
-                <a:spcPts val="0"/>
-              </a:spcAft>
-              <a:buNone/>
-            </a:pPr>
-            <a:endParaRPr sz="1900"/>
-          </a:p>
-          <a:p>
-            <a:pPr marL="457200" lvl="0" indent="0" algn="l" rtl="0">
-              <a:spcBef>
-                <a:spcPts val="1600"/>
-              </a:spcBef>
-              <a:spcAft>
-                <a:spcPts val="1600"/>
-              </a:spcAft>
-              <a:buNone/>
-            </a:pPr>
-            <a:endParaRPr sz="1900"/>
+            <a:endParaRPr sz="1900" dirty="0"/>
           </a:p>
         </p:txBody>
       </p:sp>
@@ -37319,16 +36905,6 @@
               <a:rPr lang="en-US" sz="1400" dirty="0"/>
               <a:t>- Employee salary table</a:t>
             </a:r>
-          </a:p>
-          <a:p>
-            <a:pPr lvl="0" indent="0">
-              <a:buNone/>
-            </a:pPr>
-            <a:r>
-              <a:rPr lang="en-US" sz="1400" dirty="0"/>
-              <a:t>- Views to support controlled access to employee data</a:t>
-            </a:r>
-            <a:endParaRPr sz="1400" dirty="0"/>
           </a:p>
           <a:p>
             <a:pPr marL="457200" lvl="0" indent="-349250" algn="l" rtl="0">

--- a/Modules/03-Data-Architect/projects/Project 1 - Human Resources Database Design/report/HR_Database_Design_Project_Arjun_Avalakki_Mohan.pptx
+++ b/Modules/03-Data-Architect/projects/Project 1 - Human Resources Database Design/report/HR_Database_Design_Project_Arjun_Avalakki_Mohan.pptx
@@ -319,18 +319,18 @@
   <pc:docChgLst>
     <pc:chgData name="ARJUN AVALAKKI MOHAN" userId="be4ab9aaf12c5868" providerId="LiveId" clId="{C81E60EF-EF5F-4B4B-A4E1-3178676F15CC}"/>
     <pc:docChg chg="undo custSel addSld delSld modSld">
-      <pc:chgData name="ARJUN AVALAKKI MOHAN" userId="be4ab9aaf12c5868" providerId="LiveId" clId="{C81E60EF-EF5F-4B4B-A4E1-3178676F15CC}" dt="2026-05-24T06:22:16.735" v="1033" actId="14100"/>
+      <pc:chgData name="ARJUN AVALAKKI MOHAN" userId="be4ab9aaf12c5868" providerId="LiveId" clId="{C81E60EF-EF5F-4B4B-A4E1-3178676F15CC}" dt="2026-05-25T04:35:03.466" v="1043" actId="14100"/>
       <pc:docMkLst>
         <pc:docMk/>
       </pc:docMkLst>
       <pc:sldChg chg="modSp mod">
-        <pc:chgData name="ARJUN AVALAKKI MOHAN" userId="be4ab9aaf12c5868" providerId="LiveId" clId="{C81E60EF-EF5F-4B4B-A4E1-3178676F15CC}" dt="2026-05-19T05:48:17.558" v="510" actId="20577"/>
+        <pc:chgData name="ARJUN AVALAKKI MOHAN" userId="be4ab9aaf12c5868" providerId="LiveId" clId="{C81E60EF-EF5F-4B4B-A4E1-3178676F15CC}" dt="2026-05-25T04:30:25.809" v="1037" actId="20577"/>
         <pc:sldMkLst>
           <pc:docMk/>
           <pc:sldMk cId="0" sldId="256"/>
         </pc:sldMkLst>
         <pc:spChg chg="mod">
-          <ac:chgData name="ARJUN AVALAKKI MOHAN" userId="be4ab9aaf12c5868" providerId="LiveId" clId="{C81E60EF-EF5F-4B4B-A4E1-3178676F15CC}" dt="2026-05-19T05:48:17.558" v="510" actId="20577"/>
+          <ac:chgData name="ARJUN AVALAKKI MOHAN" userId="be4ab9aaf12c5868" providerId="LiveId" clId="{C81E60EF-EF5F-4B4B-A4E1-3178676F15CC}" dt="2026-05-25T04:30:25.809" v="1037" actId="20577"/>
           <ac:spMkLst>
             <pc:docMk/>
             <pc:sldMk cId="0" sldId="256"/>
@@ -481,14 +481,6 @@
             <ac:picMk id="3" creationId="{0FA426DF-3EB2-5B29-14C6-AD8D9874DE10}"/>
           </ac:picMkLst>
         </pc:picChg>
-        <pc:picChg chg="add del mod">
-          <ac:chgData name="ARJUN AVALAKKI MOHAN" userId="be4ab9aaf12c5868" providerId="LiveId" clId="{C81E60EF-EF5F-4B4B-A4E1-3178676F15CC}" dt="2026-05-23T06:14:11.556" v="864" actId="478"/>
-          <ac:picMkLst>
-            <pc:docMk/>
-            <pc:sldMk cId="0" sldId="267"/>
-            <ac:picMk id="4" creationId="{A5722C49-878A-9ADD-0D36-BBD86256153F}"/>
-          </ac:picMkLst>
-        </pc:picChg>
       </pc:sldChg>
       <pc:sldChg chg="addSp delSp modSp mod modNotes">
         <pc:chgData name="ARJUN AVALAKKI MOHAN" userId="be4ab9aaf12c5868" providerId="LiveId" clId="{C81E60EF-EF5F-4B4B-A4E1-3178676F15CC}" dt="2026-05-23T06:18:07.555" v="896" actId="2085"/>
@@ -504,14 +496,6 @@
             <ac:spMk id="256" creationId="{00000000-0000-0000-0000-000000000000}"/>
           </ac:spMkLst>
         </pc:spChg>
-        <pc:picChg chg="add del mod">
-          <ac:chgData name="ARJUN AVALAKKI MOHAN" userId="be4ab9aaf12c5868" providerId="LiveId" clId="{C81E60EF-EF5F-4B4B-A4E1-3178676F15CC}" dt="2026-05-23T06:15:20.790" v="874" actId="478"/>
-          <ac:picMkLst>
-            <pc:docMk/>
-            <pc:sldMk cId="0" sldId="268"/>
-            <ac:picMk id="2" creationId="{83237B88-52C8-4925-B904-FB0AF33100D6}"/>
-          </ac:picMkLst>
-        </pc:picChg>
         <pc:picChg chg="add mod">
           <ac:chgData name="ARJUN AVALAKKI MOHAN" userId="be4ab9aaf12c5868" providerId="LiveId" clId="{C81E60EF-EF5F-4B4B-A4E1-3178676F15CC}" dt="2026-05-23T06:18:07.555" v="896" actId="2085"/>
           <ac:picMkLst>
@@ -522,7 +506,7 @@
         </pc:picChg>
       </pc:sldChg>
       <pc:sldChg chg="addSp delSp modSp mod modNotes">
-        <pc:chgData name="ARJUN AVALAKKI MOHAN" userId="be4ab9aaf12c5868" providerId="LiveId" clId="{C81E60EF-EF5F-4B4B-A4E1-3178676F15CC}" dt="2026-05-23T06:17:57.735" v="895" actId="2085"/>
+        <pc:chgData name="ARJUN AVALAKKI MOHAN" userId="be4ab9aaf12c5868" providerId="LiveId" clId="{C81E60EF-EF5F-4B4B-A4E1-3178676F15CC}" dt="2026-05-25T04:35:03.466" v="1043" actId="14100"/>
         <pc:sldMkLst>
           <pc:docMk/>
           <pc:sldMk cId="0" sldId="269"/>
@@ -535,20 +519,20 @@
             <ac:spMk id="263" creationId="{00000000-0000-0000-0000-000000000000}"/>
           </ac:spMkLst>
         </pc:spChg>
-        <pc:picChg chg="add mod">
-          <ac:chgData name="ARJUN AVALAKKI MOHAN" userId="be4ab9aaf12c5868" providerId="LiveId" clId="{C81E60EF-EF5F-4B4B-A4E1-3178676F15CC}" dt="2026-05-23T06:17:57.735" v="895" actId="2085"/>
+        <pc:picChg chg="add del mod">
+          <ac:chgData name="ARJUN AVALAKKI MOHAN" userId="be4ab9aaf12c5868" providerId="LiveId" clId="{C81E60EF-EF5F-4B4B-A4E1-3178676F15CC}" dt="2026-05-25T04:34:49.496" v="1038" actId="478"/>
           <ac:picMkLst>
             <pc:docMk/>
             <pc:sldMk cId="0" sldId="269"/>
             <ac:picMk id="3" creationId="{4FDF5F04-A16A-8719-A692-B9C7214704D4}"/>
           </ac:picMkLst>
         </pc:picChg>
-        <pc:picChg chg="add del mod">
-          <ac:chgData name="ARJUN AVALAKKI MOHAN" userId="be4ab9aaf12c5868" providerId="LiveId" clId="{C81E60EF-EF5F-4B4B-A4E1-3178676F15CC}" dt="2026-05-23T06:16:33.201" v="883" actId="478"/>
+        <pc:picChg chg="add mod">
+          <ac:chgData name="ARJUN AVALAKKI MOHAN" userId="be4ab9aaf12c5868" providerId="LiveId" clId="{C81E60EF-EF5F-4B4B-A4E1-3178676F15CC}" dt="2026-05-25T04:35:03.466" v="1043" actId="14100"/>
           <ac:picMkLst>
             <pc:docMk/>
             <pc:sldMk cId="0" sldId="269"/>
-            <ac:picMk id="4" creationId="{ECCD54A3-5A7D-7962-92AF-B50CC087C9F0}"/>
+            <ac:picMk id="4" creationId="{24632A6F-727E-0CA6-04D0-E39ACCE132AB}"/>
           </ac:picMkLst>
         </pc:picChg>
       </pc:sldChg>
@@ -565,14 +549,6 @@
           <pc:docMk/>
           <pc:sldMk cId="0" sldId="272"/>
         </pc:sldMkLst>
-        <pc:spChg chg="add del">
-          <ac:chgData name="ARJUN AVALAKKI MOHAN" userId="be4ab9aaf12c5868" providerId="LiveId" clId="{C81E60EF-EF5F-4B4B-A4E1-3178676F15CC}" dt="2026-05-23T06:49:21.873" v="910" actId="22"/>
-          <ac:spMkLst>
-            <pc:docMk/>
-            <pc:sldMk cId="0" sldId="272"/>
-            <ac:spMk id="8" creationId="{EF9905E1-C713-E4E1-2296-01DDFAD6042C}"/>
-          </ac:spMkLst>
-        </pc:spChg>
         <pc:spChg chg="add mod">
           <ac:chgData name="ARJUN AVALAKKI MOHAN" userId="be4ab9aaf12c5868" providerId="LiveId" clId="{C81E60EF-EF5F-4B4B-A4E1-3178676F15CC}" dt="2026-05-23T06:54:28.915" v="926" actId="14100"/>
           <ac:spMkLst>
@@ -589,14 +565,6 @@
             <ac:spMk id="282" creationId="{00000000-0000-0000-0000-000000000000}"/>
           </ac:spMkLst>
         </pc:spChg>
-        <pc:picChg chg="add del mod">
-          <ac:chgData name="ARJUN AVALAKKI MOHAN" userId="be4ab9aaf12c5868" providerId="LiveId" clId="{C81E60EF-EF5F-4B4B-A4E1-3178676F15CC}" dt="2026-05-23T06:48:19.247" v="898" actId="478"/>
-          <ac:picMkLst>
-            <pc:docMk/>
-            <pc:sldMk cId="0" sldId="272"/>
-            <ac:picMk id="3" creationId="{76232950-6D82-5068-3105-506D04C9CEFB}"/>
-          </ac:picMkLst>
-        </pc:picChg>
         <pc:picChg chg="add mod">
           <ac:chgData name="ARJUN AVALAKKI MOHAN" userId="be4ab9aaf12c5868" providerId="LiveId" clId="{C81E60EF-EF5F-4B4B-A4E1-3178676F15CC}" dt="2026-05-23T06:53:19.197" v="914" actId="1076"/>
           <ac:picMkLst>
@@ -605,36 +573,12 @@
             <ac:picMk id="4" creationId="{4ABB8DA1-DE2B-A470-FD35-BDB987176BFB}"/>
           </ac:picMkLst>
         </pc:picChg>
-        <pc:picChg chg="add del mod">
-          <ac:chgData name="ARJUN AVALAKKI MOHAN" userId="be4ab9aaf12c5868" providerId="LiveId" clId="{C81E60EF-EF5F-4B4B-A4E1-3178676F15CC}" dt="2026-05-23T06:48:20.079" v="899" actId="478"/>
-          <ac:picMkLst>
-            <pc:docMk/>
-            <pc:sldMk cId="0" sldId="272"/>
-            <ac:picMk id="5" creationId="{28FE4F40-9295-B4A4-C7A6-585514873CBB}"/>
-          </ac:picMkLst>
-        </pc:picChg>
-        <pc:picChg chg="add del mod">
-          <ac:chgData name="ARJUN AVALAKKI MOHAN" userId="be4ab9aaf12c5868" providerId="LiveId" clId="{C81E60EF-EF5F-4B4B-A4E1-3178676F15CC}" dt="2026-05-23T06:48:51.392" v="908" actId="478"/>
-          <ac:picMkLst>
-            <pc:docMk/>
-            <pc:sldMk cId="0" sldId="272"/>
-            <ac:picMk id="7" creationId="{900B74AF-50A8-EDCD-6B4E-3FA9662EE864}"/>
-          </ac:picMkLst>
-        </pc:picChg>
         <pc:picChg chg="add mod">
           <ac:chgData name="ARJUN AVALAKKI MOHAN" userId="be4ab9aaf12c5868" providerId="LiveId" clId="{C81E60EF-EF5F-4B4B-A4E1-3178676F15CC}" dt="2026-05-23T06:53:21.538" v="915" actId="1076"/>
           <ac:picMkLst>
             <pc:docMk/>
             <pc:sldMk cId="0" sldId="272"/>
             <ac:picMk id="10" creationId="{49044BF0-8CAC-97D0-42E8-72488806D257}"/>
-          </ac:picMkLst>
-        </pc:picChg>
-        <pc:picChg chg="del">
-          <ac:chgData name="ARJUN AVALAKKI MOHAN" userId="be4ab9aaf12c5868" providerId="LiveId" clId="{C81E60EF-EF5F-4B4B-A4E1-3178676F15CC}" dt="2026-05-23T04:40:01.333" v="834" actId="478"/>
-          <ac:picMkLst>
-            <pc:docMk/>
-            <pc:sldMk cId="0" sldId="272"/>
-            <ac:picMk id="283" creationId="{00000000-0000-0000-0000-000000000000}"/>
           </ac:picMkLst>
         </pc:picChg>
       </pc:sldChg>
@@ -27938,7 +27882,7 @@
                   <a:srgbClr val="FFFFFF"/>
                 </a:solidFill>
               </a:rPr>
-              <a:t>[Arjun Avalakki Mohan &amp; 17/05/2026]</a:t>
+              <a:t>[Arjun Avalakki Mohan &amp; 25/05/2026]</a:t>
             </a:r>
             <a:endParaRPr sz="2500" dirty="0">
               <a:solidFill>
@@ -29256,10 +29200,10 @@
       </p:sp>
       <p:pic>
         <p:nvPicPr>
-          <p:cNvPr id="3" name="Picture 2">
+          <p:cNvPr id="4" name="Picture 3">
             <a:extLst>
               <a:ext uri="{FF2B5EF4-FFF2-40B4-BE49-F238E27FC236}">
-                <a16:creationId xmlns:a16="http://schemas.microsoft.com/office/drawing/2014/main" id="{4FDF5F04-A16A-8719-A692-B9C7214704D4}"/>
+                <a16:creationId xmlns:a16="http://schemas.microsoft.com/office/drawing/2014/main" id="{24632A6F-727E-0CA6-04D0-E39ACCE132AB}"/>
               </a:ext>
             </a:extLst>
           </p:cNvPr>
@@ -29276,15 +29220,12 @@
         </p:blipFill>
         <p:spPr>
           <a:xfrm>
-            <a:off x="264900" y="5029200"/>
-            <a:ext cx="7242600" cy="4439920"/>
+            <a:off x="264900" y="5178037"/>
+            <a:ext cx="7242600" cy="4101887"/>
           </a:xfrm>
           <a:prstGeom prst="rect">
             <a:avLst/>
           </a:prstGeom>
-          <a:ln>
-            <a:noFill/>
-          </a:ln>
         </p:spPr>
       </p:pic>
     </p:spTree>

--- a/Modules/03-Data-Architect/projects/Project 1 - Human Resources Database Design/report/HR_Database_Design_Project_Arjun_Avalakki_Mohan.pptx
+++ b/Modules/03-Data-Architect/projects/Project 1 - Human Resources Database Design/report/HR_Database_Design_Project_Arjun_Avalakki_Mohan.pptx
@@ -309,7 +309,7 @@
 <file path=ppt/revisionInfo.xml><?xml version="1.0" encoding="utf-8"?>
 <p1510:revInfo xmlns:a="http://schemas.openxmlformats.org/drawingml/2006/main" xmlns:r="http://schemas.openxmlformats.org/officeDocument/2006/relationships" xmlns:p1510="http://schemas.microsoft.com/office/powerpoint/2015/10/main">
   <p1510:revLst>
-    <p1510:client id="{CEECDE29-5A9E-4E44-A6A5-88C1A3F6F982}" v="8" dt="2026-05-24T06:08:02.044"/>
+    <p1510:client id="{CEECDE29-5A9E-4E44-A6A5-88C1A3F6F982}" v="18" dt="2026-05-26T04:40:26.300"/>
   </p1510:revLst>
 </p1510:revInfo>
 </file>
@@ -319,7 +319,7 @@
   <pc:docChgLst>
     <pc:chgData name="ARJUN AVALAKKI MOHAN" userId="be4ab9aaf12c5868" providerId="LiveId" clId="{C81E60EF-EF5F-4B4B-A4E1-3178676F15CC}"/>
     <pc:docChg chg="undo custSel addSld delSld modSld">
-      <pc:chgData name="ARJUN AVALAKKI MOHAN" userId="be4ab9aaf12c5868" providerId="LiveId" clId="{C81E60EF-EF5F-4B4B-A4E1-3178676F15CC}" dt="2026-05-25T04:35:03.466" v="1043" actId="14100"/>
+      <pc:chgData name="ARJUN AVALAKKI MOHAN" userId="be4ab9aaf12c5868" providerId="LiveId" clId="{C81E60EF-EF5F-4B4B-A4E1-3178676F15CC}" dt="2026-05-26T04:42:54.778" v="1124" actId="1076"/>
       <pc:docMkLst>
         <pc:docMk/>
       </pc:docMkLst>
@@ -596,28 +596,12 @@
             <ac:spMk id="289" creationId="{00000000-0000-0000-0000-000000000000}"/>
           </ac:spMkLst>
         </pc:spChg>
-        <pc:picChg chg="add del mod">
-          <ac:chgData name="ARJUN AVALAKKI MOHAN" userId="be4ab9aaf12c5868" providerId="LiveId" clId="{C81E60EF-EF5F-4B4B-A4E1-3178676F15CC}" dt="2026-05-24T06:22:07.148" v="1029" actId="478"/>
-          <ac:picMkLst>
-            <pc:docMk/>
-            <pc:sldMk cId="0" sldId="273"/>
-            <ac:picMk id="3" creationId="{EA0E80B0-48C1-3292-CFC4-6DB6C9AE6DFC}"/>
-          </ac:picMkLst>
-        </pc:picChg>
         <pc:picChg chg="add mod">
           <ac:chgData name="ARJUN AVALAKKI MOHAN" userId="be4ab9aaf12c5868" providerId="LiveId" clId="{C81E60EF-EF5F-4B4B-A4E1-3178676F15CC}" dt="2026-05-24T06:22:16.735" v="1033" actId="14100"/>
           <ac:picMkLst>
             <pc:docMk/>
             <pc:sldMk cId="0" sldId="273"/>
             <ac:picMk id="4" creationId="{E7D7F0C1-09C7-B9D4-ADCE-9AB087EE1367}"/>
-          </ac:picMkLst>
-        </pc:picChg>
-        <pc:picChg chg="del">
-          <ac:chgData name="ARJUN AVALAKKI MOHAN" userId="be4ab9aaf12c5868" providerId="LiveId" clId="{C81E60EF-EF5F-4B4B-A4E1-3178676F15CC}" dt="2026-05-24T05:45:46.602" v="949" actId="478"/>
-          <ac:picMkLst>
-            <pc:docMk/>
-            <pc:sldMk cId="0" sldId="273"/>
-            <ac:picMk id="290" creationId="{00000000-0000-0000-0000-000000000000}"/>
           </ac:picMkLst>
         </pc:picChg>
       </pc:sldChg>
@@ -643,14 +627,6 @@
             <ac:picMk id="3" creationId="{9C254158-8C0A-2798-C371-0E517A405794}"/>
           </ac:picMkLst>
         </pc:picChg>
-        <pc:picChg chg="del">
-          <ac:chgData name="ARJUN AVALAKKI MOHAN" userId="be4ab9aaf12c5868" providerId="LiveId" clId="{C81E60EF-EF5F-4B4B-A4E1-3178676F15CC}" dt="2026-05-24T05:53:30.469" v="960" actId="478"/>
-          <ac:picMkLst>
-            <pc:docMk/>
-            <pc:sldMk cId="0" sldId="274"/>
-            <ac:picMk id="297" creationId="{00000000-0000-0000-0000-000000000000}"/>
-          </ac:picMkLst>
-        </pc:picChg>
       </pc:sldChg>
       <pc:sldChg chg="addSp delSp modSp mod modNotes">
         <pc:chgData name="ARJUN AVALAKKI MOHAN" userId="be4ab9aaf12c5868" providerId="LiveId" clId="{C81E60EF-EF5F-4B4B-A4E1-3178676F15CC}" dt="2026-05-24T05:55:40.958" v="973" actId="1076"/>
@@ -672,14 +648,6 @@
             <pc:docMk/>
             <pc:sldMk cId="0" sldId="275"/>
             <ac:picMk id="3" creationId="{26EEDA14-9EDB-090D-C1DB-8484BDC7DB29}"/>
-          </ac:picMkLst>
-        </pc:picChg>
-        <pc:picChg chg="del">
-          <ac:chgData name="ARJUN AVALAKKI MOHAN" userId="be4ab9aaf12c5868" providerId="LiveId" clId="{C81E60EF-EF5F-4B4B-A4E1-3178676F15CC}" dt="2026-05-24T05:55:17.560" v="964" actId="478"/>
-          <ac:picMkLst>
-            <pc:docMk/>
-            <pc:sldMk cId="0" sldId="275"/>
-            <ac:picMk id="304" creationId="{00000000-0000-0000-0000-000000000000}"/>
           </ac:picMkLst>
         </pc:picChg>
       </pc:sldChg>
@@ -705,14 +673,6 @@
             <ac:picMk id="3" creationId="{BADAC383-CE7A-5023-827F-1EEAFC70C372}"/>
           </ac:picMkLst>
         </pc:picChg>
-        <pc:picChg chg="del">
-          <ac:chgData name="ARJUN AVALAKKI MOHAN" userId="be4ab9aaf12c5868" providerId="LiveId" clId="{C81E60EF-EF5F-4B4B-A4E1-3178676F15CC}" dt="2026-05-24T05:59:19.569" v="974" actId="478"/>
-          <ac:picMkLst>
-            <pc:docMk/>
-            <pc:sldMk cId="0" sldId="276"/>
-            <ac:picMk id="311" creationId="{00000000-0000-0000-0000-000000000000}"/>
-          </ac:picMkLst>
-        </pc:picChg>
       </pc:sldChg>
       <pc:sldChg chg="addSp delSp modSp mod modNotes">
         <pc:chgData name="ARJUN AVALAKKI MOHAN" userId="be4ab9aaf12c5868" providerId="LiveId" clId="{C81E60EF-EF5F-4B4B-A4E1-3178676F15CC}" dt="2026-05-24T06:03:31.527" v="1002" actId="14100"/>
@@ -734,14 +694,6 @@
             <pc:docMk/>
             <pc:sldMk cId="0" sldId="277"/>
             <ac:picMk id="3" creationId="{C9927469-411D-D575-839D-84C34A8510E9}"/>
-          </ac:picMkLst>
-        </pc:picChg>
-        <pc:picChg chg="del">
-          <ac:chgData name="ARJUN AVALAKKI MOHAN" userId="be4ab9aaf12c5868" providerId="LiveId" clId="{C81E60EF-EF5F-4B4B-A4E1-3178676F15CC}" dt="2026-05-24T06:02:59.447" v="985" actId="478"/>
-          <ac:picMkLst>
-            <pc:docMk/>
-            <pc:sldMk cId="0" sldId="277"/>
-            <ac:picMk id="318" creationId="{00000000-0000-0000-0000-000000000000}"/>
           </ac:picMkLst>
         </pc:picChg>
       </pc:sldChg>
@@ -767,23 +719,15 @@
             <ac:picMk id="3" creationId="{ACFCD5A7-D41D-6C52-2B9C-D691A8AA9C0D}"/>
           </ac:picMkLst>
         </pc:picChg>
-        <pc:picChg chg="del">
-          <ac:chgData name="ARJUN AVALAKKI MOHAN" userId="be4ab9aaf12c5868" providerId="LiveId" clId="{C81E60EF-EF5F-4B4B-A4E1-3178676F15CC}" dt="2026-05-24T06:05:21.764" v="1003" actId="478"/>
-          <ac:picMkLst>
-            <pc:docMk/>
-            <pc:sldMk cId="0" sldId="278"/>
-            <ac:picMk id="325" creationId="{00000000-0000-0000-0000-000000000000}"/>
-          </ac:picMkLst>
-        </pc:picChg>
       </pc:sldChg>
       <pc:sldChg chg="modSp mod modNotes">
-        <pc:chgData name="ARJUN AVALAKKI MOHAN" userId="be4ab9aaf12c5868" providerId="LiveId" clId="{C81E60EF-EF5F-4B4B-A4E1-3178676F15CC}" dt="2026-05-24T06:08:54.692" v="1027" actId="14100"/>
+        <pc:chgData name="ARJUN AVALAKKI MOHAN" userId="be4ab9aaf12c5868" providerId="LiveId" clId="{C81E60EF-EF5F-4B4B-A4E1-3178676F15CC}" dt="2026-05-26T04:42:54.778" v="1124" actId="1076"/>
         <pc:sldMkLst>
           <pc:docMk/>
           <pc:sldMk cId="0" sldId="279"/>
         </pc:sldMkLst>
         <pc:spChg chg="mod">
-          <ac:chgData name="ARJUN AVALAKKI MOHAN" userId="be4ab9aaf12c5868" providerId="LiveId" clId="{C81E60EF-EF5F-4B4B-A4E1-3178676F15CC}" dt="2026-05-24T06:08:54.692" v="1027" actId="14100"/>
+          <ac:chgData name="ARJUN AVALAKKI MOHAN" userId="be4ab9aaf12c5868" providerId="LiveId" clId="{C81E60EF-EF5F-4B4B-A4E1-3178676F15CC}" dt="2026-05-26T04:42:54.778" v="1124" actId="1076"/>
           <ac:spMkLst>
             <pc:docMk/>
             <pc:sldMk cId="0" sldId="279"/>
@@ -828,44 +772,12 @@
             <ac:spMk id="11" creationId="{97E99462-E313-08C0-92C2-6581D6E45DD1}"/>
           </ac:spMkLst>
         </pc:spChg>
-        <pc:picChg chg="add del mod">
-          <ac:chgData name="ARJUN AVALAKKI MOHAN" userId="be4ab9aaf12c5868" providerId="LiveId" clId="{C81E60EF-EF5F-4B4B-A4E1-3178676F15CC}" dt="2026-05-24T05:37:17.572" v="935" actId="478"/>
-          <ac:picMkLst>
-            <pc:docMk/>
-            <pc:sldMk cId="484767743" sldId="288"/>
-            <ac:picMk id="3" creationId="{C7EEF720-796D-98E9-C6CF-1B68DA78435F}"/>
-          </ac:picMkLst>
-        </pc:picChg>
-        <pc:picChg chg="del">
-          <ac:chgData name="ARJUN AVALAKKI MOHAN" userId="be4ab9aaf12c5868" providerId="LiveId" clId="{C81E60EF-EF5F-4B4B-A4E1-3178676F15CC}" dt="2026-05-24T05:29:58.375" v="928" actId="478"/>
-          <ac:picMkLst>
-            <pc:docMk/>
-            <pc:sldMk cId="484767743" sldId="288"/>
-            <ac:picMk id="4" creationId="{CC73533D-2F9C-7644-C31A-DD9AB972C2D8}"/>
-          </ac:picMkLst>
-        </pc:picChg>
-        <pc:picChg chg="add del mod">
-          <ac:chgData name="ARJUN AVALAKKI MOHAN" userId="be4ab9aaf12c5868" providerId="LiveId" clId="{C81E60EF-EF5F-4B4B-A4E1-3178676F15CC}" dt="2026-05-24T05:38:58.308" v="940" actId="478"/>
-          <ac:picMkLst>
-            <pc:docMk/>
-            <pc:sldMk cId="484767743" sldId="288"/>
-            <ac:picMk id="6" creationId="{6037F583-1076-4A43-642A-3448DBE7BF97}"/>
-          </ac:picMkLst>
-        </pc:picChg>
         <pc:picChg chg="add mod">
           <ac:chgData name="ARJUN AVALAKKI MOHAN" userId="be4ab9aaf12c5868" providerId="LiveId" clId="{C81E60EF-EF5F-4B4B-A4E1-3178676F15CC}" dt="2026-05-24T05:39:06.059" v="944" actId="14100"/>
           <ac:picMkLst>
             <pc:docMk/>
             <pc:sldMk cId="484767743" sldId="288"/>
             <ac:picMk id="8" creationId="{7506F691-7B00-3236-49B2-A466B351F89B}"/>
-          </ac:picMkLst>
-        </pc:picChg>
-        <pc:picChg chg="del">
-          <ac:chgData name="ARJUN AVALAKKI MOHAN" userId="be4ab9aaf12c5868" providerId="LiveId" clId="{C81E60EF-EF5F-4B4B-A4E1-3178676F15CC}" dt="2026-05-24T05:29:59.320" v="929" actId="478"/>
-          <ac:picMkLst>
-            <pc:docMk/>
-            <pc:sldMk cId="484767743" sldId="288"/>
-            <ac:picMk id="10" creationId="{691005A1-7CCE-407F-FBB7-4EED88154932}"/>
           </ac:picMkLst>
         </pc:picChg>
       </pc:sldChg>
@@ -33806,10 +33718,10 @@
               <a:buNone/>
             </a:pPr>
             <a:r>
-              <a:rPr lang="en"/>
+              <a:rPr lang="en" dirty="0"/>
               <a:t>CRUD</a:t>
             </a:r>
-            <a:endParaRPr/>
+            <a:endParaRPr dirty="0"/>
           </a:p>
         </p:txBody>
       </p:sp>
@@ -33825,8 +33737,8 @@
         </p:nvSpPr>
         <p:spPr>
           <a:xfrm>
-            <a:off x="264950" y="2253724"/>
-            <a:ext cx="7242600" cy="4035865"/>
+            <a:off x="264945" y="1964221"/>
+            <a:ext cx="7242600" cy="7223908"/>
           </a:xfrm>
           <a:prstGeom prst="rect">
             <a:avLst/>
@@ -33867,50 +33779,459 @@
           </a:p>
           <a:p>
             <a:pPr lvl="0" indent="0">
-              <a:spcBef>
-                <a:spcPts val="1600"/>
-              </a:spcBef>
               <a:buNone/>
             </a:pPr>
             <a:r>
-              <a:rPr lang="en-GB" sz="1400" dirty="0"/>
-              <a:t>- I would apply table security by creating database roles and granting salary table access only to authorized users such as HR or Payroll teams. </a:t>
-            </a:r>
-          </a:p>
-          <a:p>
-            <a:pPr lvl="0" indent="0">
-              <a:spcBef>
-                <a:spcPts val="1600"/>
-              </a:spcBef>
-              <a:buNone/>
-            </a:pPr>
-            <a:r>
-              <a:rPr lang="en-GB" sz="1400" dirty="0"/>
-              <a:t>- Regular users would be denied direct access to the </a:t>
+              <a:rPr lang="en-US" sz="1400" dirty="0">
+                <a:sym typeface="Open Sans"/>
+              </a:rPr>
+              <a:t>I would apply table-level security by creating separate database roles for normal users and HR or management users. Normal users should only have read-only access to non-sensitive tables such as employee, department, job, location, </a:t>
             </a:r>
             <a:r>
-              <a:rPr lang="en-GB" sz="1400" dirty="0" err="1"/>
+              <a:rPr lang="en-US" sz="1400" dirty="0" err="1">
+                <a:sym typeface="Open Sans"/>
+              </a:rPr>
+              <a:t>employee_job_history</a:t>
+            </a:r>
+            <a:r>
+              <a:rPr lang="en-US" sz="1400" dirty="0">
+                <a:sym typeface="Open Sans"/>
+              </a:rPr>
+              <a:t>, and </a:t>
+            </a:r>
+            <a:r>
+              <a:rPr lang="en-US" sz="1400" dirty="0" err="1">
+                <a:sym typeface="Open Sans"/>
+              </a:rPr>
+              <a:t>education_level</a:t>
+            </a:r>
+            <a:r>
+              <a:rPr lang="en-US" sz="1400" dirty="0">
+                <a:sym typeface="Open Sans"/>
+              </a:rPr>
+              <a:t>. They should not have access to the </a:t>
+            </a:r>
+            <a:r>
+              <a:rPr lang="en-US" sz="1400" dirty="0" err="1">
+                <a:sym typeface="Open Sans"/>
+              </a:rPr>
               <a:t>employee_salary</a:t>
             </a:r>
             <a:r>
-              <a:rPr lang="en-GB" sz="1400" dirty="0"/>
-              <a:t> table using REVOKE statements, while approved users would receive SELECT, INSERT, or UPDATE permissions as required. </a:t>
+              <a:rPr lang="en-US" sz="1400" dirty="0">
+                <a:sym typeface="Open Sans"/>
+              </a:rPr>
+              <a:t> table.</a:t>
             </a:r>
           </a:p>
           <a:p>
             <a:pPr lvl="0" indent="0">
-              <a:spcBef>
-                <a:spcPts val="1600"/>
+              <a:buNone/>
+            </a:pPr>
+            <a:endParaRPr lang="en-US" sz="1400" dirty="0">
+              <a:sym typeface="Open Sans"/>
+            </a:endParaRPr>
+          </a:p>
+          <a:p>
+            <a:pPr lvl="1" indent="0">
+              <a:spcBef>
+                <a:spcPts val="0"/>
               </a:spcBef>
               <a:buNone/>
             </a:pPr>
             <a:r>
-              <a:rPr lang="en-GB" sz="1400" dirty="0"/>
-              <a:t>- Additional security could include views to hide sensitive salary information and auditing to track who accesses salary data.</a:t>
+              <a:rPr lang="en-US" sz="1400" b="1" u="sng" dirty="0">
+                <a:sym typeface="Open Sans"/>
+              </a:rPr>
+              <a:t>Example SQL:</a:t>
             </a:r>
-            <a:endParaRPr sz="1400" dirty="0">
+          </a:p>
+          <a:p>
+            <a:pPr lvl="1" indent="0">
+              <a:spcBef>
+                <a:spcPts val="0"/>
+              </a:spcBef>
+              <a:buNone/>
+            </a:pPr>
+            <a:r>
+              <a:rPr lang="en-US" sz="1400" i="1" dirty="0">
+                <a:solidFill>
+                  <a:srgbClr val="FF0000"/>
+                </a:solidFill>
+                <a:sym typeface="Open Sans"/>
+              </a:rPr>
+              <a:t>CREATE ROLE </a:t>
+            </a:r>
+            <a:r>
+              <a:rPr lang="en-US" sz="1400" i="1" dirty="0" err="1">
+                <a:solidFill>
+                  <a:srgbClr val="FF0000"/>
+                </a:solidFill>
+                <a:sym typeface="Open Sans"/>
+              </a:rPr>
+              <a:t>readonly_user</a:t>
+            </a:r>
+            <a:r>
+              <a:rPr lang="en-US" sz="1400" i="1" dirty="0">
+                <a:solidFill>
+                  <a:srgbClr val="FF0000"/>
+                </a:solidFill>
+                <a:sym typeface="Open Sans"/>
+              </a:rPr>
+              <a:t>;</a:t>
+            </a:r>
+          </a:p>
+          <a:p>
+            <a:pPr lvl="1" indent="0">
+              <a:spcBef>
+                <a:spcPts val="0"/>
+              </a:spcBef>
+              <a:buNone/>
+            </a:pPr>
+            <a:r>
+              <a:rPr lang="en-US" sz="1400" i="1" dirty="0">
+                <a:solidFill>
+                  <a:srgbClr val="FF0000"/>
+                </a:solidFill>
+                <a:sym typeface="Open Sans"/>
+              </a:rPr>
+              <a:t>GRANT SELECT ON employee, department, job, location, </a:t>
+            </a:r>
+            <a:r>
+              <a:rPr lang="en-US" sz="1400" i="1" dirty="0" err="1">
+                <a:solidFill>
+                  <a:srgbClr val="FF0000"/>
+                </a:solidFill>
+                <a:sym typeface="Open Sans"/>
+              </a:rPr>
+              <a:t>employee_job_history</a:t>
+            </a:r>
+            <a:r>
+              <a:rPr lang="en-US" sz="1400" i="1" dirty="0">
+                <a:solidFill>
+                  <a:srgbClr val="FF0000"/>
+                </a:solidFill>
+                <a:sym typeface="Open Sans"/>
+              </a:rPr>
+              <a:t>, </a:t>
+            </a:r>
+            <a:r>
+              <a:rPr lang="en-US" sz="1400" i="1" dirty="0" err="1">
+                <a:solidFill>
+                  <a:srgbClr val="FF0000"/>
+                </a:solidFill>
+                <a:sym typeface="Open Sans"/>
+              </a:rPr>
+              <a:t>education_level</a:t>
+            </a:r>
+            <a:r>
+              <a:rPr lang="en-US" sz="1400" i="1" dirty="0">
+                <a:solidFill>
+                  <a:srgbClr val="FF0000"/>
+                </a:solidFill>
+                <a:sym typeface="Open Sans"/>
+              </a:rPr>
+              <a:t> TO </a:t>
+            </a:r>
+            <a:r>
+              <a:rPr lang="en-US" sz="1400" i="1" dirty="0" err="1">
+                <a:solidFill>
+                  <a:srgbClr val="FF0000"/>
+                </a:solidFill>
+                <a:sym typeface="Open Sans"/>
+              </a:rPr>
+              <a:t>readonly_user</a:t>
+            </a:r>
+            <a:r>
+              <a:rPr lang="en-US" sz="1400" i="1" dirty="0">
+                <a:solidFill>
+                  <a:srgbClr val="FF0000"/>
+                </a:solidFill>
+                <a:sym typeface="Open Sans"/>
+              </a:rPr>
+              <a:t>;</a:t>
+            </a:r>
+          </a:p>
+          <a:p>
+            <a:pPr lvl="1" indent="0">
+              <a:spcBef>
+                <a:spcPts val="0"/>
+              </a:spcBef>
+              <a:buNone/>
+            </a:pPr>
+            <a:r>
+              <a:rPr lang="en-US" sz="1400" i="1" dirty="0">
+                <a:solidFill>
+                  <a:srgbClr val="FF0000"/>
+                </a:solidFill>
+                <a:sym typeface="Open Sans"/>
+              </a:rPr>
+              <a:t>REVOKE ALL ON </a:t>
+            </a:r>
+            <a:r>
+              <a:rPr lang="en-US" sz="1400" i="1" dirty="0" err="1">
+                <a:solidFill>
+                  <a:srgbClr val="FF0000"/>
+                </a:solidFill>
+                <a:sym typeface="Open Sans"/>
+              </a:rPr>
+              <a:t>employee_salary</a:t>
+            </a:r>
+            <a:r>
+              <a:rPr lang="en-US" sz="1400" i="1" dirty="0">
+                <a:solidFill>
+                  <a:srgbClr val="FF0000"/>
+                </a:solidFill>
+                <a:sym typeface="Open Sans"/>
+              </a:rPr>
+              <a:t> FROM </a:t>
+            </a:r>
+            <a:r>
+              <a:rPr lang="en-US" sz="1400" i="1" dirty="0" err="1">
+                <a:solidFill>
+                  <a:srgbClr val="FF0000"/>
+                </a:solidFill>
+                <a:sym typeface="Open Sans"/>
+              </a:rPr>
+              <a:t>readonly_user</a:t>
+            </a:r>
+            <a:r>
+              <a:rPr lang="en-US" sz="1400" i="1" dirty="0">
+                <a:solidFill>
+                  <a:srgbClr val="FF0000"/>
+                </a:solidFill>
+                <a:sym typeface="Open Sans"/>
+              </a:rPr>
+              <a:t>;</a:t>
+            </a:r>
+          </a:p>
+          <a:p>
+            <a:pPr lvl="1" indent="0">
+              <a:spcBef>
+                <a:spcPts val="0"/>
+              </a:spcBef>
+              <a:buNone/>
+            </a:pPr>
+            <a:endParaRPr lang="en-US" sz="1400" dirty="0">
               <a:sym typeface="Open Sans"/>
             </a:endParaRPr>
+          </a:p>
+          <a:p>
+            <a:pPr indent="0">
+              <a:buNone/>
+            </a:pPr>
+            <a:r>
+              <a:rPr lang="en-US" sz="1400" dirty="0">
+                <a:sym typeface="Open Sans"/>
+              </a:rPr>
+              <a:t>For HR and management users, I would create a separate role with access to salary information.</a:t>
+            </a:r>
+          </a:p>
+          <a:p>
+            <a:pPr lvl="1" indent="0">
+              <a:spcBef>
+                <a:spcPts val="0"/>
+              </a:spcBef>
+              <a:buNone/>
+            </a:pPr>
+            <a:endParaRPr lang="en-US" sz="1400" dirty="0">
+              <a:sym typeface="Open Sans"/>
+            </a:endParaRPr>
+          </a:p>
+          <a:p>
+            <a:pPr lvl="1" indent="0">
+              <a:spcBef>
+                <a:spcPts val="0"/>
+              </a:spcBef>
+              <a:buNone/>
+            </a:pPr>
+            <a:r>
+              <a:rPr lang="en-US" sz="1400" b="1" u="sng" dirty="0">
+                <a:sym typeface="Open Sans"/>
+              </a:rPr>
+              <a:t>Example SQL:</a:t>
+            </a:r>
+          </a:p>
+          <a:p>
+            <a:pPr lvl="1" indent="0">
+              <a:spcBef>
+                <a:spcPts val="0"/>
+              </a:spcBef>
+              <a:buNone/>
+            </a:pPr>
+            <a:r>
+              <a:rPr lang="en-US" sz="1400" i="1" dirty="0">
+                <a:solidFill>
+                  <a:srgbClr val="FF0000"/>
+                </a:solidFill>
+                <a:sym typeface="Open Sans"/>
+              </a:rPr>
+              <a:t>CREATE ROLE </a:t>
+            </a:r>
+            <a:r>
+              <a:rPr lang="en-US" sz="1400" i="1" dirty="0" err="1">
+                <a:solidFill>
+                  <a:srgbClr val="FF0000"/>
+                </a:solidFill>
+                <a:sym typeface="Open Sans"/>
+              </a:rPr>
+              <a:t>hr_manager</a:t>
+            </a:r>
+            <a:r>
+              <a:rPr lang="en-US" sz="1400" i="1" dirty="0">
+                <a:solidFill>
+                  <a:srgbClr val="FF0000"/>
+                </a:solidFill>
+                <a:sym typeface="Open Sans"/>
+              </a:rPr>
+              <a:t>;</a:t>
+            </a:r>
+          </a:p>
+          <a:p>
+            <a:pPr lvl="1" indent="0">
+              <a:spcBef>
+                <a:spcPts val="0"/>
+              </a:spcBef>
+              <a:buNone/>
+            </a:pPr>
+            <a:r>
+              <a:rPr lang="en-US" sz="1400" i="1" dirty="0">
+                <a:solidFill>
+                  <a:srgbClr val="FF0000"/>
+                </a:solidFill>
+                <a:sym typeface="Open Sans"/>
+              </a:rPr>
+              <a:t>GRANT SELECT, INSERT, UPDATE ON </a:t>
+            </a:r>
+            <a:r>
+              <a:rPr lang="en-US" sz="1400" i="1" dirty="0" err="1">
+                <a:solidFill>
+                  <a:srgbClr val="FF0000"/>
+                </a:solidFill>
+                <a:sym typeface="Open Sans"/>
+              </a:rPr>
+              <a:t>employee_salary</a:t>
+            </a:r>
+            <a:r>
+              <a:rPr lang="en-US" sz="1400" i="1" dirty="0">
+                <a:solidFill>
+                  <a:srgbClr val="FF0000"/>
+                </a:solidFill>
+                <a:sym typeface="Open Sans"/>
+              </a:rPr>
+              <a:t> TO </a:t>
+            </a:r>
+            <a:r>
+              <a:rPr lang="en-US" sz="1400" i="1" dirty="0" err="1">
+                <a:solidFill>
+                  <a:srgbClr val="FF0000"/>
+                </a:solidFill>
+                <a:sym typeface="Open Sans"/>
+              </a:rPr>
+              <a:t>hr_manager</a:t>
+            </a:r>
+            <a:r>
+              <a:rPr lang="en-US" sz="1400" i="1" dirty="0">
+                <a:solidFill>
+                  <a:srgbClr val="FF0000"/>
+                </a:solidFill>
+                <a:sym typeface="Open Sans"/>
+              </a:rPr>
+              <a:t>;</a:t>
+            </a:r>
+          </a:p>
+          <a:p>
+            <a:pPr lvl="1" indent="0">
+              <a:spcBef>
+                <a:spcPts val="0"/>
+              </a:spcBef>
+              <a:buNone/>
+            </a:pPr>
+            <a:r>
+              <a:rPr lang="en-US" sz="1400" i="1" dirty="0">
+                <a:solidFill>
+                  <a:srgbClr val="FF0000"/>
+                </a:solidFill>
+                <a:sym typeface="Open Sans"/>
+              </a:rPr>
+              <a:t>GRANT SELECT, INSERT, UPDATE ON employee, department, job, location, </a:t>
+            </a:r>
+            <a:r>
+              <a:rPr lang="en-US" sz="1400" i="1" dirty="0" err="1">
+                <a:solidFill>
+                  <a:srgbClr val="FF0000"/>
+                </a:solidFill>
+                <a:sym typeface="Open Sans"/>
+              </a:rPr>
+              <a:t>employee_job_history</a:t>
+            </a:r>
+            <a:r>
+              <a:rPr lang="en-US" sz="1400" i="1" dirty="0">
+                <a:solidFill>
+                  <a:srgbClr val="FF0000"/>
+                </a:solidFill>
+                <a:sym typeface="Open Sans"/>
+              </a:rPr>
+              <a:t>, </a:t>
+            </a:r>
+            <a:r>
+              <a:rPr lang="en-US" sz="1400" i="1" dirty="0" err="1">
+                <a:solidFill>
+                  <a:srgbClr val="FF0000"/>
+                </a:solidFill>
+                <a:sym typeface="Open Sans"/>
+              </a:rPr>
+              <a:t>education_level</a:t>
+            </a:r>
+            <a:r>
+              <a:rPr lang="en-US" sz="1400" i="1" dirty="0">
+                <a:solidFill>
+                  <a:srgbClr val="FF0000"/>
+                </a:solidFill>
+                <a:sym typeface="Open Sans"/>
+              </a:rPr>
+              <a:t> TO </a:t>
+            </a:r>
+            <a:r>
+              <a:rPr lang="en-US" sz="1400" i="1" dirty="0" err="1">
+                <a:solidFill>
+                  <a:srgbClr val="FF0000"/>
+                </a:solidFill>
+                <a:sym typeface="Open Sans"/>
+              </a:rPr>
+              <a:t>hr_manager</a:t>
+            </a:r>
+            <a:r>
+              <a:rPr lang="en-US" sz="1400" i="1" dirty="0">
+                <a:solidFill>
+                  <a:srgbClr val="FF0000"/>
+                </a:solidFill>
+                <a:sym typeface="Open Sans"/>
+              </a:rPr>
+              <a:t>;</a:t>
+            </a:r>
+          </a:p>
+          <a:p>
+            <a:pPr lvl="0" indent="0">
+              <a:buNone/>
+            </a:pPr>
+            <a:endParaRPr lang="en-US" sz="1400" i="1" dirty="0">
+              <a:solidFill>
+                <a:srgbClr val="FF0000"/>
+              </a:solidFill>
+              <a:sym typeface="Open Sans"/>
+            </a:endParaRPr>
+          </a:p>
+          <a:p>
+            <a:pPr lvl="0" indent="0">
+              <a:buNone/>
+            </a:pPr>
+            <a:r>
+              <a:rPr lang="en-US" sz="1400" dirty="0">
+                <a:sym typeface="Open Sans"/>
+              </a:rPr>
+              <a:t>This approach ensures that only authorized users can access or update sensitive employee salary information.</a:t>
+            </a:r>
           </a:p>
           <a:p>
             <a:pPr marL="0" lvl="0" indent="0" algn="l" rtl="0">
